--- a/CPU.pptx
+++ b/CPU.pptx
@@ -6,10 +6,13 @@
   </p:sldMasterIdLst>
   <p:sldIdLst>
     <p:sldId id="258" r:id="rId2"/>
-    <p:sldId id="259" r:id="rId3"/>
-    <p:sldId id="256" r:id="rId4"/>
-    <p:sldId id="257" r:id="rId5"/>
-    <p:sldId id="260" r:id="rId6"/>
+    <p:sldId id="262" r:id="rId3"/>
+    <p:sldId id="259" r:id="rId4"/>
+    <p:sldId id="261" r:id="rId5"/>
+    <p:sldId id="263" r:id="rId6"/>
+    <p:sldId id="256" r:id="rId7"/>
+    <p:sldId id="257" r:id="rId8"/>
+    <p:sldId id="260" r:id="rId9"/>
   </p:sldIdLst>
   <p:sldSz cx="12192000" cy="6858000"/>
   <p:notesSz cx="6858000" cy="9144000"/>
@@ -108,7 +111,20 @@
       </a:defRPr>
     </a:lvl9pPr>
   </p:defaultTextStyle>
+  <p:extLst>
+    <p:ext uri="{EFAFB233-063F-42B5-8137-9DF3F51BA10A}">
+      <p15:sldGuideLst xmlns:p15="http://schemas.microsoft.com/office/powerpoint/2012/main"/>
+    </p:ext>
+  </p:extLst>
 </p:presentation>
+</file>
+
+<file path=ppt/revisionInfo.xml><?xml version="1.0" encoding="utf-8"?>
+<p1510:revInfo xmlns:a="http://schemas.openxmlformats.org/drawingml/2006/main" xmlns:r="http://schemas.openxmlformats.org/officeDocument/2006/relationships" xmlns:p1510="http://schemas.microsoft.com/office/powerpoint/2015/10/main">
+  <p1510:revLst>
+    <p1510:client id="{884BFC52-C2B6-4E80-97F1-4FFC6E696233}" v="612" dt="2026-03-05T01:56:12.057"/>
+  </p1510:revLst>
+</p1510:revInfo>
 </file>
 
 <file path=ppt/slideLayouts/slideLayout1.xml><?xml version="1.0" encoding="utf-8"?>
@@ -3343,8 +3359,8 @@
         </p:nvSpPr>
         <p:spPr>
           <a:xfrm>
-            <a:off x="1234867" y="1741121"/>
-            <a:ext cx="9722265" cy="794927"/>
+            <a:off x="1070344" y="1481349"/>
+            <a:ext cx="10311083" cy="803586"/>
           </a:xfrm>
         </p:spPr>
         <p:txBody>
@@ -3407,7 +3423,7 @@
         <p:spPr>
           <a:xfrm>
             <a:off x="1452785" y="3123474"/>
-            <a:ext cx="9465890" cy="1655762"/>
+            <a:ext cx="9924821" cy="1655762"/>
           </a:xfrm>
         </p:spPr>
         <p:txBody>
@@ -3524,74 +3540,83 @@
           <a:chExt cx="0" cy="0"/>
         </a:xfrm>
       </p:grpSpPr>
-      <p:sp>
-        <p:nvSpPr>
-          <p:cNvPr id="2" name="标题 1">
-            <a:extLst>
-              <a:ext uri="{FF2B5EF4-FFF2-40B4-BE49-F238E27FC236}">
-                <a16:creationId xmlns:a16="http://schemas.microsoft.com/office/drawing/2014/main" id="{2FE716DE-E531-0FF8-BF73-876599504318}"/>
-              </a:ext>
-            </a:extLst>
-          </p:cNvPr>
-          <p:cNvSpPr>
-            <a:spLocks noGrp="1"/>
-          </p:cNvSpPr>
-          <p:nvPr>
-            <p:ph type="title"/>
-          </p:nvPr>
-        </p:nvSpPr>
-        <p:spPr/>
-        <p:txBody>
-          <a:bodyPr/>
-          <a:lstStyle/>
-          <a:p>
-            <a:r>
-              <a:rPr lang="zh-CN" altLang="en-US" dirty="0">
-                <a:latin typeface="Calibri" panose="020F0502020204030204" pitchFamily="34" charset="0"/>
-                <a:cs typeface="Calibri" panose="020F0502020204030204" pitchFamily="34" charset="0"/>
-              </a:rPr>
-              <a:t>协同计算背景调研：</a:t>
-            </a:r>
-          </a:p>
-        </p:txBody>
-      </p:sp>
-      <p:sp>
-        <p:nvSpPr>
-          <p:cNvPr id="3" name="内容占位符 2">
-            <a:extLst>
-              <a:ext uri="{FF2B5EF4-FFF2-40B4-BE49-F238E27FC236}">
-                <a16:creationId xmlns:a16="http://schemas.microsoft.com/office/drawing/2014/main" id="{F57954B7-7CA7-5670-41EC-8E3A7A9D2CFA}"/>
-              </a:ext>
-            </a:extLst>
-          </p:cNvPr>
-          <p:cNvSpPr>
-            <a:spLocks noGrp="1"/>
-          </p:cNvSpPr>
+      <p:pic>
+        <p:nvPicPr>
+          <p:cNvPr id="4" name="内容占位符 3" descr="图示&#10;&#10;AI 生成的内容可能不正确。">
+            <a:extLst>
+              <a:ext uri="{FF2B5EF4-FFF2-40B4-BE49-F238E27FC236}">
+                <a16:creationId xmlns:a16="http://schemas.microsoft.com/office/drawing/2014/main" id="{24B11E3D-956D-CEC6-B981-29413B4E9943}"/>
+              </a:ext>
+            </a:extLst>
+          </p:cNvPr>
+          <p:cNvPicPr>
+            <a:picLocks noGrp="1" noChangeAspect="1"/>
+          </p:cNvPicPr>
           <p:nvPr>
             <p:ph idx="1"/>
           </p:nvPr>
-        </p:nvSpPr>
+        </p:nvPicPr>
+        <p:blipFill>
+          <a:blip r:embed="rId2"/>
+          <a:stretch>
+            <a:fillRect/>
+          </a:stretch>
+        </p:blipFill>
         <p:spPr>
           <a:xfrm>
-            <a:off x="838200" y="1517977"/>
-            <a:ext cx="10515600" cy="4351338"/>
+            <a:off x="373251" y="980295"/>
+            <a:ext cx="11445498" cy="3833491"/>
           </a:xfrm>
+          <a:prstGeom prst="rect">
+            <a:avLst/>
+          </a:prstGeom>
         </p:spPr>
-        <p:txBody>
-          <a:bodyPr/>
-          <a:lstStyle/>
-          <a:p>
-            <a:pPr marL="0" indent="0">
-              <a:buNone/>
-            </a:pPr>
-            <a:endParaRPr lang="zh-CN" altLang="en-US" dirty="0"/>
+      </p:pic>
+      <p:sp>
+        <p:nvSpPr>
+          <p:cNvPr id="5" name="文本框 4">
+            <a:extLst>
+              <a:ext uri="{FF2B5EF4-FFF2-40B4-BE49-F238E27FC236}">
+                <a16:creationId xmlns:a16="http://schemas.microsoft.com/office/drawing/2014/main" id="{322310C2-A983-54FC-CD8A-EBE27718555D}"/>
+              </a:ext>
+            </a:extLst>
+          </p:cNvPr>
+          <p:cNvSpPr txBox="1"/>
+          <p:nvPr/>
+        </p:nvSpPr>
+        <p:spPr>
+          <a:xfrm>
+            <a:off x="840449" y="4815549"/>
+            <a:ext cx="6626079" cy="369332"/>
+          </a:xfrm>
+          <a:prstGeom prst="rect">
+            <a:avLst/>
+          </a:prstGeom>
+          <a:noFill/>
+        </p:spPr>
+        <p:txBody>
+          <a:bodyPr rot="0" spcFirstLastPara="0" vertOverflow="overflow" horzOverflow="overflow" vert="horz" wrap="square" lIns="91440" tIns="45720" rIns="91440" bIns="45720" numCol="1" spcCol="0" rtlCol="0" fromWordArt="0" anchor="t" anchorCtr="0" forceAA="0" compatLnSpc="1">
+            <a:prstTxWarp prst="textNoShape">
+              <a:avLst/>
+            </a:prstTxWarp>
+            <a:spAutoFit/>
+          </a:bodyPr>
+          <a:lstStyle/>
+          <a:p>
+            <a:r>
+              <a:rPr lang="zh-CN" altLang="en-US">
+                <a:ea typeface="等线"/>
+              </a:rPr>
+              <a:t>*图片来源：Fiddler论文</a:t>
+            </a:r>
+            <a:endParaRPr lang="zh-CN" altLang="en-US"/>
           </a:p>
         </p:txBody>
       </p:sp>
     </p:spTree>
     <p:extLst>
       <p:ext uri="{BB962C8B-B14F-4D97-AF65-F5344CB8AC3E}">
-        <p14:creationId xmlns:p14="http://schemas.microsoft.com/office/powerpoint/2010/main" val="3210423444"/>
+        <p14:creationId xmlns:p14="http://schemas.microsoft.com/office/powerpoint/2010/main" val="1972376264"/>
       </p:ext>
     </p:extLst>
   </p:cSld>
@@ -3623,15 +3648,15 @@
           <p:cNvPr id="2" name="标题 1">
             <a:extLst>
               <a:ext uri="{FF2B5EF4-FFF2-40B4-BE49-F238E27FC236}">
-                <a16:creationId xmlns:a16="http://schemas.microsoft.com/office/drawing/2014/main" id="{F811F79C-D96F-23C1-0762-83DD4B4E105A}"/>
-              </a:ext>
-            </a:extLst>
-          </p:cNvPr>
-          <p:cNvSpPr>
-            <a:spLocks noGrp="1"/>
-          </p:cNvSpPr>
-          <p:nvPr>
-            <p:ph type="ctrTitle"/>
+                <a16:creationId xmlns:a16="http://schemas.microsoft.com/office/drawing/2014/main" id="{2FE716DE-E531-0FF8-BF73-876599504318}"/>
+              </a:ext>
+            </a:extLst>
+          </p:cNvPr>
+          <p:cNvSpPr>
+            <a:spLocks noGrp="1"/>
+          </p:cNvSpPr>
+          <p:nvPr>
+            <p:ph type="title"/>
           </p:nvPr>
         </p:nvSpPr>
         <p:spPr/>
@@ -3639,41 +3664,133 @@
           <a:bodyPr/>
           <a:lstStyle/>
           <a:p>
-            <a:endParaRPr lang="zh-CN" altLang="en-US"/>
-          </a:p>
-        </p:txBody>
-      </p:sp>
-      <p:sp>
-        <p:nvSpPr>
-          <p:cNvPr id="3" name="副标题 2">
-            <a:extLst>
-              <a:ext uri="{FF2B5EF4-FFF2-40B4-BE49-F238E27FC236}">
-                <a16:creationId xmlns:a16="http://schemas.microsoft.com/office/drawing/2014/main" id="{F747E58C-B5C8-5EC9-194A-99D02C37F688}"/>
-              </a:ext>
-            </a:extLst>
-          </p:cNvPr>
-          <p:cNvSpPr>
-            <a:spLocks noGrp="1"/>
-          </p:cNvSpPr>
-          <p:nvPr>
-            <p:ph type="subTitle" idx="1"/>
-          </p:nvPr>
-        </p:nvSpPr>
-        <p:spPr/>
-        <p:txBody>
-          <a:bodyPr/>
-          <a:lstStyle/>
-          <a:p>
-            <a:endParaRPr lang="zh-CN" altLang="en-US"/>
+            <a:r>
+              <a:rPr lang="zh-CN">
+                <a:ea typeface="+mj-lt"/>
+                <a:cs typeface="+mj-lt"/>
+              </a:rPr>
+              <a:t>Fiddler:</a:t>
+            </a:r>
+            <a:endParaRPr lang="zh-CN" altLang="en-US">
+              <a:latin typeface="Calibri"/>
+              <a:ea typeface="等线 Light"/>
+              <a:cs typeface="Calibri"/>
+            </a:endParaRPr>
+          </a:p>
+        </p:txBody>
+      </p:sp>
+      <p:sp>
+        <p:nvSpPr>
+          <p:cNvPr id="3" name="内容占位符 2">
+            <a:extLst>
+              <a:ext uri="{FF2B5EF4-FFF2-40B4-BE49-F238E27FC236}">
+                <a16:creationId xmlns:a16="http://schemas.microsoft.com/office/drawing/2014/main" id="{F57954B7-7CA7-5670-41EC-8E3A7A9D2CFA}"/>
+              </a:ext>
+            </a:extLst>
+          </p:cNvPr>
+          <p:cNvSpPr>
+            <a:spLocks noGrp="1"/>
+          </p:cNvSpPr>
+          <p:nvPr>
+            <p:ph idx="1"/>
+          </p:nvPr>
+        </p:nvSpPr>
+        <p:spPr>
+          <a:xfrm>
+            <a:off x="838200" y="1035092"/>
+            <a:ext cx="10515600" cy="4351338"/>
+          </a:xfrm>
+        </p:spPr>
+        <p:txBody>
+          <a:bodyPr vert="horz" lIns="91440" tIns="45720" rIns="91440" bIns="45720" rtlCol="0" anchor="t">
+            <a:normAutofit/>
+          </a:bodyPr>
+          <a:lstStyle/>
+          <a:p>
+            <a:pPr marL="0" indent="0">
+              <a:buNone/>
+            </a:pPr>
+            <a:r>
+              <a:rPr lang="zh-CN" altLang="en-US" dirty="0">
+                <a:ea typeface="等线"/>
+              </a:rPr>
+              <a:t> </a:t>
+            </a:r>
+            <a:endParaRPr lang="zh-CN" altLang="en-US" dirty="0">
+              <a:ea typeface="等线" panose="02010600030101010101" pitchFamily="2" charset="-122"/>
+            </a:endParaRPr>
+          </a:p>
+          <a:p>
+            <a:pPr marL="0" indent="0">
+              <a:buNone/>
+            </a:pPr>
+            <a:r>
+              <a:rPr lang="zh-CN" altLang="en-US" sz="3200">
+                <a:ea typeface="等线"/>
+              </a:rPr>
+              <a:t>常驻哪些专家？</a:t>
+            </a:r>
+          </a:p>
+          <a:p>
+            <a:pPr marL="0" indent="0">
+              <a:buNone/>
+            </a:pPr>
+            <a:r>
+              <a:rPr lang="zh-CN" altLang="en-US" sz="3200">
+                <a:ea typeface="等线"/>
+              </a:rPr>
+              <a:t>  GPU静态储存热点专家 </a:t>
+            </a:r>
+          </a:p>
+          <a:p>
+            <a:pPr marL="0" indent="0">
+              <a:buNone/>
+            </a:pPr>
+            <a:r>
+              <a:rPr lang="zh-CN" altLang="en-US" sz="3200">
+                <a:ea typeface="等线"/>
+              </a:rPr>
+              <a:t>  Vram空余一个专家位置灵活卸载</a:t>
+            </a:r>
+          </a:p>
+          <a:p>
+            <a:pPr marL="0" indent="0">
+              <a:buNone/>
+            </a:pPr>
+            <a:r>
+              <a:rPr lang="zh-CN" altLang="en-US" sz="3200">
+                <a:ea typeface="等线"/>
+              </a:rPr>
+              <a:t>决策在哪跑？</a:t>
+            </a:r>
+          </a:p>
+          <a:p>
+            <a:pPr marL="0" indent="0">
+              <a:buNone/>
+            </a:pPr>
+            <a:r>
+              <a:rPr lang="zh-CN" altLang="en-US" sz="3200" dirty="0">
+                <a:ea typeface="等线"/>
+              </a:rPr>
+              <a:t>           </a:t>
+            </a:r>
+          </a:p>
+          <a:p>
+            <a:pPr marL="0" indent="0">
+              <a:buNone/>
+            </a:pPr>
+            <a:endParaRPr lang="zh-CN" altLang="en-US" dirty="0">
+              <a:ea typeface="等线"/>
+            </a:endParaRPr>
           </a:p>
         </p:txBody>
       </p:sp>
       <p:pic>
         <p:nvPicPr>
-          <p:cNvPr id="15" name="图片 14">
-            <a:extLst>
-              <a:ext uri="{FF2B5EF4-FFF2-40B4-BE49-F238E27FC236}">
-                <a16:creationId xmlns:a16="http://schemas.microsoft.com/office/drawing/2014/main" id="{AD914756-79B3-BB36-4A11-39EAECEF666B}"/>
+          <p:cNvPr id="4" name="图片 3" descr="文本, 信件&#10;&#10;AI 生成的内容可能不正确。">
+            <a:extLst>
+              <a:ext uri="{FF2B5EF4-FFF2-40B4-BE49-F238E27FC236}">
+                <a16:creationId xmlns:a16="http://schemas.microsoft.com/office/drawing/2014/main" id="{8257AF6A-F362-0971-0754-7BAD7A2A53A5}"/>
               </a:ext>
             </a:extLst>
           </p:cNvPr>
@@ -3690,8 +3807,554 @@
         </p:blipFill>
         <p:spPr>
           <a:xfrm>
-            <a:off x="477847" y="494089"/>
-            <a:ext cx="12192000" cy="2628680"/>
+            <a:off x="1614407" y="3956940"/>
+            <a:ext cx="7607085" cy="2521646"/>
+          </a:xfrm>
+          <a:prstGeom prst="rect">
+            <a:avLst/>
+          </a:prstGeom>
+        </p:spPr>
+      </p:pic>
+    </p:spTree>
+    <p:extLst>
+      <p:ext uri="{BB962C8B-B14F-4D97-AF65-F5344CB8AC3E}">
+        <p14:creationId xmlns:p14="http://schemas.microsoft.com/office/powerpoint/2010/main" val="3210423444"/>
+      </p:ext>
+    </p:extLst>
+  </p:cSld>
+  <p:clrMapOvr>
+    <a:masterClrMapping/>
+  </p:clrMapOvr>
+</p:sld>
+</file>
+
+<file path=ppt/slides/slide4.xml><?xml version="1.0" encoding="utf-8"?>
+<p:sld xmlns:a="http://schemas.openxmlformats.org/drawingml/2006/main" xmlns:r="http://schemas.openxmlformats.org/officeDocument/2006/relationships" xmlns:p="http://schemas.openxmlformats.org/presentationml/2006/main">
+  <p:cSld>
+    <p:bg>
+      <p:bgPr>
+        <a:solidFill>
+          <a:schemeClr val="bg1"/>
+        </a:solidFill>
+        <a:effectLst/>
+      </p:bgPr>
+    </p:bg>
+    <p:spTree>
+      <p:nvGrpSpPr>
+        <p:cNvPr id="1" name=""/>
+        <p:cNvGrpSpPr/>
+        <p:nvPr/>
+      </p:nvGrpSpPr>
+      <p:grpSpPr>
+        <a:xfrm>
+          <a:off x="0" y="0"/>
+          <a:ext cx="0" cy="0"/>
+          <a:chOff x="0" y="0"/>
+          <a:chExt cx="0" cy="0"/>
+        </a:xfrm>
+      </p:grpSpPr>
+      <p:sp>
+        <p:nvSpPr>
+          <p:cNvPr id="8" name="Content Placeholder 7">
+            <a:extLst>
+              <a:ext uri="{FF2B5EF4-FFF2-40B4-BE49-F238E27FC236}">
+                <a16:creationId xmlns:a16="http://schemas.microsoft.com/office/drawing/2014/main" id="{9D7F25D8-53C6-6F67-1B11-3FE146CFC87B}"/>
+              </a:ext>
+            </a:extLst>
+          </p:cNvPr>
+          <p:cNvSpPr>
+            <a:spLocks noGrp="1"/>
+          </p:cNvSpPr>
+          <p:nvPr>
+            <p:ph idx="1"/>
+          </p:nvPr>
+        </p:nvSpPr>
+        <p:spPr>
+          <a:xfrm>
+            <a:off x="244873" y="1124538"/>
+            <a:ext cx="4789320" cy="3478212"/>
+          </a:xfrm>
+        </p:spPr>
+        <p:txBody>
+          <a:bodyPr anchor="t">
+            <a:normAutofit/>
+          </a:bodyPr>
+          <a:lstStyle/>
+          <a:p>
+            <a:pPr marL="0" indent="0">
+              <a:buNone/>
+            </a:pPr>
+            <a:endParaRPr lang="zh-CN" altLang="en-US" sz="2000" dirty="0">
+              <a:ea typeface="等线" panose="02110004020202020204"/>
+            </a:endParaRPr>
+          </a:p>
+          <a:p>
+            <a:pPr marL="0" indent="0">
+              <a:buNone/>
+            </a:pPr>
+            <a:r>
+              <a:rPr lang="zh-CN" altLang="en-US" sz="2400">
+                <a:ea typeface="等线" panose="02110004020202020204"/>
+              </a:rPr>
+              <a:t>每一个代价如何近似？</a:t>
+            </a:r>
+            <a:endParaRPr lang="zh-CN" altLang="en-US" sz="2400" dirty="0">
+              <a:ea typeface="等线" panose="02110004020202020204"/>
+            </a:endParaRPr>
+          </a:p>
+          <a:p>
+            <a:pPr marL="0" indent="0">
+              <a:buNone/>
+            </a:pPr>
+            <a:br>
+              <a:rPr lang="zh-CN" altLang="en-US" sz="2000" dirty="0">
+                <a:ea typeface="等线" panose="02110004020202020204"/>
+              </a:rPr>
+            </a:br>
+            <a:r>
+              <a:rPr lang="zh-CN" altLang="en-US" sz="2400">
+                <a:latin typeface="等线"/>
+                <a:ea typeface="等线" panose="02110004020202020204"/>
+                <a:cs typeface="Segoe UI"/>
+              </a:rPr>
+              <a:t>cpu侧 = CONST_0  *  token_num</a:t>
+            </a:r>
+            <a:endParaRPr lang="zh-CN" sz="2400">
+              <a:ea typeface="等线"/>
+            </a:endParaRPr>
+          </a:p>
+          <a:p>
+            <a:pPr marL="0" indent="0">
+              <a:buNone/>
+            </a:pPr>
+            <a:r>
+              <a:rPr lang="en-US" altLang="zh-CN" sz="2400" err="1">
+                <a:latin typeface="等线"/>
+                <a:ea typeface="等线" panose="02110004020202020204"/>
+                <a:cs typeface="Segoe UI"/>
+              </a:rPr>
+              <a:t>gpu侧</a:t>
+            </a:r>
+            <a:r>
+              <a:rPr lang="zh-CN" sz="2400">
+                <a:latin typeface="等线"/>
+                <a:ea typeface="等线" panose="02110004020202020204"/>
+                <a:cs typeface="Segoe UI"/>
+              </a:rPr>
+              <a:t> = CONST_1 </a:t>
+            </a:r>
+            <a:endParaRPr lang="zh-CN" sz="2400">
+              <a:ea typeface="等线"/>
+            </a:endParaRPr>
+          </a:p>
+        </p:txBody>
+      </p:sp>
+      <p:pic>
+        <p:nvPicPr>
+          <p:cNvPr id="4" name="内容占位符 3" descr="图示&#10;&#10;AI 生成的内容可能不正确。">
+            <a:extLst>
+              <a:ext uri="{FF2B5EF4-FFF2-40B4-BE49-F238E27FC236}">
+                <a16:creationId xmlns:a16="http://schemas.microsoft.com/office/drawing/2014/main" id="{2A894ED8-49F0-AECF-EC2B-33A1108C92A5}"/>
+              </a:ext>
+            </a:extLst>
+          </p:cNvPr>
+          <p:cNvPicPr>
+            <a:picLocks noChangeAspect="1"/>
+          </p:cNvPicPr>
+          <p:nvPr/>
+        </p:nvPicPr>
+        <p:blipFill>
+          <a:blip r:embed="rId2"/>
+          <a:stretch>
+            <a:fillRect/>
+          </a:stretch>
+        </p:blipFill>
+        <p:spPr>
+          <a:xfrm>
+            <a:off x="4987672" y="814023"/>
+            <a:ext cx="6389346" cy="5239263"/>
+          </a:xfrm>
+          <a:prstGeom prst="rect">
+            <a:avLst/>
+          </a:prstGeom>
+        </p:spPr>
+      </p:pic>
+      <p:grpSp>
+        <p:nvGrpSpPr>
+          <p:cNvPr id="11" name="Group 10">
+            <a:extLst>
+              <a:ext uri="{FF2B5EF4-FFF2-40B4-BE49-F238E27FC236}">
+                <a16:creationId xmlns:a16="http://schemas.microsoft.com/office/drawing/2014/main" id="{6258F736-B256-8039-9DC6-F4E49A5C5AD5}"/>
+              </a:ext>
+              <a:ext uri="{C183D7F6-B498-43B3-948B-1728B52AA6E4}">
+                <adec:decorative xmlns:adec="http://schemas.microsoft.com/office/drawing/2017/decorative" val="1"/>
+              </a:ext>
+            </a:extLst>
+          </p:cNvPr>
+          <p:cNvGrpSpPr>
+            <a:grpSpLocks noGrp="1" noUngrp="1" noRot="1" noChangeAspect="1" noMove="1" noResize="1"/>
+          </p:cNvGrpSpPr>
+          <p:nvPr>
+            <p:extLst>
+              <p:ext uri="{386F3935-93C4-4BCD-93E2-E3B085C9AB24}">
+                <p16:designElem xmlns:p16="http://schemas.microsoft.com/office/powerpoint/2015/main" val="1"/>
+              </p:ext>
+            </p:extLst>
+          </p:nvPr>
+        </p:nvGrpSpPr>
+        <p:grpSpPr>
+          <a:xfrm flipH="1">
+            <a:off x="12068638" y="0"/>
+            <a:ext cx="123362" cy="6858000"/>
+            <a:chOff x="12068638" y="0"/>
+            <a:chExt cx="123362" cy="6858000"/>
+          </a:xfrm>
+        </p:grpSpPr>
+        <p:sp>
+          <p:nvSpPr>
+            <p:cNvPr id="12" name="Rectangle 11">
+              <a:extLst>
+                <a:ext uri="{FF2B5EF4-FFF2-40B4-BE49-F238E27FC236}">
+                  <a16:creationId xmlns:a16="http://schemas.microsoft.com/office/drawing/2014/main" id="{10B4520A-996E-330C-99DA-69CA4D89E906}"/>
+                </a:ext>
+                <a:ext uri="{C183D7F6-B498-43B3-948B-1728B52AA6E4}">
+                  <adec:decorative xmlns:adec="http://schemas.microsoft.com/office/drawing/2017/decorative" val="1"/>
+                </a:ext>
+              </a:extLst>
+            </p:cNvPr>
+            <p:cNvSpPr/>
+            <p:nvPr>
+              <p:extLst>
+                <p:ext uri="{386F3935-93C4-4BCD-93E2-E3B085C9AB24}">
+                  <p16:designElem xmlns:p16="http://schemas.microsoft.com/office/powerpoint/2015/main" val="1"/>
+                </p:ext>
+              </p:extLst>
+            </p:nvPr>
+          </p:nvSpPr>
+          <p:spPr>
+            <a:xfrm>
+              <a:off x="12068638" y="0"/>
+              <a:ext cx="123362" cy="6858000"/>
+            </a:xfrm>
+            <a:prstGeom prst="rect">
+              <a:avLst/>
+            </a:prstGeom>
+            <a:gradFill>
+              <a:gsLst>
+                <a:gs pos="0">
+                  <a:schemeClr val="accent2"/>
+                </a:gs>
+                <a:gs pos="100000">
+                  <a:schemeClr val="accent5"/>
+                </a:gs>
+              </a:gsLst>
+              <a:lin ang="1800000" scaled="0"/>
+            </a:gradFill>
+            <a:ln>
+              <a:noFill/>
+            </a:ln>
+          </p:spPr>
+          <p:style>
+            <a:lnRef idx="2">
+              <a:schemeClr val="accent1">
+                <a:shade val="50000"/>
+              </a:schemeClr>
+            </a:lnRef>
+            <a:fillRef idx="1">
+              <a:schemeClr val="accent1"/>
+            </a:fillRef>
+            <a:effectRef idx="0">
+              <a:schemeClr val="accent1"/>
+            </a:effectRef>
+            <a:fontRef idx="minor">
+              <a:schemeClr val="lt1"/>
+            </a:fontRef>
+          </p:style>
+          <p:txBody>
+            <a:bodyPr rtlCol="0" anchor="ctr"/>
+            <a:lstStyle/>
+            <a:p>
+              <a:pPr algn="ctr"/>
+              <a:endParaRPr lang="en-US"/>
+            </a:p>
+          </p:txBody>
+        </p:sp>
+        <p:sp>
+          <p:nvSpPr>
+            <p:cNvPr id="13" name="Rectangle 12">
+              <a:extLst>
+                <a:ext uri="{FF2B5EF4-FFF2-40B4-BE49-F238E27FC236}">
+                  <a16:creationId xmlns:a16="http://schemas.microsoft.com/office/drawing/2014/main" id="{EC8FA945-E356-695F-18D6-CAD4EF34FE4A}"/>
+                </a:ext>
+                <a:ext uri="{C183D7F6-B498-43B3-948B-1728B52AA6E4}">
+                  <adec:decorative xmlns:adec="http://schemas.microsoft.com/office/drawing/2017/decorative" val="1"/>
+                </a:ext>
+              </a:extLst>
+            </p:cNvPr>
+            <p:cNvSpPr/>
+            <p:nvPr>
+              <p:extLst>
+                <p:ext uri="{386F3935-93C4-4BCD-93E2-E3B085C9AB24}">
+                  <p16:designElem xmlns:p16="http://schemas.microsoft.com/office/powerpoint/2015/main" val="1"/>
+                </p:ext>
+              </p:extLst>
+            </p:nvPr>
+          </p:nvSpPr>
+          <p:spPr>
+            <a:xfrm>
+              <a:off x="12068638" y="3527553"/>
+              <a:ext cx="123362" cy="3330447"/>
+            </a:xfrm>
+            <a:prstGeom prst="rect">
+              <a:avLst/>
+            </a:prstGeom>
+            <a:gradFill>
+              <a:gsLst>
+                <a:gs pos="19000">
+                  <a:schemeClr val="accent5">
+                    <a:lumMod val="60000"/>
+                    <a:lumOff val="40000"/>
+                    <a:alpha val="0"/>
+                  </a:schemeClr>
+                </a:gs>
+                <a:gs pos="100000">
+                  <a:schemeClr val="accent5">
+                    <a:lumMod val="60000"/>
+                    <a:lumOff val="40000"/>
+                  </a:schemeClr>
+                </a:gs>
+              </a:gsLst>
+              <a:lin ang="600000" scaled="0"/>
+            </a:gradFill>
+            <a:ln>
+              <a:noFill/>
+            </a:ln>
+          </p:spPr>
+          <p:style>
+            <a:lnRef idx="2">
+              <a:schemeClr val="accent1">
+                <a:shade val="50000"/>
+              </a:schemeClr>
+            </a:lnRef>
+            <a:fillRef idx="1">
+              <a:schemeClr val="accent1"/>
+            </a:fillRef>
+            <a:effectRef idx="0">
+              <a:schemeClr val="accent1"/>
+            </a:effectRef>
+            <a:fontRef idx="minor">
+              <a:schemeClr val="lt1"/>
+            </a:fontRef>
+          </p:style>
+          <p:txBody>
+            <a:bodyPr rtlCol="0" anchor="ctr"/>
+            <a:lstStyle/>
+            <a:p>
+              <a:pPr algn="ctr"/>
+              <a:endParaRPr lang="en-US"/>
+            </a:p>
+          </p:txBody>
+        </p:sp>
+      </p:grpSp>
+      <p:pic>
+        <p:nvPicPr>
+          <p:cNvPr id="3" name="图片 2" descr="图片包含 图示&#10;&#10;AI 生成的内容可能不正确。">
+            <a:extLst>
+              <a:ext uri="{FF2B5EF4-FFF2-40B4-BE49-F238E27FC236}">
+                <a16:creationId xmlns:a16="http://schemas.microsoft.com/office/drawing/2014/main" id="{1A062514-DC46-A19D-61AC-BE6502EC0728}"/>
+              </a:ext>
+            </a:extLst>
+          </p:cNvPr>
+          <p:cNvPicPr>
+            <a:picLocks noChangeAspect="1"/>
+          </p:cNvPicPr>
+          <p:nvPr/>
+        </p:nvPicPr>
+        <p:blipFill>
+          <a:blip r:embed="rId3"/>
+          <a:srcRect r="84" b="10683"/>
+          <a:stretch>
+            <a:fillRect/>
+          </a:stretch>
+        </p:blipFill>
+        <p:spPr>
+          <a:xfrm>
+            <a:off x="240788" y="409898"/>
+            <a:ext cx="10306931" cy="663578"/>
+          </a:xfrm>
+          <a:prstGeom prst="rect">
+            <a:avLst/>
+          </a:prstGeom>
+        </p:spPr>
+      </p:pic>
+    </p:spTree>
+    <p:extLst>
+      <p:ext uri="{BB962C8B-B14F-4D97-AF65-F5344CB8AC3E}">
+        <p14:creationId xmlns:p14="http://schemas.microsoft.com/office/powerpoint/2010/main" val="1611885682"/>
+      </p:ext>
+    </p:extLst>
+  </p:cSld>
+  <p:clrMapOvr>
+    <a:masterClrMapping/>
+  </p:clrMapOvr>
+</p:sld>
+</file>
+
+<file path=ppt/slides/slide5.xml><?xml version="1.0" encoding="utf-8"?>
+<p:sld xmlns:a="http://schemas.openxmlformats.org/drawingml/2006/main" xmlns:r="http://schemas.openxmlformats.org/officeDocument/2006/relationships" xmlns:p="http://schemas.openxmlformats.org/presentationml/2006/main">
+  <p:cSld>
+    <p:spTree>
+      <p:nvGrpSpPr>
+        <p:cNvPr id="1" name=""/>
+        <p:cNvGrpSpPr/>
+        <p:nvPr/>
+      </p:nvGrpSpPr>
+      <p:grpSpPr>
+        <a:xfrm>
+          <a:off x="0" y="0"/>
+          <a:ext cx="0" cy="0"/>
+          <a:chOff x="0" y="0"/>
+          <a:chExt cx="0" cy="0"/>
+        </a:xfrm>
+      </p:grpSpPr>
+      <p:sp>
+        <p:nvSpPr>
+          <p:cNvPr id="3" name="内容占位符 2">
+            <a:extLst>
+              <a:ext uri="{FF2B5EF4-FFF2-40B4-BE49-F238E27FC236}">
+                <a16:creationId xmlns:a16="http://schemas.microsoft.com/office/drawing/2014/main" id="{B3EF8B80-25AD-D1D3-C9FB-6BCB180BEA7A}"/>
+              </a:ext>
+            </a:extLst>
+          </p:cNvPr>
+          <p:cNvSpPr>
+            <a:spLocks noGrp="1"/>
+          </p:cNvSpPr>
+          <p:nvPr>
+            <p:ph idx="1"/>
+          </p:nvPr>
+        </p:nvSpPr>
+        <p:spPr>
+          <a:xfrm>
+            <a:off x="838200" y="483466"/>
+            <a:ext cx="10515600" cy="4351338"/>
+          </a:xfrm>
+        </p:spPr>
+        <p:txBody>
+          <a:bodyPr vert="horz" lIns="91440" tIns="45720" rIns="91440" bIns="45720" rtlCol="0" anchor="t">
+            <a:normAutofit/>
+          </a:bodyPr>
+          <a:lstStyle/>
+          <a:p>
+            <a:pPr marL="514350" indent="-514350">
+              <a:buAutoNum type="arabicPeriod"/>
+            </a:pPr>
+            <a:r>
+              <a:rPr lang="zh-CN" altLang="en-US">
+                <a:ea typeface="等线"/>
+              </a:rPr>
+              <a:t>阅读源码， profiler 打点</a:t>
+            </a:r>
+          </a:p>
+          <a:p>
+            <a:pPr marL="0" indent="0">
+              <a:buNone/>
+            </a:pPr>
+            <a:r>
+              <a:rPr lang="zh-CN" altLang="en-US">
+                <a:ea typeface="等线"/>
+              </a:rPr>
+              <a:t>图示为decode过程完整的一层， 两个专家都分配到cpu上</a:t>
+            </a:r>
+            <a:endParaRPr lang="zh-CN" altLang="en-US" dirty="0">
+              <a:ea typeface="等线"/>
+            </a:endParaRPr>
+          </a:p>
+        </p:txBody>
+      </p:sp>
+      <p:pic>
+        <p:nvPicPr>
+          <p:cNvPr id="8" name="图片 7" descr="图形用户界面, 图表&#10;&#10;AI 生成的内容可能不正确。">
+            <a:extLst>
+              <a:ext uri="{FF2B5EF4-FFF2-40B4-BE49-F238E27FC236}">
+                <a16:creationId xmlns:a16="http://schemas.microsoft.com/office/drawing/2014/main" id="{BF774337-FAF5-936E-D926-D9B4143B556D}"/>
+              </a:ext>
+            </a:extLst>
+          </p:cNvPr>
+          <p:cNvPicPr>
+            <a:picLocks noChangeAspect="1"/>
+          </p:cNvPicPr>
+          <p:nvPr/>
+        </p:nvPicPr>
+        <p:blipFill>
+          <a:blip r:embed="rId2"/>
+          <a:stretch>
+            <a:fillRect/>
+          </a:stretch>
+        </p:blipFill>
+        <p:spPr>
+          <a:xfrm>
+            <a:off x="0" y="1663840"/>
+            <a:ext cx="12192000" cy="1989002"/>
+          </a:xfrm>
+          <a:prstGeom prst="rect">
+            <a:avLst/>
+          </a:prstGeom>
+        </p:spPr>
+      </p:pic>
+    </p:spTree>
+    <p:extLst>
+      <p:ext uri="{BB962C8B-B14F-4D97-AF65-F5344CB8AC3E}">
+        <p14:creationId xmlns:p14="http://schemas.microsoft.com/office/powerpoint/2010/main" val="726799779"/>
+      </p:ext>
+    </p:extLst>
+  </p:cSld>
+  <p:clrMapOvr>
+    <a:masterClrMapping/>
+  </p:clrMapOvr>
+</p:sld>
+</file>
+
+<file path=ppt/slides/slide6.xml><?xml version="1.0" encoding="utf-8"?>
+<p:sld xmlns:a="http://schemas.openxmlformats.org/drawingml/2006/main" xmlns:r="http://schemas.openxmlformats.org/officeDocument/2006/relationships" xmlns:p="http://schemas.openxmlformats.org/presentationml/2006/main">
+  <p:cSld>
+    <p:spTree>
+      <p:nvGrpSpPr>
+        <p:cNvPr id="1" name=""/>
+        <p:cNvGrpSpPr/>
+        <p:nvPr/>
+      </p:nvGrpSpPr>
+      <p:grpSpPr>
+        <a:xfrm>
+          <a:off x="0" y="0"/>
+          <a:ext cx="0" cy="0"/>
+          <a:chOff x="0" y="0"/>
+          <a:chExt cx="0" cy="0"/>
+        </a:xfrm>
+      </p:grpSpPr>
+      <p:pic>
+        <p:nvPicPr>
+          <p:cNvPr id="4" name="图片 3" descr="图片包含 日程表&#10;&#10;AI 生成的内容可能不正确。">
+            <a:extLst>
+              <a:ext uri="{FF2B5EF4-FFF2-40B4-BE49-F238E27FC236}">
+                <a16:creationId xmlns:a16="http://schemas.microsoft.com/office/drawing/2014/main" id="{CD805AF1-A589-0CDF-68BF-7C0208DD15F0}"/>
+              </a:ext>
+            </a:extLst>
+          </p:cNvPr>
+          <p:cNvPicPr>
+            <a:picLocks noChangeAspect="1"/>
+          </p:cNvPicPr>
+          <p:nvPr/>
+        </p:nvPicPr>
+        <p:blipFill>
+          <a:blip r:embed="rId2"/>
+          <a:stretch>
+            <a:fillRect/>
+          </a:stretch>
+        </p:blipFill>
+        <p:spPr>
+          <a:xfrm>
+            <a:off x="180813" y="1061016"/>
+            <a:ext cx="11843289" cy="2075425"/>
           </a:xfrm>
           <a:prstGeom prst="rect">
             <a:avLst/>
@@ -3700,10 +4363,10 @@
       </p:pic>
       <p:pic>
         <p:nvPicPr>
-          <p:cNvPr id="17" name="图片 16">
-            <a:extLst>
-              <a:ext uri="{FF2B5EF4-FFF2-40B4-BE49-F238E27FC236}">
-                <a16:creationId xmlns:a16="http://schemas.microsoft.com/office/drawing/2014/main" id="{BCF8FF5F-8173-5451-1974-9CF66E716DFA}"/>
+          <p:cNvPr id="7" name="图片 6" descr="图片包含 图形用户界面&#10;&#10;AI 生成的内容可能不正确。">
+            <a:extLst>
+              <a:ext uri="{FF2B5EF4-FFF2-40B4-BE49-F238E27FC236}">
+                <a16:creationId xmlns:a16="http://schemas.microsoft.com/office/drawing/2014/main" id="{4D0BFCCC-D44C-1C8F-F506-F23473B65FAD}"/>
               </a:ext>
             </a:extLst>
           </p:cNvPr>
@@ -3720,14 +4383,55 @@
         </p:blipFill>
         <p:spPr>
           <a:xfrm>
-            <a:off x="477846" y="3104641"/>
-            <a:ext cx="9815943" cy="3482469"/>
+            <a:off x="182105" y="3690373"/>
+            <a:ext cx="9541789" cy="2266950"/>
           </a:xfrm>
           <a:prstGeom prst="rect">
             <a:avLst/>
           </a:prstGeom>
         </p:spPr>
       </p:pic>
+      <p:sp>
+        <p:nvSpPr>
+          <p:cNvPr id="9" name="文本框 8">
+            <a:extLst>
+              <a:ext uri="{FF2B5EF4-FFF2-40B4-BE49-F238E27FC236}">
+                <a16:creationId xmlns:a16="http://schemas.microsoft.com/office/drawing/2014/main" id="{43E11B30-7231-F042-B57E-6FD542B1593A}"/>
+              </a:ext>
+            </a:extLst>
+          </p:cNvPr>
+          <p:cNvSpPr txBox="1"/>
+          <p:nvPr/>
+        </p:nvSpPr>
+        <p:spPr>
+          <a:xfrm>
+            <a:off x="290901" y="96967"/>
+            <a:ext cx="3264556" cy="369332"/>
+          </a:xfrm>
+          <a:prstGeom prst="rect">
+            <a:avLst/>
+          </a:prstGeom>
+          <a:noFill/>
+        </p:spPr>
+        <p:txBody>
+          <a:bodyPr rot="0" spcFirstLastPara="0" vertOverflow="overflow" horzOverflow="overflow" vert="horz" wrap="square" lIns="91440" tIns="45720" rIns="91440" bIns="45720" numCol="1" spcCol="0" rtlCol="0" fromWordArt="0" anchor="t" anchorCtr="0" forceAA="0" compatLnSpc="1">
+            <a:prstTxWarp prst="textNoShape">
+              <a:avLst/>
+            </a:prstTxWarp>
+            <a:spAutoFit/>
+          </a:bodyPr>
+          <a:lstStyle/>
+          <a:p>
+            <a:r>
+              <a:rPr lang="zh-CN" altLang="en-US">
+                <a:ea typeface="等线"/>
+              </a:rPr>
+              <a:t>Origin vs improved</a:t>
+            </a:r>
+            <a:endParaRPr lang="zh-CN" altLang="en-US"/>
+          </a:p>
+        </p:txBody>
+      </p:sp>
     </p:spTree>
     <p:extLst>
       <p:ext uri="{BB962C8B-B14F-4D97-AF65-F5344CB8AC3E}">
@@ -3741,7 +4445,7 @@
 </p:sld>
 </file>
 
-<file path=ppt/slides/slide4.xml><?xml version="1.0" encoding="utf-8"?>
+<file path=ppt/slides/slide7.xml><?xml version="1.0" encoding="utf-8"?>
 <p:sld xmlns:a="http://schemas.openxmlformats.org/drawingml/2006/main" xmlns:r="http://schemas.openxmlformats.org/officeDocument/2006/relationships" xmlns:p="http://schemas.openxmlformats.org/presentationml/2006/main">
   <p:cSld>
     <p:spTree>
@@ -3763,7 +4467,7 @@
           <p:cNvPr id="5" name="内容占位符 4" descr="图表, 条形图">
             <a:extLst>
               <a:ext uri="{FF2B5EF4-FFF2-40B4-BE49-F238E27FC236}">
-                <a16:creationId xmlns:a16="http://schemas.microsoft.com/office/drawing/2014/main" id="{BDAF4FCF-53F2-13DB-F47F-B97543DA6082}"/>
+                <a16:creationId xmlns:a16="http://schemas.microsoft.com/office/drawing/2014/main" id="{A3C6668F-B3A4-5A4D-4217-C48E532E1E35}"/>
               </a:ext>
             </a:extLst>
           </p:cNvPr>
@@ -3775,24 +4479,161 @@
           </p:nvPr>
         </p:nvPicPr>
         <p:blipFill>
-          <a:blip r:embed="rId2">
-            <a:extLst>
-              <a:ext uri="{28A0092B-C50C-407E-A947-70E740481C1C}">
-                <a14:useLocalDpi xmlns:a14="http://schemas.microsoft.com/office/drawing/2010/main" val="0"/>
-              </a:ext>
-            </a:extLst>
-          </a:blip>
+          <a:blip r:embed="rId2"/>
           <a:stretch>
             <a:fillRect/>
           </a:stretch>
         </p:blipFill>
         <p:spPr>
           <a:xfrm>
-            <a:off x="390985" y="576492"/>
-            <a:ext cx="11410030" cy="5705015"/>
+            <a:off x="0" y="841963"/>
+            <a:ext cx="12120379" cy="5164801"/>
           </a:xfrm>
+          <a:prstGeom prst="rect">
+            <a:avLst/>
+          </a:prstGeom>
         </p:spPr>
       </p:pic>
+      <p:sp>
+        <p:nvSpPr>
+          <p:cNvPr id="6" name="文本框 5">
+            <a:extLst>
+              <a:ext uri="{FF2B5EF4-FFF2-40B4-BE49-F238E27FC236}">
+                <a16:creationId xmlns:a16="http://schemas.microsoft.com/office/drawing/2014/main" id="{40EFB0B3-3ADE-E2E2-B543-24A683F50B78}"/>
+              </a:ext>
+            </a:extLst>
+          </p:cNvPr>
+          <p:cNvSpPr txBox="1"/>
+          <p:nvPr/>
+        </p:nvSpPr>
+        <p:spPr>
+          <a:xfrm>
+            <a:off x="411161" y="173119"/>
+            <a:ext cx="3678806" cy="369332"/>
+          </a:xfrm>
+          <a:prstGeom prst="rect">
+            <a:avLst/>
+          </a:prstGeom>
+          <a:noFill/>
+        </p:spPr>
+        <p:txBody>
+          <a:bodyPr rot="0" spcFirstLastPara="0" vertOverflow="overflow" horzOverflow="overflow" vert="horz" wrap="square" lIns="91440" tIns="45720" rIns="91440" bIns="45720" numCol="1" spcCol="0" rtlCol="0" fromWordArt="0" anchor="t" anchorCtr="0" forceAA="0" compatLnSpc="1">
+            <a:prstTxWarp prst="textNoShape">
+              <a:avLst/>
+            </a:prstTxWarp>
+            <a:spAutoFit/>
+          </a:bodyPr>
+          <a:lstStyle/>
+          <a:p>
+            <a:r>
+              <a:rPr lang="zh-CN" altLang="en-US">
+                <a:ea typeface="等线"/>
+              </a:rPr>
+              <a:t>两个改动过后， 平均加速1.172x</a:t>
+            </a:r>
+            <a:endParaRPr lang="zh-CN" altLang="en-US"/>
+          </a:p>
+        </p:txBody>
+      </p:sp>
+      <p:sp>
+        <p:nvSpPr>
+          <p:cNvPr id="7" name="文本框 6">
+            <a:extLst>
+              <a:ext uri="{FF2B5EF4-FFF2-40B4-BE49-F238E27FC236}">
+                <a16:creationId xmlns:a16="http://schemas.microsoft.com/office/drawing/2014/main" id="{136F3320-CC2A-4757-4C23-D54220BE9415}"/>
+              </a:ext>
+            </a:extLst>
+          </p:cNvPr>
+          <p:cNvSpPr txBox="1"/>
+          <p:nvPr/>
+        </p:nvSpPr>
+        <p:spPr>
+          <a:xfrm>
+            <a:off x="406977" y="6009409"/>
+            <a:ext cx="9317181" cy="738664"/>
+          </a:xfrm>
+          <a:prstGeom prst="rect">
+            <a:avLst/>
+          </a:prstGeom>
+          <a:noFill/>
+        </p:spPr>
+        <p:txBody>
+          <a:bodyPr rot="0" spcFirstLastPara="0" vertOverflow="overflow" horzOverflow="overflow" vert="horz" wrap="square" lIns="91440" tIns="45720" rIns="91440" bIns="45720" numCol="1" spcCol="0" rtlCol="0" fromWordArt="0" anchor="t" anchorCtr="0" forceAA="0" compatLnSpc="1">
+            <a:prstTxWarp prst="textNoShape">
+              <a:avLst/>
+            </a:prstTxWarp>
+            <a:spAutoFit/>
+          </a:bodyPr>
+          <a:lstStyle/>
+          <a:p>
+            <a:r>
+              <a:rPr lang="zh-CN" sz="2400" baseline="0">
+                <a:ea typeface="SimSun"/>
+              </a:rPr>
+              <a:t>实验配置：</a:t>
+            </a:r>
+            <a:r>
+              <a:rPr lang="en-US" sz="2400" baseline="0">
+                <a:latin typeface="SimSun"/>
+              </a:rPr>
+              <a:t>Tesla T4</a:t>
+            </a:r>
+            <a:r>
+              <a:rPr lang="zh-CN" sz="2400" baseline="0">
+                <a:ea typeface="SimSun"/>
+              </a:rPr>
+              <a:t>（</a:t>
+            </a:r>
+            <a:r>
+              <a:rPr lang="en-US" sz="2400" baseline="0">
+                <a:latin typeface="SimSun"/>
+              </a:rPr>
+              <a:t>16GB</a:t>
+            </a:r>
+            <a:r>
+              <a:rPr lang="zh-CN" sz="2400" baseline="0">
+                <a:ea typeface="SimSun"/>
+              </a:rPr>
+              <a:t>） </a:t>
+            </a:r>
+            <a:r>
+              <a:rPr lang="en-US" sz="2400" baseline="0">
+                <a:latin typeface="SimSun"/>
+              </a:rPr>
+              <a:t>n1 (32 </a:t>
+            </a:r>
+            <a:r>
+              <a:rPr lang="zh-CN" sz="2400" baseline="0">
+                <a:ea typeface="SimSun"/>
+              </a:rPr>
+              <a:t>个 </a:t>
+            </a:r>
+            <a:r>
+              <a:rPr lang="en-US" sz="2400" baseline="0">
+                <a:latin typeface="SimSun"/>
+              </a:rPr>
+              <a:t>vCPU, 104 GB </a:t>
+            </a:r>
+            <a:r>
+              <a:rPr lang="zh-CN" sz="2400" baseline="0">
+                <a:ea typeface="SimSun"/>
+              </a:rPr>
+              <a:t>内存</a:t>
+            </a:r>
+            <a:r>
+              <a:rPr lang="en-US" sz="2400" baseline="0">
+                <a:latin typeface="SimSun"/>
+              </a:rPr>
+              <a:t>)</a:t>
+            </a:r>
+            <a:endParaRPr lang="zh-CN" altLang="en-US"/>
+          </a:p>
+          <a:p>
+            <a:pPr algn="ctr"/>
+            <a:endParaRPr lang="zh-CN" altLang="en-US"/>
+          </a:p>
+        </p:txBody>
+      </p:sp>
     </p:spTree>
     <p:extLst>
       <p:ext uri="{BB962C8B-B14F-4D97-AF65-F5344CB8AC3E}">
@@ -3806,7 +4647,7 @@
 </p:sld>
 </file>
 
-<file path=ppt/slides/slide5.xml><?xml version="1.0" encoding="utf-8"?>
+<file path=ppt/slides/slide8.xml><?xml version="1.0" encoding="utf-8"?>
 <p:sld xmlns:a="http://schemas.openxmlformats.org/drawingml/2006/main" xmlns:r="http://schemas.openxmlformats.org/officeDocument/2006/relationships" xmlns:p="http://schemas.openxmlformats.org/presentationml/2006/main">
   <p:cSld>
     <p:spTree>

--- a/CPU.pptx
+++ b/CPU.pptx
@@ -7,12 +7,17 @@
   <p:sldIdLst>
     <p:sldId id="258" r:id="rId2"/>
     <p:sldId id="262" r:id="rId3"/>
-    <p:sldId id="259" r:id="rId4"/>
-    <p:sldId id="261" r:id="rId5"/>
-    <p:sldId id="263" r:id="rId6"/>
-    <p:sldId id="256" r:id="rId7"/>
-    <p:sldId id="257" r:id="rId8"/>
-    <p:sldId id="260" r:id="rId9"/>
+    <p:sldId id="264" r:id="rId4"/>
+    <p:sldId id="259" r:id="rId5"/>
+    <p:sldId id="261" r:id="rId6"/>
+    <p:sldId id="267" r:id="rId7"/>
+    <p:sldId id="263" r:id="rId8"/>
+    <p:sldId id="265" r:id="rId9"/>
+    <p:sldId id="256" r:id="rId10"/>
+    <p:sldId id="266" r:id="rId11"/>
+    <p:sldId id="257" r:id="rId12"/>
+    <p:sldId id="260" r:id="rId13"/>
+    <p:sldId id="268" r:id="rId14"/>
   </p:sldIdLst>
   <p:sldSz cx="12192000" cy="6858000"/>
   <p:notesSz cx="6858000" cy="9144000"/>
@@ -274,7 +279,7 @@
           <a:p>
             <a:fld id="{6E1D6A05-A525-4566-9F5C-631239A2B5F0}" type="datetimeFigureOut">
               <a:rPr lang="zh-CN" altLang="en-US" smtClean="0"/>
-              <a:t>2026/3/4</a:t>
+              <a:t>2026/3/5</a:t>
             </a:fld>
             <a:endParaRPr lang="zh-CN" altLang="en-US"/>
           </a:p>
@@ -472,7 +477,7 @@
           <a:p>
             <a:fld id="{6E1D6A05-A525-4566-9F5C-631239A2B5F0}" type="datetimeFigureOut">
               <a:rPr lang="zh-CN" altLang="en-US" smtClean="0"/>
-              <a:t>2026/3/4</a:t>
+              <a:t>2026/3/5</a:t>
             </a:fld>
             <a:endParaRPr lang="zh-CN" altLang="en-US"/>
           </a:p>
@@ -680,7 +685,7 @@
           <a:p>
             <a:fld id="{6E1D6A05-A525-4566-9F5C-631239A2B5F0}" type="datetimeFigureOut">
               <a:rPr lang="zh-CN" altLang="en-US" smtClean="0"/>
-              <a:t>2026/3/4</a:t>
+              <a:t>2026/3/5</a:t>
             </a:fld>
             <a:endParaRPr lang="zh-CN" altLang="en-US"/>
           </a:p>
@@ -878,7 +883,7 @@
           <a:p>
             <a:fld id="{6E1D6A05-A525-4566-9F5C-631239A2B5F0}" type="datetimeFigureOut">
               <a:rPr lang="zh-CN" altLang="en-US" smtClean="0"/>
-              <a:t>2026/3/4</a:t>
+              <a:t>2026/3/5</a:t>
             </a:fld>
             <a:endParaRPr lang="zh-CN" altLang="en-US"/>
           </a:p>
@@ -1153,7 +1158,7 @@
           <a:p>
             <a:fld id="{6E1D6A05-A525-4566-9F5C-631239A2B5F0}" type="datetimeFigureOut">
               <a:rPr lang="zh-CN" altLang="en-US" smtClean="0"/>
-              <a:t>2026/3/4</a:t>
+              <a:t>2026/3/5</a:t>
             </a:fld>
             <a:endParaRPr lang="zh-CN" altLang="en-US"/>
           </a:p>
@@ -1418,7 +1423,7 @@
           <a:p>
             <a:fld id="{6E1D6A05-A525-4566-9F5C-631239A2B5F0}" type="datetimeFigureOut">
               <a:rPr lang="zh-CN" altLang="en-US" smtClean="0"/>
-              <a:t>2026/3/4</a:t>
+              <a:t>2026/3/5</a:t>
             </a:fld>
             <a:endParaRPr lang="zh-CN" altLang="en-US"/>
           </a:p>
@@ -1830,7 +1835,7 @@
           <a:p>
             <a:fld id="{6E1D6A05-A525-4566-9F5C-631239A2B5F0}" type="datetimeFigureOut">
               <a:rPr lang="zh-CN" altLang="en-US" smtClean="0"/>
-              <a:t>2026/3/4</a:t>
+              <a:t>2026/3/5</a:t>
             </a:fld>
             <a:endParaRPr lang="zh-CN" altLang="en-US"/>
           </a:p>
@@ -1971,7 +1976,7 @@
           <a:p>
             <a:fld id="{6E1D6A05-A525-4566-9F5C-631239A2B5F0}" type="datetimeFigureOut">
               <a:rPr lang="zh-CN" altLang="en-US" smtClean="0"/>
-              <a:t>2026/3/4</a:t>
+              <a:t>2026/3/5</a:t>
             </a:fld>
             <a:endParaRPr lang="zh-CN" altLang="en-US"/>
           </a:p>
@@ -2084,7 +2089,7 @@
           <a:p>
             <a:fld id="{6E1D6A05-A525-4566-9F5C-631239A2B5F0}" type="datetimeFigureOut">
               <a:rPr lang="zh-CN" altLang="en-US" smtClean="0"/>
-              <a:t>2026/3/4</a:t>
+              <a:t>2026/3/5</a:t>
             </a:fld>
             <a:endParaRPr lang="zh-CN" altLang="en-US"/>
           </a:p>
@@ -2395,7 +2400,7 @@
           <a:p>
             <a:fld id="{6E1D6A05-A525-4566-9F5C-631239A2B5F0}" type="datetimeFigureOut">
               <a:rPr lang="zh-CN" altLang="en-US" smtClean="0"/>
-              <a:t>2026/3/4</a:t>
+              <a:t>2026/3/5</a:t>
             </a:fld>
             <a:endParaRPr lang="zh-CN" altLang="en-US"/>
           </a:p>
@@ -2683,7 +2688,7 @@
           <a:p>
             <a:fld id="{6E1D6A05-A525-4566-9F5C-631239A2B5F0}" type="datetimeFigureOut">
               <a:rPr lang="zh-CN" altLang="en-US" smtClean="0"/>
-              <a:t>2026/3/4</a:t>
+              <a:t>2026/3/5</a:t>
             </a:fld>
             <a:endParaRPr lang="zh-CN" altLang="en-US"/>
           </a:p>
@@ -2924,7 +2929,7 @@
           <a:p>
             <a:fld id="{6E1D6A05-A525-4566-9F5C-631239A2B5F0}" type="datetimeFigureOut">
               <a:rPr lang="zh-CN" altLang="en-US" smtClean="0"/>
-              <a:t>2026/3/4</a:t>
+              <a:t>2026/3/5</a:t>
             </a:fld>
             <a:endParaRPr lang="zh-CN" altLang="en-US"/>
           </a:p>
@@ -3523,6 +3528,1665 @@
 </p:sld>
 </file>
 
+<file path=ppt/slides/slide10.xml><?xml version="1.0" encoding="utf-8"?>
+<p:sld xmlns:a="http://schemas.openxmlformats.org/drawingml/2006/main" xmlns:r="http://schemas.openxmlformats.org/officeDocument/2006/relationships" xmlns:p="http://schemas.openxmlformats.org/presentationml/2006/main">
+  <p:cSld>
+    <p:spTree>
+      <p:nvGrpSpPr>
+        <p:cNvPr id="1" name=""/>
+        <p:cNvGrpSpPr/>
+        <p:nvPr/>
+      </p:nvGrpSpPr>
+      <p:grpSpPr>
+        <a:xfrm>
+          <a:off x="0" y="0"/>
+          <a:ext cx="0" cy="0"/>
+          <a:chOff x="0" y="0"/>
+          <a:chExt cx="0" cy="0"/>
+        </a:xfrm>
+      </p:grpSpPr>
+      <p:pic>
+        <p:nvPicPr>
+          <p:cNvPr id="4" name="图片 3" descr="图片包含 日程表&#10;&#10;AI 生成的内容可能不正确。">
+            <a:extLst>
+              <a:ext uri="{FF2B5EF4-FFF2-40B4-BE49-F238E27FC236}">
+                <a16:creationId xmlns:a16="http://schemas.microsoft.com/office/drawing/2014/main" id="{CD805AF1-A589-0CDF-68BF-7C0208DD15F0}"/>
+              </a:ext>
+            </a:extLst>
+          </p:cNvPr>
+          <p:cNvPicPr>
+            <a:picLocks noChangeAspect="1"/>
+          </p:cNvPicPr>
+          <p:nvPr/>
+        </p:nvPicPr>
+        <p:blipFill>
+          <a:blip r:embed="rId2"/>
+          <a:stretch>
+            <a:fillRect/>
+          </a:stretch>
+        </p:blipFill>
+        <p:spPr>
+          <a:xfrm>
+            <a:off x="180813" y="1061016"/>
+            <a:ext cx="11843289" cy="2075425"/>
+          </a:xfrm>
+          <a:prstGeom prst="rect">
+            <a:avLst/>
+          </a:prstGeom>
+        </p:spPr>
+      </p:pic>
+      <p:pic>
+        <p:nvPicPr>
+          <p:cNvPr id="7" name="图片 6" descr="图片包含 图形用户界面&#10;&#10;AI 生成的内容可能不正确。">
+            <a:extLst>
+              <a:ext uri="{FF2B5EF4-FFF2-40B4-BE49-F238E27FC236}">
+                <a16:creationId xmlns:a16="http://schemas.microsoft.com/office/drawing/2014/main" id="{4D0BFCCC-D44C-1C8F-F506-F23473B65FAD}"/>
+              </a:ext>
+            </a:extLst>
+          </p:cNvPr>
+          <p:cNvPicPr>
+            <a:picLocks noChangeAspect="1"/>
+          </p:cNvPicPr>
+          <p:nvPr/>
+        </p:nvPicPr>
+        <p:blipFill>
+          <a:blip r:embed="rId3"/>
+          <a:stretch>
+            <a:fillRect/>
+          </a:stretch>
+        </p:blipFill>
+        <p:spPr>
+          <a:xfrm>
+            <a:off x="182105" y="3690373"/>
+            <a:ext cx="9498736" cy="2266950"/>
+          </a:xfrm>
+          <a:prstGeom prst="rect">
+            <a:avLst/>
+          </a:prstGeom>
+        </p:spPr>
+      </p:pic>
+      <p:sp>
+        <p:nvSpPr>
+          <p:cNvPr id="9" name="文本框 8">
+            <a:extLst>
+              <a:ext uri="{FF2B5EF4-FFF2-40B4-BE49-F238E27FC236}">
+                <a16:creationId xmlns:a16="http://schemas.microsoft.com/office/drawing/2014/main" id="{43E11B30-7231-F042-B57E-6FD542B1593A}"/>
+              </a:ext>
+            </a:extLst>
+          </p:cNvPr>
+          <p:cNvSpPr txBox="1"/>
+          <p:nvPr/>
+        </p:nvSpPr>
+        <p:spPr>
+          <a:xfrm>
+            <a:off x="290901" y="96967"/>
+            <a:ext cx="3264556" cy="369332"/>
+          </a:xfrm>
+          <a:prstGeom prst="rect">
+            <a:avLst/>
+          </a:prstGeom>
+          <a:noFill/>
+        </p:spPr>
+        <p:txBody>
+          <a:bodyPr rot="0" spcFirstLastPara="0" vertOverflow="overflow" horzOverflow="overflow" vert="horz" wrap="square" lIns="91440" tIns="45720" rIns="91440" bIns="45720" numCol="1" spcCol="0" rtlCol="0" fromWordArt="0" anchor="t" anchorCtr="0" forceAA="0" compatLnSpc="1">
+            <a:prstTxWarp prst="textNoShape">
+              <a:avLst/>
+            </a:prstTxWarp>
+            <a:spAutoFit/>
+          </a:bodyPr>
+          <a:lstStyle/>
+          <a:p>
+            <a:r>
+              <a:rPr lang="en-US" altLang="zh-CN" dirty="0">
+                <a:ea typeface="等线"/>
+              </a:rPr>
+              <a:t>o</a:t>
+            </a:r>
+            <a:r>
+              <a:rPr lang="zh-CN" altLang="en-US" dirty="0">
+                <a:ea typeface="等线"/>
+              </a:rPr>
+              <a:t>rigin vs improved</a:t>
+            </a:r>
+            <a:endParaRPr lang="zh-CN" altLang="en-US" dirty="0"/>
+          </a:p>
+        </p:txBody>
+      </p:sp>
+      <p:sp>
+        <p:nvSpPr>
+          <p:cNvPr id="5" name="箭头: 左右 4">
+            <a:extLst>
+              <a:ext uri="{FF2B5EF4-FFF2-40B4-BE49-F238E27FC236}">
+                <a16:creationId xmlns:a16="http://schemas.microsoft.com/office/drawing/2014/main" id="{467318BC-ED40-CF81-176A-504CD7D6C129}"/>
+              </a:ext>
+            </a:extLst>
+          </p:cNvPr>
+          <p:cNvSpPr/>
+          <p:nvPr/>
+        </p:nvSpPr>
+        <p:spPr>
+          <a:xfrm>
+            <a:off x="1280159" y="650899"/>
+            <a:ext cx="660728" cy="372949"/>
+          </a:xfrm>
+          <a:prstGeom prst="leftRightArrow">
+            <a:avLst/>
+          </a:prstGeom>
+          <a:solidFill>
+            <a:srgbClr val="92D050"/>
+          </a:solidFill>
+        </p:spPr>
+        <p:style>
+          <a:lnRef idx="2">
+            <a:schemeClr val="accent1">
+              <a:shade val="15000"/>
+            </a:schemeClr>
+          </a:lnRef>
+          <a:fillRef idx="1">
+            <a:schemeClr val="accent1"/>
+          </a:fillRef>
+          <a:effectRef idx="0">
+            <a:schemeClr val="accent1"/>
+          </a:effectRef>
+          <a:fontRef idx="minor">
+            <a:schemeClr val="lt1"/>
+          </a:fontRef>
+        </p:style>
+        <p:txBody>
+          <a:bodyPr rtlCol="0" anchor="ctr"/>
+          <a:lstStyle/>
+          <a:p>
+            <a:pPr algn="ctr"/>
+            <a:endParaRPr lang="zh-CN" altLang="en-US"/>
+          </a:p>
+        </p:txBody>
+      </p:sp>
+      <p:sp>
+        <p:nvSpPr>
+          <p:cNvPr id="6" name="箭头: 左右 5">
+            <a:extLst>
+              <a:ext uri="{FF2B5EF4-FFF2-40B4-BE49-F238E27FC236}">
+                <a16:creationId xmlns:a16="http://schemas.microsoft.com/office/drawing/2014/main" id="{4BD522D1-0EDD-BAA1-DD51-EE63A14CC042}"/>
+              </a:ext>
+            </a:extLst>
+          </p:cNvPr>
+          <p:cNvSpPr/>
+          <p:nvPr/>
+        </p:nvSpPr>
+        <p:spPr>
+          <a:xfrm>
+            <a:off x="1940887" y="650899"/>
+            <a:ext cx="943897" cy="369332"/>
+          </a:xfrm>
+          <a:prstGeom prst="leftRightArrow">
+            <a:avLst/>
+          </a:prstGeom>
+          <a:solidFill>
+            <a:schemeClr val="accent1">
+              <a:lumMod val="20000"/>
+              <a:lumOff val="80000"/>
+            </a:schemeClr>
+          </a:solidFill>
+        </p:spPr>
+        <p:style>
+          <a:lnRef idx="2">
+            <a:schemeClr val="accent1">
+              <a:shade val="15000"/>
+            </a:schemeClr>
+          </a:lnRef>
+          <a:fillRef idx="1">
+            <a:schemeClr val="accent1"/>
+          </a:fillRef>
+          <a:effectRef idx="0">
+            <a:schemeClr val="accent1"/>
+          </a:effectRef>
+          <a:fontRef idx="minor">
+            <a:schemeClr val="lt1"/>
+          </a:fontRef>
+        </p:style>
+        <p:txBody>
+          <a:bodyPr rtlCol="0" anchor="ctr"/>
+          <a:lstStyle/>
+          <a:p>
+            <a:pPr algn="ctr"/>
+            <a:endParaRPr lang="zh-CN" altLang="en-US" dirty="0">
+              <a:solidFill>
+                <a:srgbClr val="FFC000"/>
+              </a:solidFill>
+              <a:highlight>
+                <a:srgbClr val="FF00FF"/>
+              </a:highlight>
+            </a:endParaRPr>
+          </a:p>
+        </p:txBody>
+      </p:sp>
+      <p:sp>
+        <p:nvSpPr>
+          <p:cNvPr id="8" name="箭头: 左右 7">
+            <a:extLst>
+              <a:ext uri="{FF2B5EF4-FFF2-40B4-BE49-F238E27FC236}">
+                <a16:creationId xmlns:a16="http://schemas.microsoft.com/office/drawing/2014/main" id="{795DAACA-9168-3244-B301-E02D25F830C9}"/>
+              </a:ext>
+            </a:extLst>
+          </p:cNvPr>
+          <p:cNvSpPr/>
+          <p:nvPr/>
+        </p:nvSpPr>
+        <p:spPr>
+          <a:xfrm>
+            <a:off x="6871764" y="671292"/>
+            <a:ext cx="943897" cy="369332"/>
+          </a:xfrm>
+          <a:prstGeom prst="leftRightArrow">
+            <a:avLst/>
+          </a:prstGeom>
+          <a:solidFill>
+            <a:schemeClr val="accent1">
+              <a:lumMod val="20000"/>
+              <a:lumOff val="80000"/>
+            </a:schemeClr>
+          </a:solidFill>
+        </p:spPr>
+        <p:style>
+          <a:lnRef idx="2">
+            <a:schemeClr val="accent1">
+              <a:shade val="15000"/>
+            </a:schemeClr>
+          </a:lnRef>
+          <a:fillRef idx="1">
+            <a:schemeClr val="accent1"/>
+          </a:fillRef>
+          <a:effectRef idx="0">
+            <a:schemeClr val="accent1"/>
+          </a:effectRef>
+          <a:fontRef idx="minor">
+            <a:schemeClr val="lt1"/>
+          </a:fontRef>
+        </p:style>
+        <p:txBody>
+          <a:bodyPr rtlCol="0" anchor="ctr"/>
+          <a:lstStyle/>
+          <a:p>
+            <a:pPr algn="ctr"/>
+            <a:endParaRPr lang="zh-CN" altLang="en-US">
+              <a:solidFill>
+                <a:srgbClr val="FF0000"/>
+              </a:solidFill>
+            </a:endParaRPr>
+          </a:p>
+        </p:txBody>
+      </p:sp>
+      <p:sp>
+        <p:nvSpPr>
+          <p:cNvPr id="10" name="箭头: 左右 9">
+            <a:extLst>
+              <a:ext uri="{FF2B5EF4-FFF2-40B4-BE49-F238E27FC236}">
+                <a16:creationId xmlns:a16="http://schemas.microsoft.com/office/drawing/2014/main" id="{E509EC29-FE84-6339-20DC-5A0A3309E2B8}"/>
+              </a:ext>
+            </a:extLst>
+          </p:cNvPr>
+          <p:cNvSpPr/>
+          <p:nvPr/>
+        </p:nvSpPr>
+        <p:spPr>
+          <a:xfrm>
+            <a:off x="9680840" y="4253435"/>
+            <a:ext cx="2241755" cy="1173971"/>
+          </a:xfrm>
+          <a:prstGeom prst="leftRightArrow">
+            <a:avLst/>
+          </a:prstGeom>
+          <a:solidFill>
+            <a:schemeClr val="accent4"/>
+          </a:solidFill>
+        </p:spPr>
+        <p:style>
+          <a:lnRef idx="2">
+            <a:schemeClr val="accent1">
+              <a:shade val="15000"/>
+            </a:schemeClr>
+          </a:lnRef>
+          <a:fillRef idx="1">
+            <a:schemeClr val="accent1"/>
+          </a:fillRef>
+          <a:effectRef idx="0">
+            <a:schemeClr val="accent1"/>
+          </a:effectRef>
+          <a:fontRef idx="minor">
+            <a:schemeClr val="lt1"/>
+          </a:fontRef>
+        </p:style>
+        <p:txBody>
+          <a:bodyPr rtlCol="0" anchor="ctr"/>
+          <a:lstStyle/>
+          <a:p>
+            <a:pPr algn="ctr"/>
+            <a:endParaRPr lang="zh-CN" altLang="en-US"/>
+          </a:p>
+        </p:txBody>
+      </p:sp>
+    </p:spTree>
+    <p:extLst>
+      <p:ext uri="{BB962C8B-B14F-4D97-AF65-F5344CB8AC3E}">
+        <p14:creationId xmlns:p14="http://schemas.microsoft.com/office/powerpoint/2010/main" val="2488938929"/>
+      </p:ext>
+    </p:extLst>
+  </p:cSld>
+  <p:clrMapOvr>
+    <a:masterClrMapping/>
+  </p:clrMapOvr>
+  <p:timing>
+    <p:tnLst>
+      <p:par>
+        <p:cTn id="1" dur="indefinite" restart="never" nodeType="tmRoot">
+          <p:childTnLst>
+            <p:seq concurrent="1" nextAc="seek">
+              <p:cTn id="2" dur="indefinite" nodeType="mainSeq">
+                <p:childTnLst>
+                  <p:par>
+                    <p:cTn id="3" fill="hold">
+                      <p:stCondLst>
+                        <p:cond delay="indefinite"/>
+                      </p:stCondLst>
+                      <p:childTnLst>
+                        <p:par>
+                          <p:cTn id="4" fill="hold">
+                            <p:stCondLst>
+                              <p:cond delay="0"/>
+                            </p:stCondLst>
+                            <p:childTnLst>
+                              <p:par>
+                                <p:cTn id="5" presetID="42" presetClass="entr" presetSubtype="0" fill="hold" grpId="0" nodeType="clickEffect">
+                                  <p:stCondLst>
+                                    <p:cond delay="0"/>
+                                  </p:stCondLst>
+                                  <p:childTnLst>
+                                    <p:set>
+                                      <p:cBhvr>
+                                        <p:cTn id="6" dur="1" fill="hold">
+                                          <p:stCondLst>
+                                            <p:cond delay="0"/>
+                                          </p:stCondLst>
+                                        </p:cTn>
+                                        <p:tgtEl>
+                                          <p:spTgt spid="5"/>
+                                        </p:tgtEl>
+                                        <p:attrNameLst>
+                                          <p:attrName>style.visibility</p:attrName>
+                                        </p:attrNameLst>
+                                      </p:cBhvr>
+                                      <p:to>
+                                        <p:strVal val="visible"/>
+                                      </p:to>
+                                    </p:set>
+                                    <p:animEffect transition="in" filter="fade">
+                                      <p:cBhvr>
+                                        <p:cTn id="7" dur="1000"/>
+                                        <p:tgtEl>
+                                          <p:spTgt spid="5"/>
+                                        </p:tgtEl>
+                                      </p:cBhvr>
+                                    </p:animEffect>
+                                    <p:anim calcmode="lin" valueType="num">
+                                      <p:cBhvr>
+                                        <p:cTn id="8" dur="1000" fill="hold"/>
+                                        <p:tgtEl>
+                                          <p:spTgt spid="5"/>
+                                        </p:tgtEl>
+                                        <p:attrNameLst>
+                                          <p:attrName>ppt_x</p:attrName>
+                                        </p:attrNameLst>
+                                      </p:cBhvr>
+                                      <p:tavLst>
+                                        <p:tav tm="0">
+                                          <p:val>
+                                            <p:strVal val="#ppt_x"/>
+                                          </p:val>
+                                        </p:tav>
+                                        <p:tav tm="100000">
+                                          <p:val>
+                                            <p:strVal val="#ppt_x"/>
+                                          </p:val>
+                                        </p:tav>
+                                      </p:tavLst>
+                                    </p:anim>
+                                    <p:anim calcmode="lin" valueType="num">
+                                      <p:cBhvr>
+                                        <p:cTn id="9" dur="1000" fill="hold"/>
+                                        <p:tgtEl>
+                                          <p:spTgt spid="5"/>
+                                        </p:tgtEl>
+                                        <p:attrNameLst>
+                                          <p:attrName>ppt_y</p:attrName>
+                                        </p:attrNameLst>
+                                      </p:cBhvr>
+                                      <p:tavLst>
+                                        <p:tav tm="0">
+                                          <p:val>
+                                            <p:strVal val="#ppt_y+.1"/>
+                                          </p:val>
+                                        </p:tav>
+                                        <p:tav tm="100000">
+                                          <p:val>
+                                            <p:strVal val="#ppt_y"/>
+                                          </p:val>
+                                        </p:tav>
+                                      </p:tavLst>
+                                    </p:anim>
+                                  </p:childTnLst>
+                                </p:cTn>
+                              </p:par>
+                            </p:childTnLst>
+                          </p:cTn>
+                        </p:par>
+                      </p:childTnLst>
+                    </p:cTn>
+                  </p:par>
+                  <p:par>
+                    <p:cTn id="10" fill="hold">
+                      <p:stCondLst>
+                        <p:cond delay="indefinite"/>
+                      </p:stCondLst>
+                      <p:childTnLst>
+                        <p:par>
+                          <p:cTn id="11" fill="hold">
+                            <p:stCondLst>
+                              <p:cond delay="0"/>
+                            </p:stCondLst>
+                            <p:childTnLst>
+                              <p:par>
+                                <p:cTn id="12" presetID="42" presetClass="entr" presetSubtype="0" fill="hold" grpId="0" nodeType="clickEffect">
+                                  <p:stCondLst>
+                                    <p:cond delay="0"/>
+                                  </p:stCondLst>
+                                  <p:childTnLst>
+                                    <p:set>
+                                      <p:cBhvr>
+                                        <p:cTn id="13" dur="1" fill="hold">
+                                          <p:stCondLst>
+                                            <p:cond delay="0"/>
+                                          </p:stCondLst>
+                                        </p:cTn>
+                                        <p:tgtEl>
+                                          <p:spTgt spid="6"/>
+                                        </p:tgtEl>
+                                        <p:attrNameLst>
+                                          <p:attrName>style.visibility</p:attrName>
+                                        </p:attrNameLst>
+                                      </p:cBhvr>
+                                      <p:to>
+                                        <p:strVal val="visible"/>
+                                      </p:to>
+                                    </p:set>
+                                    <p:animEffect transition="in" filter="fade">
+                                      <p:cBhvr>
+                                        <p:cTn id="14" dur="1000"/>
+                                        <p:tgtEl>
+                                          <p:spTgt spid="6"/>
+                                        </p:tgtEl>
+                                      </p:cBhvr>
+                                    </p:animEffect>
+                                    <p:anim calcmode="lin" valueType="num">
+                                      <p:cBhvr>
+                                        <p:cTn id="15" dur="1000" fill="hold"/>
+                                        <p:tgtEl>
+                                          <p:spTgt spid="6"/>
+                                        </p:tgtEl>
+                                        <p:attrNameLst>
+                                          <p:attrName>ppt_x</p:attrName>
+                                        </p:attrNameLst>
+                                      </p:cBhvr>
+                                      <p:tavLst>
+                                        <p:tav tm="0">
+                                          <p:val>
+                                            <p:strVal val="#ppt_x"/>
+                                          </p:val>
+                                        </p:tav>
+                                        <p:tav tm="100000">
+                                          <p:val>
+                                            <p:strVal val="#ppt_x"/>
+                                          </p:val>
+                                        </p:tav>
+                                      </p:tavLst>
+                                    </p:anim>
+                                    <p:anim calcmode="lin" valueType="num">
+                                      <p:cBhvr>
+                                        <p:cTn id="16" dur="1000" fill="hold"/>
+                                        <p:tgtEl>
+                                          <p:spTgt spid="6"/>
+                                        </p:tgtEl>
+                                        <p:attrNameLst>
+                                          <p:attrName>ppt_y</p:attrName>
+                                        </p:attrNameLst>
+                                      </p:cBhvr>
+                                      <p:tavLst>
+                                        <p:tav tm="0">
+                                          <p:val>
+                                            <p:strVal val="#ppt_y+.1"/>
+                                          </p:val>
+                                        </p:tav>
+                                        <p:tav tm="100000">
+                                          <p:val>
+                                            <p:strVal val="#ppt_y"/>
+                                          </p:val>
+                                        </p:tav>
+                                      </p:tavLst>
+                                    </p:anim>
+                                  </p:childTnLst>
+                                </p:cTn>
+                              </p:par>
+                              <p:par>
+                                <p:cTn id="17" presetID="42" presetClass="entr" presetSubtype="0" fill="hold" grpId="0" nodeType="withEffect">
+                                  <p:stCondLst>
+                                    <p:cond delay="0"/>
+                                  </p:stCondLst>
+                                  <p:childTnLst>
+                                    <p:set>
+                                      <p:cBhvr>
+                                        <p:cTn id="18" dur="1" fill="hold">
+                                          <p:stCondLst>
+                                            <p:cond delay="0"/>
+                                          </p:stCondLst>
+                                        </p:cTn>
+                                        <p:tgtEl>
+                                          <p:spTgt spid="8"/>
+                                        </p:tgtEl>
+                                        <p:attrNameLst>
+                                          <p:attrName>style.visibility</p:attrName>
+                                        </p:attrNameLst>
+                                      </p:cBhvr>
+                                      <p:to>
+                                        <p:strVal val="visible"/>
+                                      </p:to>
+                                    </p:set>
+                                    <p:animEffect transition="in" filter="fade">
+                                      <p:cBhvr>
+                                        <p:cTn id="19" dur="1000"/>
+                                        <p:tgtEl>
+                                          <p:spTgt spid="8"/>
+                                        </p:tgtEl>
+                                      </p:cBhvr>
+                                    </p:animEffect>
+                                    <p:anim calcmode="lin" valueType="num">
+                                      <p:cBhvr>
+                                        <p:cTn id="20" dur="1000" fill="hold"/>
+                                        <p:tgtEl>
+                                          <p:spTgt spid="8"/>
+                                        </p:tgtEl>
+                                        <p:attrNameLst>
+                                          <p:attrName>ppt_x</p:attrName>
+                                        </p:attrNameLst>
+                                      </p:cBhvr>
+                                      <p:tavLst>
+                                        <p:tav tm="0">
+                                          <p:val>
+                                            <p:strVal val="#ppt_x"/>
+                                          </p:val>
+                                        </p:tav>
+                                        <p:tav tm="100000">
+                                          <p:val>
+                                            <p:strVal val="#ppt_x"/>
+                                          </p:val>
+                                        </p:tav>
+                                      </p:tavLst>
+                                    </p:anim>
+                                    <p:anim calcmode="lin" valueType="num">
+                                      <p:cBhvr>
+                                        <p:cTn id="21" dur="1000" fill="hold"/>
+                                        <p:tgtEl>
+                                          <p:spTgt spid="8"/>
+                                        </p:tgtEl>
+                                        <p:attrNameLst>
+                                          <p:attrName>ppt_y</p:attrName>
+                                        </p:attrNameLst>
+                                      </p:cBhvr>
+                                      <p:tavLst>
+                                        <p:tav tm="0">
+                                          <p:val>
+                                            <p:strVal val="#ppt_y+.1"/>
+                                          </p:val>
+                                        </p:tav>
+                                        <p:tav tm="100000">
+                                          <p:val>
+                                            <p:strVal val="#ppt_y"/>
+                                          </p:val>
+                                        </p:tav>
+                                      </p:tavLst>
+                                    </p:anim>
+                                  </p:childTnLst>
+                                </p:cTn>
+                              </p:par>
+                            </p:childTnLst>
+                          </p:cTn>
+                        </p:par>
+                      </p:childTnLst>
+                    </p:cTn>
+                  </p:par>
+                  <p:par>
+                    <p:cTn id="22" fill="hold">
+                      <p:stCondLst>
+                        <p:cond delay="indefinite"/>
+                      </p:stCondLst>
+                      <p:childTnLst>
+                        <p:par>
+                          <p:cTn id="23" fill="hold">
+                            <p:stCondLst>
+                              <p:cond delay="0"/>
+                            </p:stCondLst>
+                            <p:childTnLst>
+                              <p:par>
+                                <p:cTn id="24" presetID="42" presetClass="entr" presetSubtype="0" fill="hold" grpId="0" nodeType="clickEffect">
+                                  <p:stCondLst>
+                                    <p:cond delay="0"/>
+                                  </p:stCondLst>
+                                  <p:childTnLst>
+                                    <p:set>
+                                      <p:cBhvr>
+                                        <p:cTn id="25" dur="1" fill="hold">
+                                          <p:stCondLst>
+                                            <p:cond delay="0"/>
+                                          </p:stCondLst>
+                                        </p:cTn>
+                                        <p:tgtEl>
+                                          <p:spTgt spid="10"/>
+                                        </p:tgtEl>
+                                        <p:attrNameLst>
+                                          <p:attrName>style.visibility</p:attrName>
+                                        </p:attrNameLst>
+                                      </p:cBhvr>
+                                      <p:to>
+                                        <p:strVal val="visible"/>
+                                      </p:to>
+                                    </p:set>
+                                    <p:animEffect transition="in" filter="fade">
+                                      <p:cBhvr>
+                                        <p:cTn id="26" dur="1000"/>
+                                        <p:tgtEl>
+                                          <p:spTgt spid="10"/>
+                                        </p:tgtEl>
+                                      </p:cBhvr>
+                                    </p:animEffect>
+                                    <p:anim calcmode="lin" valueType="num">
+                                      <p:cBhvr>
+                                        <p:cTn id="27" dur="1000" fill="hold"/>
+                                        <p:tgtEl>
+                                          <p:spTgt spid="10"/>
+                                        </p:tgtEl>
+                                        <p:attrNameLst>
+                                          <p:attrName>ppt_x</p:attrName>
+                                        </p:attrNameLst>
+                                      </p:cBhvr>
+                                      <p:tavLst>
+                                        <p:tav tm="0">
+                                          <p:val>
+                                            <p:strVal val="#ppt_x"/>
+                                          </p:val>
+                                        </p:tav>
+                                        <p:tav tm="100000">
+                                          <p:val>
+                                            <p:strVal val="#ppt_x"/>
+                                          </p:val>
+                                        </p:tav>
+                                      </p:tavLst>
+                                    </p:anim>
+                                    <p:anim calcmode="lin" valueType="num">
+                                      <p:cBhvr>
+                                        <p:cTn id="28" dur="1000" fill="hold"/>
+                                        <p:tgtEl>
+                                          <p:spTgt spid="10"/>
+                                        </p:tgtEl>
+                                        <p:attrNameLst>
+                                          <p:attrName>ppt_y</p:attrName>
+                                        </p:attrNameLst>
+                                      </p:cBhvr>
+                                      <p:tavLst>
+                                        <p:tav tm="0">
+                                          <p:val>
+                                            <p:strVal val="#ppt_y+.1"/>
+                                          </p:val>
+                                        </p:tav>
+                                        <p:tav tm="100000">
+                                          <p:val>
+                                            <p:strVal val="#ppt_y"/>
+                                          </p:val>
+                                        </p:tav>
+                                      </p:tavLst>
+                                    </p:anim>
+                                  </p:childTnLst>
+                                </p:cTn>
+                              </p:par>
+                            </p:childTnLst>
+                          </p:cTn>
+                        </p:par>
+                      </p:childTnLst>
+                    </p:cTn>
+                  </p:par>
+                </p:childTnLst>
+              </p:cTn>
+              <p:prevCondLst>
+                <p:cond evt="onPrev" delay="0">
+                  <p:tgtEl>
+                    <p:sldTgt/>
+                  </p:tgtEl>
+                </p:cond>
+              </p:prevCondLst>
+              <p:nextCondLst>
+                <p:cond evt="onNext" delay="0">
+                  <p:tgtEl>
+                    <p:sldTgt/>
+                  </p:tgtEl>
+                </p:cond>
+              </p:nextCondLst>
+            </p:seq>
+          </p:childTnLst>
+        </p:cTn>
+      </p:par>
+    </p:tnLst>
+    <p:bldLst>
+      <p:bldP spid="5" grpId="0" animBg="1"/>
+      <p:bldP spid="6" grpId="0" animBg="1"/>
+      <p:bldP spid="8" grpId="0" animBg="1"/>
+      <p:bldP spid="10" grpId="0" animBg="1"/>
+    </p:bldLst>
+  </p:timing>
+</p:sld>
+</file>
+
+<file path=ppt/slides/slide11.xml><?xml version="1.0" encoding="utf-8"?>
+<p:sld xmlns:a="http://schemas.openxmlformats.org/drawingml/2006/main" xmlns:r="http://schemas.openxmlformats.org/officeDocument/2006/relationships" xmlns:p="http://schemas.openxmlformats.org/presentationml/2006/main">
+  <p:cSld>
+    <p:spTree>
+      <p:nvGrpSpPr>
+        <p:cNvPr id="1" name=""/>
+        <p:cNvGrpSpPr/>
+        <p:nvPr/>
+      </p:nvGrpSpPr>
+      <p:grpSpPr>
+        <a:xfrm>
+          <a:off x="0" y="0"/>
+          <a:ext cx="0" cy="0"/>
+          <a:chOff x="0" y="0"/>
+          <a:chExt cx="0" cy="0"/>
+        </a:xfrm>
+      </p:grpSpPr>
+      <p:pic>
+        <p:nvPicPr>
+          <p:cNvPr id="5" name="内容占位符 4" descr="图表, 条形图">
+            <a:extLst>
+              <a:ext uri="{FF2B5EF4-FFF2-40B4-BE49-F238E27FC236}">
+                <a16:creationId xmlns:a16="http://schemas.microsoft.com/office/drawing/2014/main" id="{A3C6668F-B3A4-5A4D-4217-C48E532E1E35}"/>
+              </a:ext>
+            </a:extLst>
+          </p:cNvPr>
+          <p:cNvPicPr>
+            <a:picLocks noGrp="1" noChangeAspect="1"/>
+          </p:cNvPicPr>
+          <p:nvPr>
+            <p:ph idx="1"/>
+          </p:nvPr>
+        </p:nvPicPr>
+        <p:blipFill>
+          <a:blip r:embed="rId2"/>
+          <a:stretch>
+            <a:fillRect/>
+          </a:stretch>
+        </p:blipFill>
+        <p:spPr>
+          <a:xfrm>
+            <a:off x="0" y="851237"/>
+            <a:ext cx="12120379" cy="5164801"/>
+          </a:xfrm>
+          <a:prstGeom prst="rect">
+            <a:avLst/>
+          </a:prstGeom>
+        </p:spPr>
+      </p:pic>
+      <p:sp>
+        <p:nvSpPr>
+          <p:cNvPr id="6" name="文本框 5">
+            <a:extLst>
+              <a:ext uri="{FF2B5EF4-FFF2-40B4-BE49-F238E27FC236}">
+                <a16:creationId xmlns:a16="http://schemas.microsoft.com/office/drawing/2014/main" id="{40EFB0B3-3ADE-E2E2-B543-24A683F50B78}"/>
+              </a:ext>
+            </a:extLst>
+          </p:cNvPr>
+          <p:cNvSpPr txBox="1"/>
+          <p:nvPr/>
+        </p:nvSpPr>
+        <p:spPr>
+          <a:xfrm>
+            <a:off x="411161" y="173119"/>
+            <a:ext cx="3678806" cy="461665"/>
+          </a:xfrm>
+          <a:prstGeom prst="rect">
+            <a:avLst/>
+          </a:prstGeom>
+          <a:noFill/>
+        </p:spPr>
+        <p:txBody>
+          <a:bodyPr rot="0" spcFirstLastPara="0" vertOverflow="overflow" horzOverflow="overflow" vert="horz" wrap="square" lIns="91440" tIns="45720" rIns="91440" bIns="45720" numCol="1" spcCol="0" rtlCol="0" fromWordArt="0" anchor="t" anchorCtr="0" forceAA="0" compatLnSpc="1">
+            <a:prstTxWarp prst="textNoShape">
+              <a:avLst/>
+            </a:prstTxWarp>
+            <a:spAutoFit/>
+          </a:bodyPr>
+          <a:lstStyle/>
+          <a:p>
+            <a:r>
+              <a:rPr lang="zh-CN" altLang="en-US" dirty="0">
+                <a:ea typeface="等线"/>
+              </a:rPr>
+              <a:t>两个改动过后， 平均加速</a:t>
+            </a:r>
+            <a:r>
+              <a:rPr lang="zh-CN" altLang="en-US" sz="2400" b="1" dirty="0">
+                <a:solidFill>
+                  <a:srgbClr val="FF0000"/>
+                </a:solidFill>
+                <a:ea typeface="等线"/>
+              </a:rPr>
+              <a:t>1.172x</a:t>
+            </a:r>
+            <a:endParaRPr lang="zh-CN" altLang="en-US" b="1" dirty="0">
+              <a:solidFill>
+                <a:srgbClr val="FF0000"/>
+              </a:solidFill>
+            </a:endParaRPr>
+          </a:p>
+        </p:txBody>
+      </p:sp>
+      <p:sp>
+        <p:nvSpPr>
+          <p:cNvPr id="7" name="文本框 6">
+            <a:extLst>
+              <a:ext uri="{FF2B5EF4-FFF2-40B4-BE49-F238E27FC236}">
+                <a16:creationId xmlns:a16="http://schemas.microsoft.com/office/drawing/2014/main" id="{136F3320-CC2A-4757-4C23-D54220BE9415}"/>
+              </a:ext>
+            </a:extLst>
+          </p:cNvPr>
+          <p:cNvSpPr txBox="1"/>
+          <p:nvPr/>
+        </p:nvSpPr>
+        <p:spPr>
+          <a:xfrm>
+            <a:off x="411161" y="6154960"/>
+            <a:ext cx="9220770" cy="584775"/>
+          </a:xfrm>
+          <a:prstGeom prst="rect">
+            <a:avLst/>
+          </a:prstGeom>
+          <a:noFill/>
+        </p:spPr>
+        <p:txBody>
+          <a:bodyPr rot="0" spcFirstLastPara="0" vertOverflow="overflow" horzOverflow="overflow" vert="horz" wrap="square" lIns="91440" tIns="45720" rIns="91440" bIns="45720" numCol="1" spcCol="0" rtlCol="0" fromWordArt="0" anchor="t" anchorCtr="0" forceAA="0" compatLnSpc="1">
+            <a:prstTxWarp prst="textNoShape">
+              <a:avLst/>
+            </a:prstTxWarp>
+            <a:spAutoFit/>
+          </a:bodyPr>
+          <a:lstStyle/>
+          <a:p>
+            <a:r>
+              <a:rPr lang="zh-CN" sz="1400" baseline="0" dirty="0">
+                <a:ea typeface="SimSun"/>
+              </a:rPr>
+              <a:t>实验配置：</a:t>
+            </a:r>
+            <a:r>
+              <a:rPr lang="en-US" sz="1400" baseline="0" dirty="0">
+                <a:latin typeface="SimSun"/>
+              </a:rPr>
+              <a:t>Tesla T4</a:t>
+            </a:r>
+            <a:r>
+              <a:rPr lang="zh-CN" sz="1400" baseline="0" dirty="0">
+                <a:ea typeface="SimSun"/>
+              </a:rPr>
+              <a:t>（</a:t>
+            </a:r>
+            <a:r>
+              <a:rPr lang="en-US" sz="1400" baseline="0" dirty="0">
+                <a:latin typeface="SimSun"/>
+              </a:rPr>
+              <a:t>16GB</a:t>
+            </a:r>
+            <a:r>
+              <a:rPr lang="zh-CN" sz="1400" baseline="0" dirty="0">
+                <a:ea typeface="SimSun"/>
+              </a:rPr>
+              <a:t>） </a:t>
+            </a:r>
+            <a:r>
+              <a:rPr lang="en-US" sz="1400" baseline="0" dirty="0">
+                <a:latin typeface="SimSun"/>
+              </a:rPr>
+              <a:t>n1 (32 </a:t>
+            </a:r>
+            <a:r>
+              <a:rPr lang="zh-CN" sz="1400" baseline="0" dirty="0">
+                <a:ea typeface="SimSun"/>
+              </a:rPr>
+              <a:t>个 </a:t>
+            </a:r>
+            <a:r>
+              <a:rPr lang="en-US" sz="1400" baseline="0" dirty="0">
+                <a:latin typeface="SimSun"/>
+              </a:rPr>
+              <a:t>vCPU, 104 GB </a:t>
+            </a:r>
+            <a:r>
+              <a:rPr lang="zh-CN" sz="1400" baseline="0" dirty="0">
+                <a:ea typeface="SimSun"/>
+              </a:rPr>
+              <a:t>内存</a:t>
+            </a:r>
+            <a:r>
+              <a:rPr lang="en-US" sz="1400" baseline="0" dirty="0">
+                <a:latin typeface="SimSun"/>
+              </a:rPr>
+              <a:t>)</a:t>
+            </a:r>
+            <a:endParaRPr lang="zh-CN" altLang="en-US" sz="1100" dirty="0"/>
+          </a:p>
+          <a:p>
+            <a:pPr algn="ctr"/>
+            <a:endParaRPr lang="zh-CN" altLang="en-US" dirty="0"/>
+          </a:p>
+        </p:txBody>
+      </p:sp>
+      <p:sp>
+        <p:nvSpPr>
+          <p:cNvPr id="2" name="左大括号 1">
+            <a:extLst>
+              <a:ext uri="{FF2B5EF4-FFF2-40B4-BE49-F238E27FC236}">
+                <a16:creationId xmlns:a16="http://schemas.microsoft.com/office/drawing/2014/main" id="{0EAA5234-BD69-29F4-5F2F-9AA523829B31}"/>
+              </a:ext>
+            </a:extLst>
+          </p:cNvPr>
+          <p:cNvSpPr/>
+          <p:nvPr/>
+        </p:nvSpPr>
+        <p:spPr>
+          <a:xfrm rot="5400000">
+            <a:off x="1818479" y="-61975"/>
+            <a:ext cx="392306" cy="1940887"/>
+          </a:xfrm>
+          <a:prstGeom prst="leftBrace">
+            <a:avLst/>
+          </a:prstGeom>
+        </p:spPr>
+        <p:style>
+          <a:lnRef idx="2">
+            <a:schemeClr val="accent1"/>
+          </a:lnRef>
+          <a:fillRef idx="0">
+            <a:schemeClr val="accent1"/>
+          </a:fillRef>
+          <a:effectRef idx="1">
+            <a:schemeClr val="accent1"/>
+          </a:effectRef>
+          <a:fontRef idx="minor">
+            <a:schemeClr val="tx1"/>
+          </a:fontRef>
+        </p:style>
+        <p:txBody>
+          <a:bodyPr rtlCol="0" anchor="ctr"/>
+          <a:lstStyle/>
+          <a:p>
+            <a:pPr algn="ctr"/>
+            <a:endParaRPr lang="zh-CN" altLang="en-US"/>
+          </a:p>
+        </p:txBody>
+      </p:sp>
+    </p:spTree>
+    <p:extLst>
+      <p:ext uri="{BB962C8B-B14F-4D97-AF65-F5344CB8AC3E}">
+        <p14:creationId xmlns:p14="http://schemas.microsoft.com/office/powerpoint/2010/main" val="811436649"/>
+      </p:ext>
+    </p:extLst>
+  </p:cSld>
+  <p:clrMapOvr>
+    <a:masterClrMapping/>
+  </p:clrMapOvr>
+  <p:timing>
+    <p:tnLst>
+      <p:par>
+        <p:cTn id="1" dur="indefinite" restart="never" nodeType="tmRoot">
+          <p:childTnLst>
+            <p:seq concurrent="1" nextAc="seek">
+              <p:cTn id="2" dur="indefinite" nodeType="mainSeq">
+                <p:childTnLst>
+                  <p:par>
+                    <p:cTn id="3" fill="hold">
+                      <p:stCondLst>
+                        <p:cond delay="indefinite"/>
+                      </p:stCondLst>
+                      <p:childTnLst>
+                        <p:par>
+                          <p:cTn id="4" fill="hold">
+                            <p:stCondLst>
+                              <p:cond delay="0"/>
+                            </p:stCondLst>
+                            <p:childTnLst>
+                              <p:par>
+                                <p:cTn id="5" presetID="2" presetClass="entr" presetSubtype="4" fill="hold" grpId="0" nodeType="clickEffect">
+                                  <p:stCondLst>
+                                    <p:cond delay="0"/>
+                                  </p:stCondLst>
+                                  <p:childTnLst>
+                                    <p:set>
+                                      <p:cBhvr>
+                                        <p:cTn id="6" dur="1" fill="hold">
+                                          <p:stCondLst>
+                                            <p:cond delay="0"/>
+                                          </p:stCondLst>
+                                        </p:cTn>
+                                        <p:tgtEl>
+                                          <p:spTgt spid="2"/>
+                                        </p:tgtEl>
+                                        <p:attrNameLst>
+                                          <p:attrName>style.visibility</p:attrName>
+                                        </p:attrNameLst>
+                                      </p:cBhvr>
+                                      <p:to>
+                                        <p:strVal val="visible"/>
+                                      </p:to>
+                                    </p:set>
+                                    <p:anim calcmode="lin" valueType="num">
+                                      <p:cBhvr additive="base">
+                                        <p:cTn id="7" dur="500" fill="hold"/>
+                                        <p:tgtEl>
+                                          <p:spTgt spid="2"/>
+                                        </p:tgtEl>
+                                        <p:attrNameLst>
+                                          <p:attrName>ppt_x</p:attrName>
+                                        </p:attrNameLst>
+                                      </p:cBhvr>
+                                      <p:tavLst>
+                                        <p:tav tm="0">
+                                          <p:val>
+                                            <p:strVal val="#ppt_x"/>
+                                          </p:val>
+                                        </p:tav>
+                                        <p:tav tm="100000">
+                                          <p:val>
+                                            <p:strVal val="#ppt_x"/>
+                                          </p:val>
+                                        </p:tav>
+                                      </p:tavLst>
+                                    </p:anim>
+                                    <p:anim calcmode="lin" valueType="num">
+                                      <p:cBhvr additive="base">
+                                        <p:cTn id="8" dur="500" fill="hold"/>
+                                        <p:tgtEl>
+                                          <p:spTgt spid="2"/>
+                                        </p:tgtEl>
+                                        <p:attrNameLst>
+                                          <p:attrName>ppt_y</p:attrName>
+                                        </p:attrNameLst>
+                                      </p:cBhvr>
+                                      <p:tavLst>
+                                        <p:tav tm="0">
+                                          <p:val>
+                                            <p:strVal val="1+#ppt_h/2"/>
+                                          </p:val>
+                                        </p:tav>
+                                        <p:tav tm="100000">
+                                          <p:val>
+                                            <p:strVal val="#ppt_y"/>
+                                          </p:val>
+                                        </p:tav>
+                                      </p:tavLst>
+                                    </p:anim>
+                                  </p:childTnLst>
+                                </p:cTn>
+                              </p:par>
+                            </p:childTnLst>
+                          </p:cTn>
+                        </p:par>
+                      </p:childTnLst>
+                    </p:cTn>
+                  </p:par>
+                </p:childTnLst>
+              </p:cTn>
+              <p:prevCondLst>
+                <p:cond evt="onPrev" delay="0">
+                  <p:tgtEl>
+                    <p:sldTgt/>
+                  </p:tgtEl>
+                </p:cond>
+              </p:prevCondLst>
+              <p:nextCondLst>
+                <p:cond evt="onNext" delay="0">
+                  <p:tgtEl>
+                    <p:sldTgt/>
+                  </p:tgtEl>
+                </p:cond>
+              </p:nextCondLst>
+            </p:seq>
+          </p:childTnLst>
+        </p:cTn>
+      </p:par>
+    </p:tnLst>
+    <p:bldLst>
+      <p:bldP spid="2" grpId="0" animBg="1"/>
+    </p:bldLst>
+  </p:timing>
+</p:sld>
+</file>
+
+<file path=ppt/slides/slide12.xml><?xml version="1.0" encoding="utf-8"?>
+<p:sld xmlns:a="http://schemas.openxmlformats.org/drawingml/2006/main" xmlns:r="http://schemas.openxmlformats.org/officeDocument/2006/relationships" xmlns:p="http://schemas.openxmlformats.org/presentationml/2006/main">
+  <p:cSld>
+    <p:spTree>
+      <p:nvGrpSpPr>
+        <p:cNvPr id="1" name=""/>
+        <p:cNvGrpSpPr/>
+        <p:nvPr/>
+      </p:nvGrpSpPr>
+      <p:grpSpPr>
+        <a:xfrm>
+          <a:off x="0" y="0"/>
+          <a:ext cx="0" cy="0"/>
+          <a:chOff x="0" y="0"/>
+          <a:chExt cx="0" cy="0"/>
+        </a:xfrm>
+      </p:grpSpPr>
+      <p:sp>
+        <p:nvSpPr>
+          <p:cNvPr id="3" name="内容占位符 2">
+            <a:extLst>
+              <a:ext uri="{FF2B5EF4-FFF2-40B4-BE49-F238E27FC236}">
+                <a16:creationId xmlns:a16="http://schemas.microsoft.com/office/drawing/2014/main" id="{B66A2597-E866-7094-7F93-66C9B63F7904}"/>
+              </a:ext>
+            </a:extLst>
+          </p:cNvPr>
+          <p:cNvSpPr>
+            <a:spLocks noGrp="1"/>
+          </p:cNvSpPr>
+          <p:nvPr>
+            <p:ph idx="1"/>
+          </p:nvPr>
+        </p:nvSpPr>
+        <p:spPr>
+          <a:xfrm>
+            <a:off x="838200" y="546931"/>
+            <a:ext cx="10515600" cy="5630032"/>
+          </a:xfrm>
+        </p:spPr>
+        <p:txBody>
+          <a:bodyPr/>
+          <a:lstStyle/>
+          <a:p>
+            <a:pPr marL="0" indent="0">
+              <a:buNone/>
+            </a:pPr>
+            <a:r>
+              <a:rPr lang="zh-CN" altLang="en-US" dirty="0">
+                <a:latin typeface="Calibri" panose="020F0502020204030204" pitchFamily="34" charset="0"/>
+                <a:cs typeface="Calibri" panose="020F0502020204030204" pitchFamily="34" charset="0"/>
+              </a:rPr>
+              <a:t>现在最大的感受：</a:t>
+            </a:r>
+            <a:endParaRPr lang="en-US" altLang="zh-CN" dirty="0">
+              <a:latin typeface="Calibri" panose="020F0502020204030204" pitchFamily="34" charset="0"/>
+              <a:cs typeface="Calibri" panose="020F0502020204030204" pitchFamily="34" charset="0"/>
+            </a:endParaRPr>
+          </a:p>
+          <a:p>
+            <a:pPr marL="0" indent="0">
+              <a:buNone/>
+            </a:pPr>
+            <a:r>
+              <a:rPr lang="en-US" altLang="zh-CN" sz="2000" dirty="0">
+                <a:latin typeface="Calibri" panose="020F0502020204030204" pitchFamily="34" charset="0"/>
+                <a:cs typeface="Calibri" panose="020F0502020204030204" pitchFamily="34" charset="0"/>
+              </a:rPr>
+              <a:t>	</a:t>
+            </a:r>
+            <a:r>
+              <a:rPr lang="zh-CN" altLang="en-US" sz="2000" dirty="0">
+                <a:latin typeface="Calibri" panose="020F0502020204030204" pitchFamily="34" charset="0"/>
+                <a:cs typeface="Calibri" panose="020F0502020204030204" pitchFamily="34" charset="0"/>
+              </a:rPr>
+              <a:t>读论文得不够多， 自己所做的改进大多都</a:t>
+            </a:r>
+            <a:r>
+              <a:rPr lang="zh-CN" altLang="en-US" sz="2000" dirty="0">
+                <a:solidFill>
+                  <a:srgbClr val="FF0000"/>
+                </a:solidFill>
+                <a:latin typeface="Calibri" panose="020F0502020204030204" pitchFamily="34" charset="0"/>
+                <a:cs typeface="Calibri" panose="020F0502020204030204" pitchFamily="34" charset="0"/>
+              </a:rPr>
+              <a:t>只是工程上的缝缝补补</a:t>
+            </a:r>
+            <a:r>
+              <a:rPr lang="zh-CN" altLang="en-US" dirty="0">
+                <a:latin typeface="Calibri" panose="020F0502020204030204" pitchFamily="34" charset="0"/>
+                <a:cs typeface="Calibri" panose="020F0502020204030204" pitchFamily="34" charset="0"/>
+              </a:rPr>
+              <a:t>。</a:t>
+            </a:r>
+            <a:endParaRPr lang="en-US" altLang="zh-CN" dirty="0">
+              <a:latin typeface="Calibri" panose="020F0502020204030204" pitchFamily="34" charset="0"/>
+              <a:cs typeface="Calibri" panose="020F0502020204030204" pitchFamily="34" charset="0"/>
+            </a:endParaRPr>
+          </a:p>
+          <a:p>
+            <a:pPr marL="0" indent="0">
+              <a:buNone/>
+            </a:pPr>
+            <a:r>
+              <a:rPr lang="zh-CN" altLang="en-US" dirty="0">
+                <a:latin typeface="Calibri" panose="020F0502020204030204" pitchFamily="34" charset="0"/>
+                <a:cs typeface="Calibri" panose="020F0502020204030204" pitchFamily="34" charset="0"/>
+              </a:rPr>
+              <a:t>接下来的初步打算：</a:t>
+            </a:r>
+            <a:endParaRPr lang="en-US" altLang="zh-CN" dirty="0">
+              <a:latin typeface="Calibri" panose="020F0502020204030204" pitchFamily="34" charset="0"/>
+              <a:cs typeface="Calibri" panose="020F0502020204030204" pitchFamily="34" charset="0"/>
+            </a:endParaRPr>
+          </a:p>
+          <a:p>
+            <a:pPr marL="0" indent="0">
+              <a:buNone/>
+            </a:pPr>
+            <a:r>
+              <a:rPr lang="en-US" altLang="zh-CN" sz="1800" dirty="0">
+                <a:latin typeface="Calibri" panose="020F0502020204030204" pitchFamily="34" charset="0"/>
+                <a:cs typeface="Calibri" panose="020F0502020204030204" pitchFamily="34" charset="0"/>
+              </a:rPr>
+              <a:t>	</a:t>
+            </a:r>
+            <a:r>
+              <a:rPr lang="zh-CN" altLang="en-US" sz="1800" dirty="0">
+                <a:latin typeface="Calibri" panose="020F0502020204030204" pitchFamily="34" charset="0"/>
+                <a:cs typeface="Calibri" panose="020F0502020204030204" pitchFamily="34" charset="0"/>
+              </a:rPr>
+              <a:t>准备研读的论文：</a:t>
+            </a:r>
+            <a:endParaRPr lang="en-US" altLang="zh-CN" sz="1800" dirty="0">
+              <a:latin typeface="Calibri" panose="020F0502020204030204" pitchFamily="34" charset="0"/>
+              <a:cs typeface="Calibri" panose="020F0502020204030204" pitchFamily="34" charset="0"/>
+            </a:endParaRPr>
+          </a:p>
+          <a:p>
+            <a:pPr marL="0" indent="0">
+              <a:buNone/>
+            </a:pPr>
+            <a:r>
+              <a:rPr lang="en-US" altLang="zh-CN" sz="1800" dirty="0">
+                <a:latin typeface="Calibri" panose="020F0502020204030204" pitchFamily="34" charset="0"/>
+                <a:cs typeface="Calibri" panose="020F0502020204030204" pitchFamily="34" charset="0"/>
+              </a:rPr>
+              <a:t>	1. </a:t>
+            </a:r>
+            <a:r>
+              <a:rPr lang="en-US" altLang="zh-CN" sz="1800" dirty="0" err="1">
+                <a:latin typeface="Calibri" panose="020F0502020204030204" pitchFamily="34" charset="0"/>
+                <a:cs typeface="Calibri" panose="020F0502020204030204" pitchFamily="34" charset="0"/>
+              </a:rPr>
+              <a:t>PreScope</a:t>
+            </a:r>
+            <a:r>
+              <a:rPr lang="en-US" altLang="zh-CN" sz="1800" dirty="0">
+                <a:latin typeface="Calibri" panose="020F0502020204030204" pitchFamily="34" charset="0"/>
+                <a:cs typeface="Calibri" panose="020F0502020204030204" pitchFamily="34" charset="0"/>
+              </a:rPr>
+              <a:t>: Unleashing the Power of Prefetching for Resource-Constrained </a:t>
+            </a:r>
+            <a:r>
+              <a:rPr lang="en-US" altLang="zh-CN" sz="1800" dirty="0" err="1">
+                <a:latin typeface="Calibri" panose="020F0502020204030204" pitchFamily="34" charset="0"/>
+                <a:cs typeface="Calibri" panose="020F0502020204030204" pitchFamily="34" charset="0"/>
+              </a:rPr>
+              <a:t>MoE</a:t>
+            </a:r>
+            <a:r>
+              <a:rPr lang="en-US" altLang="zh-CN" sz="1800" dirty="0">
+                <a:latin typeface="Calibri" panose="020F0502020204030204" pitchFamily="34" charset="0"/>
+                <a:cs typeface="Calibri" panose="020F0502020204030204" pitchFamily="34" charset="0"/>
+              </a:rPr>
+              <a:t> Inference                         </a:t>
+            </a:r>
+          </a:p>
+          <a:p>
+            <a:pPr marL="0" indent="0">
+              <a:buNone/>
+            </a:pPr>
+            <a:r>
+              <a:rPr lang="en-US" altLang="zh-CN" sz="1800" dirty="0">
+                <a:latin typeface="Calibri" panose="020F0502020204030204" pitchFamily="34" charset="0"/>
+                <a:cs typeface="Calibri" panose="020F0502020204030204" pitchFamily="34" charset="0"/>
+              </a:rPr>
+              <a:t>	2. Fate       （2502）    </a:t>
+            </a:r>
+            <a:r>
+              <a:rPr lang="zh-CN" altLang="en-US" sz="1800" dirty="0">
+                <a:latin typeface="Calibri" panose="020F0502020204030204" pitchFamily="34" charset="0"/>
+                <a:cs typeface="Calibri" panose="020F0502020204030204" pitchFamily="34" charset="0"/>
+              </a:rPr>
+              <a:t>在</a:t>
+            </a:r>
+            <a:r>
+              <a:rPr lang="en-US" altLang="zh-CN" sz="1800" dirty="0">
+                <a:latin typeface="Calibri" panose="020F0502020204030204" pitchFamily="34" charset="0"/>
+                <a:cs typeface="Calibri" panose="020F0502020204030204" pitchFamily="34" charset="0"/>
+              </a:rPr>
+              <a:t>attention</a:t>
+            </a:r>
+            <a:r>
+              <a:rPr lang="zh-CN" altLang="en-US" sz="1800" dirty="0">
+                <a:latin typeface="Calibri" panose="020F0502020204030204" pitchFamily="34" charset="0"/>
+                <a:cs typeface="Calibri" panose="020F0502020204030204" pitchFamily="34" charset="0"/>
+              </a:rPr>
+              <a:t>空隙加入预取</a:t>
+            </a:r>
+            <a:endParaRPr lang="en-US" altLang="zh-CN" sz="1800" dirty="0">
+              <a:latin typeface="Calibri" panose="020F0502020204030204" pitchFamily="34" charset="0"/>
+              <a:cs typeface="Calibri" panose="020F0502020204030204" pitchFamily="34" charset="0"/>
+            </a:endParaRPr>
+          </a:p>
+          <a:p>
+            <a:pPr marL="0" indent="0">
+              <a:buNone/>
+            </a:pPr>
+            <a:r>
+              <a:rPr lang="en-US" altLang="zh-CN" sz="1800" dirty="0">
+                <a:latin typeface="Calibri" panose="020F0502020204030204" pitchFamily="34" charset="0"/>
+                <a:cs typeface="Calibri" panose="020F0502020204030204" pitchFamily="34" charset="0"/>
+              </a:rPr>
+              <a:t>	3. </a:t>
+            </a:r>
+            <a:r>
+              <a:rPr lang="en-US" altLang="zh-CN" sz="1800" dirty="0" err="1">
+                <a:latin typeface="Calibri" panose="020F0502020204030204" pitchFamily="34" charset="0"/>
+                <a:cs typeface="Calibri" panose="020F0502020204030204" pitchFamily="34" charset="0"/>
+              </a:rPr>
+              <a:t>Klotski</a:t>
+            </a:r>
+            <a:r>
+              <a:rPr lang="en-US" altLang="zh-CN" sz="1800" dirty="0">
+                <a:latin typeface="Calibri" panose="020F0502020204030204" pitchFamily="34" charset="0"/>
+                <a:cs typeface="Calibri" panose="020F0502020204030204" pitchFamily="34" charset="0"/>
+              </a:rPr>
+              <a:t>   （2502）     </a:t>
+            </a:r>
+            <a:r>
+              <a:rPr lang="zh-CN" altLang="en-US" sz="1800" dirty="0">
+                <a:latin typeface="Calibri" panose="020F0502020204030204" pitchFamily="34" charset="0"/>
+                <a:cs typeface="Calibri" panose="020F0502020204030204" pitchFamily="34" charset="0"/>
+              </a:rPr>
+              <a:t>  </a:t>
+            </a:r>
+            <a:r>
+              <a:rPr lang="en-US" altLang="zh-CN" sz="1800" dirty="0">
+                <a:latin typeface="Calibri" panose="020F0502020204030204" pitchFamily="34" charset="0"/>
+                <a:cs typeface="Calibri" panose="020F0502020204030204" pitchFamily="34" charset="0"/>
+              </a:rPr>
+              <a:t>CPU RAM </a:t>
+            </a:r>
+            <a:r>
+              <a:rPr lang="zh-CN" altLang="en-US" sz="1800" dirty="0">
+                <a:latin typeface="Calibri" panose="020F0502020204030204" pitchFamily="34" charset="0"/>
+                <a:cs typeface="Calibri" panose="020F0502020204030204" pitchFamily="34" charset="0"/>
+              </a:rPr>
+              <a:t>都不够需要 </a:t>
+            </a:r>
+            <a:r>
+              <a:rPr lang="en-US" altLang="zh-CN" sz="1800" dirty="0">
+                <a:latin typeface="Calibri" panose="020F0502020204030204" pitchFamily="34" charset="0"/>
+                <a:cs typeface="Calibri" panose="020F0502020204030204" pitchFamily="34" charset="0"/>
+              </a:rPr>
+              <a:t>offload </a:t>
+            </a:r>
+            <a:r>
+              <a:rPr lang="zh-CN" altLang="en-US" sz="1800" dirty="0">
+                <a:latin typeface="Calibri" panose="020F0502020204030204" pitchFamily="34" charset="0"/>
+                <a:cs typeface="Calibri" panose="020F0502020204030204" pitchFamily="34" charset="0"/>
+              </a:rPr>
+              <a:t>到磁盘</a:t>
+            </a:r>
+            <a:endParaRPr lang="en-US" altLang="zh-CN" sz="1800" dirty="0">
+              <a:latin typeface="Calibri" panose="020F0502020204030204" pitchFamily="34" charset="0"/>
+              <a:cs typeface="Calibri" panose="020F0502020204030204" pitchFamily="34" charset="0"/>
+            </a:endParaRPr>
+          </a:p>
+          <a:p>
+            <a:pPr marL="0" indent="0">
+              <a:buNone/>
+            </a:pPr>
+            <a:r>
+              <a:rPr lang="en-US" altLang="zh-CN" sz="1800" dirty="0">
+                <a:latin typeface="Calibri" panose="020F0502020204030204" pitchFamily="34" charset="0"/>
+                <a:cs typeface="Calibri" panose="020F0502020204030204" pitchFamily="34" charset="0"/>
+              </a:rPr>
+              <a:t>	4. </a:t>
+            </a:r>
+            <a:r>
+              <a:rPr lang="en-US" altLang="zh-CN" sz="1800" dirty="0" err="1">
+                <a:latin typeface="Calibri" panose="020F0502020204030204" pitchFamily="34" charset="0"/>
+                <a:cs typeface="Calibri" panose="020F0502020204030204" pitchFamily="34" charset="0"/>
+              </a:rPr>
+              <a:t>HybriMoE</a:t>
+            </a:r>
+            <a:r>
+              <a:rPr lang="en-US" altLang="zh-CN" sz="1800" dirty="0">
+                <a:latin typeface="Calibri" panose="020F0502020204030204" pitchFamily="34" charset="0"/>
+                <a:cs typeface="Calibri" panose="020F0502020204030204" pitchFamily="34" charset="0"/>
+              </a:rPr>
+              <a:t> （2504）</a:t>
+            </a:r>
+          </a:p>
+          <a:p>
+            <a:pPr marL="0" indent="0">
+              <a:buNone/>
+            </a:pPr>
+            <a:r>
+              <a:rPr lang="en-US" altLang="zh-CN" sz="1800" dirty="0">
+                <a:latin typeface="Calibri" panose="020F0502020204030204" pitchFamily="34" charset="0"/>
+                <a:cs typeface="Calibri" panose="020F0502020204030204" pitchFamily="34" charset="0"/>
+              </a:rPr>
+              <a:t>	5. </a:t>
+            </a:r>
+            <a:r>
+              <a:rPr lang="en-US" altLang="zh-CN" sz="1800" dirty="0" err="1">
+                <a:latin typeface="Calibri" panose="020F0502020204030204" pitchFamily="34" charset="0"/>
+                <a:cs typeface="Calibri" panose="020F0502020204030204" pitchFamily="34" charset="0"/>
+              </a:rPr>
+              <a:t>MoE</a:t>
+            </a:r>
+            <a:r>
+              <a:rPr lang="en-US" altLang="zh-CN" sz="1800" dirty="0">
+                <a:latin typeface="Calibri" panose="020F0502020204030204" pitchFamily="34" charset="0"/>
+                <a:cs typeface="Calibri" panose="020F0502020204030204" pitchFamily="34" charset="0"/>
+              </a:rPr>
+              <a:t>-Infinity: Efficient </a:t>
+            </a:r>
+            <a:r>
+              <a:rPr lang="en-US" altLang="zh-CN" sz="1800" dirty="0" err="1">
+                <a:latin typeface="Calibri" panose="020F0502020204030204" pitchFamily="34" charset="0"/>
+                <a:cs typeface="Calibri" panose="020F0502020204030204" pitchFamily="34" charset="0"/>
+              </a:rPr>
+              <a:t>MoE</a:t>
+            </a:r>
+            <a:r>
+              <a:rPr lang="en-US" altLang="zh-CN" sz="1800" dirty="0">
+                <a:latin typeface="Calibri" panose="020F0502020204030204" pitchFamily="34" charset="0"/>
+                <a:cs typeface="Calibri" panose="020F0502020204030204" pitchFamily="34" charset="0"/>
+              </a:rPr>
+              <a:t> Inference on Personal Machines with Sparsity-Aware Expert Cache</a:t>
+            </a:r>
+          </a:p>
+          <a:p>
+            <a:pPr marL="0" indent="0">
+              <a:buNone/>
+            </a:pPr>
+            <a:r>
+              <a:rPr lang="en-US" altLang="zh-CN" sz="1800" dirty="0">
+                <a:latin typeface="Calibri" panose="020F0502020204030204" pitchFamily="34" charset="0"/>
+                <a:cs typeface="Calibri" panose="020F0502020204030204" pitchFamily="34" charset="0"/>
+              </a:rPr>
+              <a:t>	</a:t>
+            </a:r>
+            <a:r>
+              <a:rPr lang="zh-CN" altLang="en-US" sz="1800" dirty="0">
+                <a:solidFill>
+                  <a:srgbClr val="FF0000"/>
+                </a:solidFill>
+                <a:latin typeface="Calibri" panose="020F0502020204030204" pitchFamily="34" charset="0"/>
+                <a:cs typeface="Calibri" panose="020F0502020204030204" pitchFamily="34" charset="0"/>
+              </a:rPr>
+              <a:t>重点关注的点： 预测性路由， 专家预取， 专家</a:t>
+            </a:r>
+            <a:r>
+              <a:rPr lang="en-US" altLang="zh-CN" sz="1800" dirty="0">
+                <a:solidFill>
+                  <a:srgbClr val="FF0000"/>
+                </a:solidFill>
+                <a:latin typeface="Calibri" panose="020F0502020204030204" pitchFamily="34" charset="0"/>
+                <a:cs typeface="Calibri" panose="020F0502020204030204" pitchFamily="34" charset="0"/>
+              </a:rPr>
+              <a:t>caching</a:t>
+            </a:r>
+            <a:endParaRPr lang="zh-CN" altLang="en-US" sz="1800" dirty="0">
+              <a:solidFill>
+                <a:srgbClr val="FF0000"/>
+              </a:solidFill>
+              <a:latin typeface="Calibri" panose="020F0502020204030204" pitchFamily="34" charset="0"/>
+              <a:cs typeface="Calibri" panose="020F0502020204030204" pitchFamily="34" charset="0"/>
+            </a:endParaRPr>
+          </a:p>
+        </p:txBody>
+      </p:sp>
+    </p:spTree>
+    <p:extLst>
+      <p:ext uri="{BB962C8B-B14F-4D97-AF65-F5344CB8AC3E}">
+        <p14:creationId xmlns:p14="http://schemas.microsoft.com/office/powerpoint/2010/main" val="2383246458"/>
+      </p:ext>
+    </p:extLst>
+  </p:cSld>
+  <p:clrMapOvr>
+    <a:masterClrMapping/>
+  </p:clrMapOvr>
+</p:sld>
+</file>
+
+<file path=ppt/slides/slide13.xml><?xml version="1.0" encoding="utf-8"?>
+<p:sld xmlns:a="http://schemas.openxmlformats.org/drawingml/2006/main" xmlns:r="http://schemas.openxmlformats.org/officeDocument/2006/relationships" xmlns:p="http://schemas.openxmlformats.org/presentationml/2006/main">
+  <p:cSld>
+    <p:spTree>
+      <p:nvGrpSpPr>
+        <p:cNvPr id="1" name=""/>
+        <p:cNvGrpSpPr/>
+        <p:nvPr/>
+      </p:nvGrpSpPr>
+      <p:grpSpPr>
+        <a:xfrm>
+          <a:off x="0" y="0"/>
+          <a:ext cx="0" cy="0"/>
+          <a:chOff x="0" y="0"/>
+          <a:chExt cx="0" cy="0"/>
+        </a:xfrm>
+      </p:grpSpPr>
+      <p:sp>
+        <p:nvSpPr>
+          <p:cNvPr id="2" name="标题 1">
+            <a:extLst>
+              <a:ext uri="{FF2B5EF4-FFF2-40B4-BE49-F238E27FC236}">
+                <a16:creationId xmlns:a16="http://schemas.microsoft.com/office/drawing/2014/main" id="{98010C41-D5EB-75A5-8051-576C42BA1C74}"/>
+              </a:ext>
+            </a:extLst>
+          </p:cNvPr>
+          <p:cNvSpPr>
+            <a:spLocks noGrp="1"/>
+          </p:cNvSpPr>
+          <p:nvPr>
+            <p:ph type="title"/>
+          </p:nvPr>
+        </p:nvSpPr>
+        <p:spPr/>
+        <p:txBody>
+          <a:bodyPr/>
+          <a:lstStyle/>
+          <a:p>
+            <a:endParaRPr lang="zh-CN" altLang="en-US"/>
+          </a:p>
+        </p:txBody>
+      </p:sp>
+      <p:sp>
+        <p:nvSpPr>
+          <p:cNvPr id="3" name="内容占位符 2">
+            <a:extLst>
+              <a:ext uri="{FF2B5EF4-FFF2-40B4-BE49-F238E27FC236}">
+                <a16:creationId xmlns:a16="http://schemas.microsoft.com/office/drawing/2014/main" id="{0568FF00-7820-8650-B9FD-44933527A820}"/>
+              </a:ext>
+            </a:extLst>
+          </p:cNvPr>
+          <p:cNvSpPr>
+            <a:spLocks noGrp="1"/>
+          </p:cNvSpPr>
+          <p:nvPr>
+            <p:ph idx="1"/>
+          </p:nvPr>
+        </p:nvSpPr>
+        <p:spPr/>
+        <p:txBody>
+          <a:bodyPr/>
+          <a:lstStyle/>
+          <a:p>
+            <a:r>
+              <a:rPr lang="zh-CN" altLang="en-US" dirty="0"/>
+              <a:t>反馈结果：</a:t>
+            </a:r>
+            <a:endParaRPr lang="en-US" altLang="zh-CN" dirty="0"/>
+          </a:p>
+          <a:p>
+            <a:r>
+              <a:rPr lang="zh-CN" altLang="en-US" dirty="0"/>
+              <a:t>第</a:t>
+            </a:r>
+            <a:r>
+              <a:rPr lang="en-US" altLang="zh-CN" dirty="0"/>
+              <a:t>8</a:t>
+            </a:r>
+            <a:r>
+              <a:rPr lang="zh-CN" altLang="en-US" dirty="0"/>
+              <a:t>页</a:t>
+            </a:r>
+            <a:r>
+              <a:rPr lang="en-US" altLang="zh-CN" dirty="0"/>
+              <a:t>256</a:t>
+            </a:r>
+            <a:r>
+              <a:rPr lang="zh-CN" altLang="en-US" dirty="0"/>
+              <a:t>个全局配置轮序讲得不是很清楚， 代码不是替换， 是插在了另一个地方</a:t>
+            </a:r>
+            <a:endParaRPr lang="en-US" altLang="zh-CN" dirty="0"/>
+          </a:p>
+          <a:p>
+            <a:r>
+              <a:rPr lang="zh-CN" altLang="en-US" dirty="0"/>
+              <a:t>看来还是得把文字稿备好啊。</a:t>
+            </a:r>
+          </a:p>
+        </p:txBody>
+      </p:sp>
+    </p:spTree>
+    <p:extLst>
+      <p:ext uri="{BB962C8B-B14F-4D97-AF65-F5344CB8AC3E}">
+        <p14:creationId xmlns:p14="http://schemas.microsoft.com/office/powerpoint/2010/main" val="1673176433"/>
+      </p:ext>
+    </p:extLst>
+  </p:cSld>
+  <p:clrMapOvr>
+    <a:masterClrMapping/>
+  </p:clrMapOvr>
+</p:sld>
+</file>
+
 <file path=ppt/slides/slide2.xml><?xml version="1.0" encoding="utf-8"?>
 <p:sld xmlns:a="http://schemas.openxmlformats.org/drawingml/2006/main" xmlns:r="http://schemas.openxmlformats.org/officeDocument/2006/relationships" xmlns:p="http://schemas.openxmlformats.org/presentationml/2006/main">
   <p:cSld>
@@ -3604,12 +5268,12 @@
           <a:lstStyle/>
           <a:p>
             <a:r>
-              <a:rPr lang="zh-CN" altLang="en-US">
+              <a:rPr lang="zh-CN" altLang="en-US" dirty="0">
                 <a:ea typeface="等线"/>
               </a:rPr>
               <a:t>*图片来源：Fiddler论文</a:t>
             </a:r>
-            <a:endParaRPr lang="zh-CN" altLang="en-US"/>
+            <a:endParaRPr lang="zh-CN" altLang="en-US" dirty="0"/>
           </a:p>
         </p:txBody>
       </p:sp>
@@ -3648,7 +5312,7 @@
           <p:cNvPr id="2" name="标题 1">
             <a:extLst>
               <a:ext uri="{FF2B5EF4-FFF2-40B4-BE49-F238E27FC236}">
-                <a16:creationId xmlns:a16="http://schemas.microsoft.com/office/drawing/2014/main" id="{2FE716DE-E531-0FF8-BF73-876599504318}"/>
+                <a16:creationId xmlns:a16="http://schemas.microsoft.com/office/drawing/2014/main" id="{3F0B3855-BC90-F5A1-7842-95EFBAEABE08}"/>
               </a:ext>
             </a:extLst>
           </p:cNvPr>
@@ -3664,14 +5328,595 @@
           <a:bodyPr/>
           <a:lstStyle/>
           <a:p>
-            <a:r>
-              <a:rPr lang="zh-CN">
+            <a:endParaRPr lang="zh-CN" altLang="en-US"/>
+          </a:p>
+        </p:txBody>
+      </p:sp>
+      <p:pic>
+        <p:nvPicPr>
+          <p:cNvPr id="7" name="图片 6">
+            <a:extLst>
+              <a:ext uri="{FF2B5EF4-FFF2-40B4-BE49-F238E27FC236}">
+                <a16:creationId xmlns:a16="http://schemas.microsoft.com/office/drawing/2014/main" id="{172C8832-A23B-0EED-1EFA-739E86C23236}"/>
+              </a:ext>
+            </a:extLst>
+          </p:cNvPr>
+          <p:cNvPicPr>
+            <a:picLocks noChangeAspect="1"/>
+          </p:cNvPicPr>
+          <p:nvPr/>
+        </p:nvPicPr>
+        <p:blipFill>
+          <a:blip r:embed="rId2"/>
+          <a:stretch>
+            <a:fillRect/>
+          </a:stretch>
+        </p:blipFill>
+        <p:spPr>
+          <a:xfrm>
+            <a:off x="0" y="0"/>
+            <a:ext cx="12192000" cy="4082354"/>
+          </a:xfrm>
+          <a:prstGeom prst="rect">
+            <a:avLst/>
+          </a:prstGeom>
+        </p:spPr>
+      </p:pic>
+      <p:pic>
+        <p:nvPicPr>
+          <p:cNvPr id="13" name="图片 12">
+            <a:extLst>
+              <a:ext uri="{FF2B5EF4-FFF2-40B4-BE49-F238E27FC236}">
+                <a16:creationId xmlns:a16="http://schemas.microsoft.com/office/drawing/2014/main" id="{FCF50DD3-A97F-9D75-829A-F8D4721A2E2D}"/>
+              </a:ext>
+            </a:extLst>
+          </p:cNvPr>
+          <p:cNvPicPr>
+            <a:picLocks noChangeAspect="1"/>
+          </p:cNvPicPr>
+          <p:nvPr/>
+        </p:nvPicPr>
+        <p:blipFill>
+          <a:blip r:embed="rId3"/>
+          <a:stretch>
+            <a:fillRect/>
+          </a:stretch>
+        </p:blipFill>
+        <p:spPr>
+          <a:xfrm>
+            <a:off x="544706" y="4171933"/>
+            <a:ext cx="5211097" cy="2320942"/>
+          </a:xfrm>
+          <a:prstGeom prst="rect">
+            <a:avLst/>
+          </a:prstGeom>
+        </p:spPr>
+      </p:pic>
+      <p:pic>
+        <p:nvPicPr>
+          <p:cNvPr id="21" name="图片 20">
+            <a:extLst>
+              <a:ext uri="{FF2B5EF4-FFF2-40B4-BE49-F238E27FC236}">
+                <a16:creationId xmlns:a16="http://schemas.microsoft.com/office/drawing/2014/main" id="{8A52CF91-E834-37B3-11DE-5099CC63C7E5}"/>
+              </a:ext>
+            </a:extLst>
+          </p:cNvPr>
+          <p:cNvPicPr>
+            <a:picLocks noChangeAspect="1"/>
+          </p:cNvPicPr>
+          <p:nvPr/>
+        </p:nvPicPr>
+        <p:blipFill>
+          <a:blip r:embed="rId4"/>
+          <a:stretch>
+            <a:fillRect/>
+          </a:stretch>
+        </p:blipFill>
+        <p:spPr>
+          <a:xfrm>
+            <a:off x="6565955" y="4171933"/>
+            <a:ext cx="5120663" cy="2320942"/>
+          </a:xfrm>
+          <a:prstGeom prst="rect">
+            <a:avLst/>
+          </a:prstGeom>
+        </p:spPr>
+      </p:pic>
+      <p:sp>
+        <p:nvSpPr>
+          <p:cNvPr id="22" name="箭头: 下 21">
+            <a:extLst>
+              <a:ext uri="{FF2B5EF4-FFF2-40B4-BE49-F238E27FC236}">
+                <a16:creationId xmlns:a16="http://schemas.microsoft.com/office/drawing/2014/main" id="{21D24EA1-AF9F-F902-3246-F19889F6C968}"/>
+              </a:ext>
+            </a:extLst>
+          </p:cNvPr>
+          <p:cNvSpPr/>
+          <p:nvPr/>
+        </p:nvSpPr>
+        <p:spPr>
+          <a:xfrm>
+            <a:off x="2867084" y="3735805"/>
+            <a:ext cx="566339" cy="315540"/>
+          </a:xfrm>
+          <a:prstGeom prst="downArrow">
+            <a:avLst/>
+          </a:prstGeom>
+        </p:spPr>
+        <p:style>
+          <a:lnRef idx="2">
+            <a:schemeClr val="accent1">
+              <a:shade val="15000"/>
+            </a:schemeClr>
+          </a:lnRef>
+          <a:fillRef idx="1">
+            <a:schemeClr val="accent1"/>
+          </a:fillRef>
+          <a:effectRef idx="0">
+            <a:schemeClr val="accent1"/>
+          </a:effectRef>
+          <a:fontRef idx="minor">
+            <a:schemeClr val="lt1"/>
+          </a:fontRef>
+        </p:style>
+        <p:txBody>
+          <a:bodyPr rtlCol="0" anchor="ctr"/>
+          <a:lstStyle/>
+          <a:p>
+            <a:pPr algn="ctr"/>
+            <a:endParaRPr lang="zh-CN" altLang="en-US" dirty="0"/>
+          </a:p>
+        </p:txBody>
+      </p:sp>
+      <p:sp>
+        <p:nvSpPr>
+          <p:cNvPr id="23" name="箭头: 下 22">
+            <a:extLst>
+              <a:ext uri="{FF2B5EF4-FFF2-40B4-BE49-F238E27FC236}">
+                <a16:creationId xmlns:a16="http://schemas.microsoft.com/office/drawing/2014/main" id="{290AD365-C4FF-9BD0-6A6F-85843583F056}"/>
+              </a:ext>
+            </a:extLst>
+          </p:cNvPr>
+          <p:cNvSpPr/>
+          <p:nvPr/>
+        </p:nvSpPr>
+        <p:spPr>
+          <a:xfrm>
+            <a:off x="8843116" y="3735805"/>
+            <a:ext cx="566339" cy="315540"/>
+          </a:xfrm>
+          <a:prstGeom prst="downArrow">
+            <a:avLst/>
+          </a:prstGeom>
+        </p:spPr>
+        <p:style>
+          <a:lnRef idx="2">
+            <a:schemeClr val="accent1">
+              <a:shade val="15000"/>
+            </a:schemeClr>
+          </a:lnRef>
+          <a:fillRef idx="1">
+            <a:schemeClr val="accent1"/>
+          </a:fillRef>
+          <a:effectRef idx="0">
+            <a:schemeClr val="accent1"/>
+          </a:effectRef>
+          <a:fontRef idx="minor">
+            <a:schemeClr val="lt1"/>
+          </a:fontRef>
+        </p:style>
+        <p:txBody>
+          <a:bodyPr rtlCol="0" anchor="ctr"/>
+          <a:lstStyle/>
+          <a:p>
+            <a:pPr algn="ctr"/>
+            <a:endParaRPr lang="zh-CN" altLang="en-US"/>
+          </a:p>
+        </p:txBody>
+      </p:sp>
+    </p:spTree>
+    <p:extLst>
+      <p:ext uri="{BB962C8B-B14F-4D97-AF65-F5344CB8AC3E}">
+        <p14:creationId xmlns:p14="http://schemas.microsoft.com/office/powerpoint/2010/main" val="6720926"/>
+      </p:ext>
+    </p:extLst>
+  </p:cSld>
+  <p:clrMapOvr>
+    <a:masterClrMapping/>
+  </p:clrMapOvr>
+  <p:timing>
+    <p:tnLst>
+      <p:par>
+        <p:cTn id="1" dur="indefinite" restart="never" nodeType="tmRoot">
+          <p:childTnLst>
+            <p:seq concurrent="1" nextAc="seek">
+              <p:cTn id="2" dur="indefinite" nodeType="mainSeq">
+                <p:childTnLst>
+                  <p:par>
+                    <p:cTn id="3" fill="hold">
+                      <p:stCondLst>
+                        <p:cond delay="indefinite"/>
+                      </p:stCondLst>
+                      <p:childTnLst>
+                        <p:par>
+                          <p:cTn id="4" fill="hold">
+                            <p:stCondLst>
+                              <p:cond delay="0"/>
+                            </p:stCondLst>
+                            <p:childTnLst>
+                              <p:par>
+                                <p:cTn id="5" presetID="2" presetClass="entr" presetSubtype="4" fill="hold" nodeType="clickEffect">
+                                  <p:stCondLst>
+                                    <p:cond delay="0"/>
+                                  </p:stCondLst>
+                                  <p:childTnLst>
+                                    <p:set>
+                                      <p:cBhvr>
+                                        <p:cTn id="6" dur="1" fill="hold">
+                                          <p:stCondLst>
+                                            <p:cond delay="0"/>
+                                          </p:stCondLst>
+                                        </p:cTn>
+                                        <p:tgtEl>
+                                          <p:spTgt spid="13"/>
+                                        </p:tgtEl>
+                                        <p:attrNameLst>
+                                          <p:attrName>style.visibility</p:attrName>
+                                        </p:attrNameLst>
+                                      </p:cBhvr>
+                                      <p:to>
+                                        <p:strVal val="visible"/>
+                                      </p:to>
+                                    </p:set>
+                                    <p:anim calcmode="lin" valueType="num">
+                                      <p:cBhvr additive="base">
+                                        <p:cTn id="7" dur="500" fill="hold"/>
+                                        <p:tgtEl>
+                                          <p:spTgt spid="13"/>
+                                        </p:tgtEl>
+                                        <p:attrNameLst>
+                                          <p:attrName>ppt_x</p:attrName>
+                                        </p:attrNameLst>
+                                      </p:cBhvr>
+                                      <p:tavLst>
+                                        <p:tav tm="0">
+                                          <p:val>
+                                            <p:strVal val="#ppt_x"/>
+                                          </p:val>
+                                        </p:tav>
+                                        <p:tav tm="100000">
+                                          <p:val>
+                                            <p:strVal val="#ppt_x"/>
+                                          </p:val>
+                                        </p:tav>
+                                      </p:tavLst>
+                                    </p:anim>
+                                    <p:anim calcmode="lin" valueType="num">
+                                      <p:cBhvr additive="base">
+                                        <p:cTn id="8" dur="500" fill="hold"/>
+                                        <p:tgtEl>
+                                          <p:spTgt spid="13"/>
+                                        </p:tgtEl>
+                                        <p:attrNameLst>
+                                          <p:attrName>ppt_y</p:attrName>
+                                        </p:attrNameLst>
+                                      </p:cBhvr>
+                                      <p:tavLst>
+                                        <p:tav tm="0">
+                                          <p:val>
+                                            <p:strVal val="1+#ppt_h/2"/>
+                                          </p:val>
+                                        </p:tav>
+                                        <p:tav tm="100000">
+                                          <p:val>
+                                            <p:strVal val="#ppt_y"/>
+                                          </p:val>
+                                        </p:tav>
+                                      </p:tavLst>
+                                    </p:anim>
+                                  </p:childTnLst>
+                                </p:cTn>
+                              </p:par>
+                              <p:par>
+                                <p:cTn id="9" presetID="2" presetClass="entr" presetSubtype="4" fill="hold" nodeType="withEffect">
+                                  <p:stCondLst>
+                                    <p:cond delay="0"/>
+                                  </p:stCondLst>
+                                  <p:childTnLst>
+                                    <p:set>
+                                      <p:cBhvr>
+                                        <p:cTn id="10" dur="1" fill="hold">
+                                          <p:stCondLst>
+                                            <p:cond delay="0"/>
+                                          </p:stCondLst>
+                                        </p:cTn>
+                                        <p:tgtEl>
+                                          <p:spTgt spid="21"/>
+                                        </p:tgtEl>
+                                        <p:attrNameLst>
+                                          <p:attrName>style.visibility</p:attrName>
+                                        </p:attrNameLst>
+                                      </p:cBhvr>
+                                      <p:to>
+                                        <p:strVal val="visible"/>
+                                      </p:to>
+                                    </p:set>
+                                    <p:anim calcmode="lin" valueType="num">
+                                      <p:cBhvr additive="base">
+                                        <p:cTn id="11" dur="500" fill="hold"/>
+                                        <p:tgtEl>
+                                          <p:spTgt spid="21"/>
+                                        </p:tgtEl>
+                                        <p:attrNameLst>
+                                          <p:attrName>ppt_x</p:attrName>
+                                        </p:attrNameLst>
+                                      </p:cBhvr>
+                                      <p:tavLst>
+                                        <p:tav tm="0">
+                                          <p:val>
+                                            <p:strVal val="#ppt_x"/>
+                                          </p:val>
+                                        </p:tav>
+                                        <p:tav tm="100000">
+                                          <p:val>
+                                            <p:strVal val="#ppt_x"/>
+                                          </p:val>
+                                        </p:tav>
+                                      </p:tavLst>
+                                    </p:anim>
+                                    <p:anim calcmode="lin" valueType="num">
+                                      <p:cBhvr additive="base">
+                                        <p:cTn id="12" dur="500" fill="hold"/>
+                                        <p:tgtEl>
+                                          <p:spTgt spid="21"/>
+                                        </p:tgtEl>
+                                        <p:attrNameLst>
+                                          <p:attrName>ppt_y</p:attrName>
+                                        </p:attrNameLst>
+                                      </p:cBhvr>
+                                      <p:tavLst>
+                                        <p:tav tm="0">
+                                          <p:val>
+                                            <p:strVal val="1+#ppt_h/2"/>
+                                          </p:val>
+                                        </p:tav>
+                                        <p:tav tm="100000">
+                                          <p:val>
+                                            <p:strVal val="#ppt_y"/>
+                                          </p:val>
+                                        </p:tav>
+                                      </p:tavLst>
+                                    </p:anim>
+                                  </p:childTnLst>
+                                </p:cTn>
+                              </p:par>
+                              <p:par>
+                                <p:cTn id="13" presetID="2" presetClass="entr" presetSubtype="4" fill="hold" grpId="0" nodeType="withEffect">
+                                  <p:stCondLst>
+                                    <p:cond delay="0"/>
+                                  </p:stCondLst>
+                                  <p:childTnLst>
+                                    <p:set>
+                                      <p:cBhvr>
+                                        <p:cTn id="14" dur="1" fill="hold">
+                                          <p:stCondLst>
+                                            <p:cond delay="0"/>
+                                          </p:stCondLst>
+                                        </p:cTn>
+                                        <p:tgtEl>
+                                          <p:spTgt spid="22"/>
+                                        </p:tgtEl>
+                                        <p:attrNameLst>
+                                          <p:attrName>style.visibility</p:attrName>
+                                        </p:attrNameLst>
+                                      </p:cBhvr>
+                                      <p:to>
+                                        <p:strVal val="visible"/>
+                                      </p:to>
+                                    </p:set>
+                                    <p:anim calcmode="lin" valueType="num">
+                                      <p:cBhvr additive="base">
+                                        <p:cTn id="15" dur="500" fill="hold"/>
+                                        <p:tgtEl>
+                                          <p:spTgt spid="22"/>
+                                        </p:tgtEl>
+                                        <p:attrNameLst>
+                                          <p:attrName>ppt_x</p:attrName>
+                                        </p:attrNameLst>
+                                      </p:cBhvr>
+                                      <p:tavLst>
+                                        <p:tav tm="0">
+                                          <p:val>
+                                            <p:strVal val="#ppt_x"/>
+                                          </p:val>
+                                        </p:tav>
+                                        <p:tav tm="100000">
+                                          <p:val>
+                                            <p:strVal val="#ppt_x"/>
+                                          </p:val>
+                                        </p:tav>
+                                      </p:tavLst>
+                                    </p:anim>
+                                    <p:anim calcmode="lin" valueType="num">
+                                      <p:cBhvr additive="base">
+                                        <p:cTn id="16" dur="500" fill="hold"/>
+                                        <p:tgtEl>
+                                          <p:spTgt spid="22"/>
+                                        </p:tgtEl>
+                                        <p:attrNameLst>
+                                          <p:attrName>ppt_y</p:attrName>
+                                        </p:attrNameLst>
+                                      </p:cBhvr>
+                                      <p:tavLst>
+                                        <p:tav tm="0">
+                                          <p:val>
+                                            <p:strVal val="1+#ppt_h/2"/>
+                                          </p:val>
+                                        </p:tav>
+                                        <p:tav tm="100000">
+                                          <p:val>
+                                            <p:strVal val="#ppt_y"/>
+                                          </p:val>
+                                        </p:tav>
+                                      </p:tavLst>
+                                    </p:anim>
+                                  </p:childTnLst>
+                                </p:cTn>
+                              </p:par>
+                              <p:par>
+                                <p:cTn id="17" presetID="2" presetClass="entr" presetSubtype="4" fill="hold" grpId="0" nodeType="withEffect">
+                                  <p:stCondLst>
+                                    <p:cond delay="0"/>
+                                  </p:stCondLst>
+                                  <p:childTnLst>
+                                    <p:set>
+                                      <p:cBhvr>
+                                        <p:cTn id="18" dur="1" fill="hold">
+                                          <p:stCondLst>
+                                            <p:cond delay="0"/>
+                                          </p:stCondLst>
+                                        </p:cTn>
+                                        <p:tgtEl>
+                                          <p:spTgt spid="23"/>
+                                        </p:tgtEl>
+                                        <p:attrNameLst>
+                                          <p:attrName>style.visibility</p:attrName>
+                                        </p:attrNameLst>
+                                      </p:cBhvr>
+                                      <p:to>
+                                        <p:strVal val="visible"/>
+                                      </p:to>
+                                    </p:set>
+                                    <p:anim calcmode="lin" valueType="num">
+                                      <p:cBhvr additive="base">
+                                        <p:cTn id="19" dur="500" fill="hold"/>
+                                        <p:tgtEl>
+                                          <p:spTgt spid="23"/>
+                                        </p:tgtEl>
+                                        <p:attrNameLst>
+                                          <p:attrName>ppt_x</p:attrName>
+                                        </p:attrNameLst>
+                                      </p:cBhvr>
+                                      <p:tavLst>
+                                        <p:tav tm="0">
+                                          <p:val>
+                                            <p:strVal val="#ppt_x"/>
+                                          </p:val>
+                                        </p:tav>
+                                        <p:tav tm="100000">
+                                          <p:val>
+                                            <p:strVal val="#ppt_x"/>
+                                          </p:val>
+                                        </p:tav>
+                                      </p:tavLst>
+                                    </p:anim>
+                                    <p:anim calcmode="lin" valueType="num">
+                                      <p:cBhvr additive="base">
+                                        <p:cTn id="20" dur="500" fill="hold"/>
+                                        <p:tgtEl>
+                                          <p:spTgt spid="23"/>
+                                        </p:tgtEl>
+                                        <p:attrNameLst>
+                                          <p:attrName>ppt_y</p:attrName>
+                                        </p:attrNameLst>
+                                      </p:cBhvr>
+                                      <p:tavLst>
+                                        <p:tav tm="0">
+                                          <p:val>
+                                            <p:strVal val="1+#ppt_h/2"/>
+                                          </p:val>
+                                        </p:tav>
+                                        <p:tav tm="100000">
+                                          <p:val>
+                                            <p:strVal val="#ppt_y"/>
+                                          </p:val>
+                                        </p:tav>
+                                      </p:tavLst>
+                                    </p:anim>
+                                  </p:childTnLst>
+                                </p:cTn>
+                              </p:par>
+                            </p:childTnLst>
+                          </p:cTn>
+                        </p:par>
+                      </p:childTnLst>
+                    </p:cTn>
+                  </p:par>
+                </p:childTnLst>
+              </p:cTn>
+              <p:prevCondLst>
+                <p:cond evt="onPrev" delay="0">
+                  <p:tgtEl>
+                    <p:sldTgt/>
+                  </p:tgtEl>
+                </p:cond>
+              </p:prevCondLst>
+              <p:nextCondLst>
+                <p:cond evt="onNext" delay="0">
+                  <p:tgtEl>
+                    <p:sldTgt/>
+                  </p:tgtEl>
+                </p:cond>
+              </p:nextCondLst>
+            </p:seq>
+          </p:childTnLst>
+        </p:cTn>
+      </p:par>
+    </p:tnLst>
+    <p:bldLst>
+      <p:bldP spid="22" grpId="0" animBg="1"/>
+      <p:bldP spid="23" grpId="0" animBg="1"/>
+    </p:bldLst>
+  </p:timing>
+</p:sld>
+</file>
+
+<file path=ppt/slides/slide4.xml><?xml version="1.0" encoding="utf-8"?>
+<p:sld xmlns:a="http://schemas.openxmlformats.org/drawingml/2006/main" xmlns:r="http://schemas.openxmlformats.org/officeDocument/2006/relationships" xmlns:p="http://schemas.openxmlformats.org/presentationml/2006/main" show="0">
+  <p:cSld>
+    <p:spTree>
+      <p:nvGrpSpPr>
+        <p:cNvPr id="1" name=""/>
+        <p:cNvGrpSpPr/>
+        <p:nvPr/>
+      </p:nvGrpSpPr>
+      <p:grpSpPr>
+        <a:xfrm>
+          <a:off x="0" y="0"/>
+          <a:ext cx="0" cy="0"/>
+          <a:chOff x="0" y="0"/>
+          <a:chExt cx="0" cy="0"/>
+        </a:xfrm>
+      </p:grpSpPr>
+      <p:sp>
+        <p:nvSpPr>
+          <p:cNvPr id="2" name="标题 1">
+            <a:extLst>
+              <a:ext uri="{FF2B5EF4-FFF2-40B4-BE49-F238E27FC236}">
+                <a16:creationId xmlns:a16="http://schemas.microsoft.com/office/drawing/2014/main" id="{2FE716DE-E531-0FF8-BF73-876599504318}"/>
+              </a:ext>
+            </a:extLst>
+          </p:cNvPr>
+          <p:cNvSpPr>
+            <a:spLocks noGrp="1"/>
+          </p:cNvSpPr>
+          <p:nvPr>
+            <p:ph type="title"/>
+          </p:nvPr>
+        </p:nvSpPr>
+        <p:spPr/>
+        <p:txBody>
+          <a:bodyPr/>
+          <a:lstStyle/>
+          <a:p>
+            <a:r>
+              <a:rPr lang="zh-CN" dirty="0">
                 <a:ea typeface="+mj-lt"/>
                 <a:cs typeface="+mj-lt"/>
               </a:rPr>
               <a:t>Fiddler:</a:t>
             </a:r>
-            <a:endParaRPr lang="zh-CN" altLang="en-US">
+            <a:endParaRPr lang="zh-CN" altLang="en-US" dirty="0">
               <a:latin typeface="Calibri"/>
               <a:ea typeface="等线 Light"/>
               <a:cs typeface="Calibri"/>
@@ -3725,7 +5970,7 @@
               <a:buNone/>
             </a:pPr>
             <a:r>
-              <a:rPr lang="zh-CN" altLang="en-US" sz="3200">
+              <a:rPr lang="zh-CN" altLang="en-US" sz="3200" dirty="0">
                 <a:ea typeface="等线"/>
               </a:rPr>
               <a:t>常驻哪些专家？</a:t>
@@ -3736,7 +5981,7 @@
               <a:buNone/>
             </a:pPr>
             <a:r>
-              <a:rPr lang="zh-CN" altLang="en-US" sz="3200">
+              <a:rPr lang="zh-CN" altLang="en-US" sz="3200" dirty="0">
                 <a:ea typeface="等线"/>
               </a:rPr>
               <a:t>  GPU静态储存热点专家 </a:t>
@@ -3747,7 +5992,7 @@
               <a:buNone/>
             </a:pPr>
             <a:r>
-              <a:rPr lang="zh-CN" altLang="en-US" sz="3200">
+              <a:rPr lang="zh-CN" altLang="en-US" sz="3200" dirty="0">
                 <a:ea typeface="等线"/>
               </a:rPr>
               <a:t>  Vram空余一个专家位置灵活卸载</a:t>
@@ -3758,10 +6003,16 @@
               <a:buNone/>
             </a:pPr>
             <a:r>
-              <a:rPr lang="zh-CN" altLang="en-US" sz="3200">
+              <a:rPr lang="en-US" altLang="zh-CN" sz="3200" dirty="0">
                 <a:ea typeface="等线"/>
               </a:rPr>
-              <a:t>决策在哪跑？</a:t>
+              <a:t>token</a:t>
+            </a:r>
+            <a:r>
+              <a:rPr lang="zh-CN" altLang="en-US" sz="3200" dirty="0">
+                <a:ea typeface="等线"/>
+              </a:rPr>
+              <a:t>在哪跑？</a:t>
             </a:r>
           </a:p>
           <a:p>
@@ -3828,7 +6079,7 @@
 </p:sld>
 </file>
 
-<file path=ppt/slides/slide4.xml><?xml version="1.0" encoding="utf-8"?>
+<file path=ppt/slides/slide5.xml><?xml version="1.0" encoding="utf-8"?>
 <p:sld xmlns:a="http://schemas.openxmlformats.org/drawingml/2006/main" xmlns:r="http://schemas.openxmlformats.org/officeDocument/2006/relationships" xmlns:p="http://schemas.openxmlformats.org/presentationml/2006/main">
   <p:cSld>
     <p:bg>
@@ -3853,102 +6104,6 @@
           <a:chExt cx="0" cy="0"/>
         </a:xfrm>
       </p:grpSpPr>
-      <p:sp>
-        <p:nvSpPr>
-          <p:cNvPr id="8" name="Content Placeholder 7">
-            <a:extLst>
-              <a:ext uri="{FF2B5EF4-FFF2-40B4-BE49-F238E27FC236}">
-                <a16:creationId xmlns:a16="http://schemas.microsoft.com/office/drawing/2014/main" id="{9D7F25D8-53C6-6F67-1B11-3FE146CFC87B}"/>
-              </a:ext>
-            </a:extLst>
-          </p:cNvPr>
-          <p:cNvSpPr>
-            <a:spLocks noGrp="1"/>
-          </p:cNvSpPr>
-          <p:nvPr>
-            <p:ph idx="1"/>
-          </p:nvPr>
-        </p:nvSpPr>
-        <p:spPr>
-          <a:xfrm>
-            <a:off x="244873" y="1124538"/>
-            <a:ext cx="4789320" cy="3478212"/>
-          </a:xfrm>
-        </p:spPr>
-        <p:txBody>
-          <a:bodyPr anchor="t">
-            <a:normAutofit/>
-          </a:bodyPr>
-          <a:lstStyle/>
-          <a:p>
-            <a:pPr marL="0" indent="0">
-              <a:buNone/>
-            </a:pPr>
-            <a:endParaRPr lang="zh-CN" altLang="en-US" sz="2000" dirty="0">
-              <a:ea typeface="等线" panose="02110004020202020204"/>
-            </a:endParaRPr>
-          </a:p>
-          <a:p>
-            <a:pPr marL="0" indent="0">
-              <a:buNone/>
-            </a:pPr>
-            <a:r>
-              <a:rPr lang="zh-CN" altLang="en-US" sz="2400">
-                <a:ea typeface="等线" panose="02110004020202020204"/>
-              </a:rPr>
-              <a:t>每一个代价如何近似？</a:t>
-            </a:r>
-            <a:endParaRPr lang="zh-CN" altLang="en-US" sz="2400" dirty="0">
-              <a:ea typeface="等线" panose="02110004020202020204"/>
-            </a:endParaRPr>
-          </a:p>
-          <a:p>
-            <a:pPr marL="0" indent="0">
-              <a:buNone/>
-            </a:pPr>
-            <a:br>
-              <a:rPr lang="zh-CN" altLang="en-US" sz="2000" dirty="0">
-                <a:ea typeface="等线" panose="02110004020202020204"/>
-              </a:rPr>
-            </a:br>
-            <a:r>
-              <a:rPr lang="zh-CN" altLang="en-US" sz="2400">
-                <a:latin typeface="等线"/>
-                <a:ea typeface="等线" panose="02110004020202020204"/>
-                <a:cs typeface="Segoe UI"/>
-              </a:rPr>
-              <a:t>cpu侧 = CONST_0  *  token_num</a:t>
-            </a:r>
-            <a:endParaRPr lang="zh-CN" sz="2400">
-              <a:ea typeface="等线"/>
-            </a:endParaRPr>
-          </a:p>
-          <a:p>
-            <a:pPr marL="0" indent="0">
-              <a:buNone/>
-            </a:pPr>
-            <a:r>
-              <a:rPr lang="en-US" altLang="zh-CN" sz="2400" err="1">
-                <a:latin typeface="等线"/>
-                <a:ea typeface="等线" panose="02110004020202020204"/>
-                <a:cs typeface="Segoe UI"/>
-              </a:rPr>
-              <a:t>gpu侧</a:t>
-            </a:r>
-            <a:r>
-              <a:rPr lang="zh-CN" sz="2400">
-                <a:latin typeface="等线"/>
-                <a:ea typeface="等线" panose="02110004020202020204"/>
-                <a:cs typeface="Segoe UI"/>
-              </a:rPr>
-              <a:t> = CONST_1 </a:t>
-            </a:r>
-            <a:endParaRPr lang="zh-CN" sz="2400">
-              <a:ea typeface="等线"/>
-            </a:endParaRPr>
-          </a:p>
-        </p:txBody>
-      </p:sp>
       <p:pic>
         <p:nvPicPr>
           <p:cNvPr id="4" name="内容占位符 3" descr="图示&#10;&#10;AI 生成的内容可能不正确。">
@@ -3971,8 +6126,8 @@
         </p:blipFill>
         <p:spPr>
           <a:xfrm>
-            <a:off x="4987672" y="814023"/>
-            <a:ext cx="6389346" cy="5239263"/>
+            <a:off x="1416753" y="2442333"/>
+            <a:ext cx="4812092" cy="3945915"/>
           </a:xfrm>
           <a:prstGeom prst="rect">
             <a:avLst/>
@@ -4158,10 +6313,10 @@
       </p:grpSp>
       <p:pic>
         <p:nvPicPr>
-          <p:cNvPr id="3" name="图片 2" descr="图片包含 图示&#10;&#10;AI 生成的内容可能不正确。">
-            <a:extLst>
-              <a:ext uri="{FF2B5EF4-FFF2-40B4-BE49-F238E27FC236}">
-                <a16:creationId xmlns:a16="http://schemas.microsoft.com/office/drawing/2014/main" id="{1A062514-DC46-A19D-61AC-BE6502EC0728}"/>
+          <p:cNvPr id="2" name="图片 1" descr="文本, 信件&#10;&#10;AI 生成的内容可能不正确。">
+            <a:extLst>
+              <a:ext uri="{FF2B5EF4-FFF2-40B4-BE49-F238E27FC236}">
+                <a16:creationId xmlns:a16="http://schemas.microsoft.com/office/drawing/2014/main" id="{47F0231D-A3C9-CF4F-A34F-08ED2FA23AC6}"/>
               </a:ext>
             </a:extLst>
           </p:cNvPr>
@@ -4172,21 +6327,238 @@
         </p:nvPicPr>
         <p:blipFill>
           <a:blip r:embed="rId3"/>
-          <a:srcRect r="84" b="10683"/>
           <a:stretch>
             <a:fillRect/>
           </a:stretch>
         </p:blipFill>
         <p:spPr>
           <a:xfrm>
-            <a:off x="240788" y="409898"/>
-            <a:ext cx="10306931" cy="663578"/>
+            <a:off x="1528841" y="880478"/>
+            <a:ext cx="4849856" cy="1607662"/>
           </a:xfrm>
           <a:prstGeom prst="rect">
             <a:avLst/>
           </a:prstGeom>
         </p:spPr>
       </p:pic>
+      <p:sp>
+        <p:nvSpPr>
+          <p:cNvPr id="6" name="文本框 5">
+            <a:extLst>
+              <a:ext uri="{FF2B5EF4-FFF2-40B4-BE49-F238E27FC236}">
+                <a16:creationId xmlns:a16="http://schemas.microsoft.com/office/drawing/2014/main" id="{BCE12D41-65E9-5909-FFDC-F9882C170425}"/>
+              </a:ext>
+            </a:extLst>
+          </p:cNvPr>
+          <p:cNvSpPr txBox="1"/>
+          <p:nvPr/>
+        </p:nvSpPr>
+        <p:spPr>
+          <a:xfrm>
+            <a:off x="436552" y="238919"/>
+            <a:ext cx="8264996" cy="461665"/>
+          </a:xfrm>
+          <a:prstGeom prst="rect">
+            <a:avLst/>
+          </a:prstGeom>
+          <a:noFill/>
+        </p:spPr>
+        <p:txBody>
+          <a:bodyPr wrap="square" rtlCol="0">
+            <a:spAutoFit/>
+          </a:bodyPr>
+          <a:lstStyle/>
+          <a:p>
+            <a:r>
+              <a:rPr lang="zh-CN" altLang="en-US" sz="2400" dirty="0">
+                <a:latin typeface="Calibri" panose="020F0502020204030204" pitchFamily="34" charset="0"/>
+                <a:cs typeface="Calibri" panose="020F0502020204030204" pitchFamily="34" charset="0"/>
+              </a:rPr>
+              <a:t>对于专家权重在</a:t>
+            </a:r>
+            <a:r>
+              <a:rPr lang="en-US" altLang="zh-CN" sz="2400" dirty="0">
+                <a:latin typeface="Calibri" panose="020F0502020204030204" pitchFamily="34" charset="0"/>
+                <a:ea typeface="Calibri" panose="020F0502020204030204" pitchFamily="34" charset="0"/>
+                <a:cs typeface="Calibri" panose="020F0502020204030204" pitchFamily="34" charset="0"/>
+              </a:rPr>
+              <a:t>RAM</a:t>
+            </a:r>
+            <a:r>
+              <a:rPr lang="zh-CN" altLang="en-US" sz="2400" dirty="0">
+                <a:latin typeface="Calibri" panose="020F0502020204030204" pitchFamily="34" charset="0"/>
+                <a:cs typeface="Calibri" panose="020F0502020204030204" pitchFamily="34" charset="0"/>
+              </a:rPr>
+              <a:t>上的专家， 到底在</a:t>
+            </a:r>
+            <a:r>
+              <a:rPr lang="en-US" altLang="zh-CN" sz="2400" dirty="0" err="1">
+                <a:latin typeface="Calibri" panose="020F0502020204030204" pitchFamily="34" charset="0"/>
+                <a:ea typeface="Calibri" panose="020F0502020204030204" pitchFamily="34" charset="0"/>
+                <a:cs typeface="Calibri" panose="020F0502020204030204" pitchFamily="34" charset="0"/>
+              </a:rPr>
+              <a:t>cpu</a:t>
+            </a:r>
+            <a:r>
+              <a:rPr lang="zh-CN" altLang="en-US" sz="2400" dirty="0">
+                <a:latin typeface="Calibri" panose="020F0502020204030204" pitchFamily="34" charset="0"/>
+                <a:cs typeface="Calibri" panose="020F0502020204030204" pitchFamily="34" charset="0"/>
+              </a:rPr>
+              <a:t>算还是在</a:t>
+            </a:r>
+            <a:r>
+              <a:rPr lang="en-US" altLang="zh-CN" sz="2400" dirty="0" err="1">
+                <a:latin typeface="Calibri" panose="020F0502020204030204" pitchFamily="34" charset="0"/>
+                <a:ea typeface="Calibri" panose="020F0502020204030204" pitchFamily="34" charset="0"/>
+                <a:cs typeface="Calibri" panose="020F0502020204030204" pitchFamily="34" charset="0"/>
+              </a:rPr>
+              <a:t>gpu</a:t>
+            </a:r>
+            <a:r>
+              <a:rPr lang="zh-CN" altLang="en-US" sz="2400" dirty="0">
+                <a:latin typeface="Calibri" panose="020F0502020204030204" pitchFamily="34" charset="0"/>
+                <a:cs typeface="Calibri" panose="020F0502020204030204" pitchFamily="34" charset="0"/>
+              </a:rPr>
+              <a:t>上算？</a:t>
+            </a:r>
+          </a:p>
+        </p:txBody>
+      </p:sp>
+      <p:sp>
+        <p:nvSpPr>
+          <p:cNvPr id="16" name="文本框 15">
+            <a:extLst>
+              <a:ext uri="{FF2B5EF4-FFF2-40B4-BE49-F238E27FC236}">
+                <a16:creationId xmlns:a16="http://schemas.microsoft.com/office/drawing/2014/main" id="{E644A6DE-1206-3F70-26A0-4B618C8F702D}"/>
+              </a:ext>
+            </a:extLst>
+          </p:cNvPr>
+          <p:cNvSpPr txBox="1"/>
+          <p:nvPr/>
+        </p:nvSpPr>
+        <p:spPr>
+          <a:xfrm>
+            <a:off x="6801956" y="3105834"/>
+            <a:ext cx="5164025" cy="646331"/>
+          </a:xfrm>
+          <a:prstGeom prst="rect">
+            <a:avLst/>
+          </a:prstGeom>
+          <a:noFill/>
+        </p:spPr>
+        <p:txBody>
+          <a:bodyPr wrap="square" rtlCol="0">
+            <a:spAutoFit/>
+          </a:bodyPr>
+          <a:lstStyle/>
+          <a:p>
+            <a:r>
+              <a:rPr lang="en-US" altLang="zh-CN" dirty="0"/>
+              <a:t>latency at CPU: number of token * </a:t>
+            </a:r>
+            <a:r>
+              <a:rPr lang="en-US" altLang="zh-CN" dirty="0" err="1"/>
+              <a:t>cost_at_cpu</a:t>
+            </a:r>
+            <a:endParaRPr lang="en-US" altLang="zh-CN" dirty="0"/>
+          </a:p>
+          <a:p>
+            <a:r>
+              <a:rPr lang="en-US" altLang="zh-CN" dirty="0"/>
+              <a:t>latency at GPU: </a:t>
+            </a:r>
+            <a:r>
+              <a:rPr lang="en-US" altLang="zh-CN" dirty="0" err="1"/>
+              <a:t>cost_at_gpu</a:t>
+            </a:r>
+            <a:r>
+              <a:rPr lang="en-US" altLang="zh-CN" dirty="0"/>
+              <a:t> (constant)</a:t>
+            </a:r>
+            <a:endParaRPr lang="zh-CN" altLang="en-US" dirty="0"/>
+          </a:p>
+        </p:txBody>
+      </p:sp>
+      <p:cxnSp>
+        <p:nvCxnSpPr>
+          <p:cNvPr id="18" name="直接箭头连接符 17">
+            <a:extLst>
+              <a:ext uri="{FF2B5EF4-FFF2-40B4-BE49-F238E27FC236}">
+                <a16:creationId xmlns:a16="http://schemas.microsoft.com/office/drawing/2014/main" id="{CABE9118-5BE7-7DF7-6F40-F6561C89D66B}"/>
+              </a:ext>
+            </a:extLst>
+          </p:cNvPr>
+          <p:cNvCxnSpPr/>
+          <p:nvPr/>
+        </p:nvCxnSpPr>
+        <p:spPr>
+          <a:xfrm>
+            <a:off x="4849270" y="3167954"/>
+            <a:ext cx="1905491" cy="147483"/>
+          </a:xfrm>
+          <a:prstGeom prst="straightConnector1">
+            <a:avLst/>
+          </a:prstGeom>
+          <a:ln>
+            <a:tailEnd type="triangle"/>
+          </a:ln>
+        </p:spPr>
+        <p:style>
+          <a:lnRef idx="2">
+            <a:schemeClr val="accent1"/>
+          </a:lnRef>
+          <a:fillRef idx="0">
+            <a:schemeClr val="accent1"/>
+          </a:fillRef>
+          <a:effectRef idx="1">
+            <a:schemeClr val="accent1"/>
+          </a:effectRef>
+          <a:fontRef idx="minor">
+            <a:schemeClr val="tx1"/>
+          </a:fontRef>
+        </p:style>
+      </p:cxnSp>
+      <p:cxnSp>
+        <p:nvCxnSpPr>
+          <p:cNvPr id="20" name="直接箭头连接符 19">
+            <a:extLst>
+              <a:ext uri="{FF2B5EF4-FFF2-40B4-BE49-F238E27FC236}">
+                <a16:creationId xmlns:a16="http://schemas.microsoft.com/office/drawing/2014/main" id="{BC1E9321-68D6-8105-9B35-F1578401FA22}"/>
+              </a:ext>
+            </a:extLst>
+          </p:cNvPr>
+          <p:cNvCxnSpPr>
+            <a:cxnSpLocks/>
+          </p:cNvCxnSpPr>
+          <p:nvPr/>
+        </p:nvCxnSpPr>
+        <p:spPr>
+          <a:xfrm flipV="1">
+            <a:off x="5043948" y="3628103"/>
+            <a:ext cx="1710813" cy="194679"/>
+          </a:xfrm>
+          <a:prstGeom prst="straightConnector1">
+            <a:avLst/>
+          </a:prstGeom>
+          <a:ln>
+            <a:tailEnd type="triangle"/>
+          </a:ln>
+        </p:spPr>
+        <p:style>
+          <a:lnRef idx="2">
+            <a:schemeClr val="accent1"/>
+          </a:lnRef>
+          <a:fillRef idx="0">
+            <a:schemeClr val="accent1"/>
+          </a:fillRef>
+          <a:effectRef idx="1">
+            <a:schemeClr val="accent1"/>
+          </a:effectRef>
+          <a:fontRef idx="minor">
+            <a:schemeClr val="tx1"/>
+          </a:fontRef>
+        </p:style>
+      </p:cxnSp>
     </p:spTree>
     <p:extLst>
       <p:ext uri="{BB962C8B-B14F-4D97-AF65-F5344CB8AC3E}">
@@ -4197,120 +6569,348 @@
   <p:clrMapOvr>
     <a:masterClrMapping/>
   </p:clrMapOvr>
-</p:sld>
-</file>
-
-<file path=ppt/slides/slide5.xml><?xml version="1.0" encoding="utf-8"?>
-<p:sld xmlns:a="http://schemas.openxmlformats.org/drawingml/2006/main" xmlns:r="http://schemas.openxmlformats.org/officeDocument/2006/relationships" xmlns:p="http://schemas.openxmlformats.org/presentationml/2006/main">
-  <p:cSld>
-    <p:spTree>
-      <p:nvGrpSpPr>
-        <p:cNvPr id="1" name=""/>
-        <p:cNvGrpSpPr/>
-        <p:nvPr/>
-      </p:nvGrpSpPr>
-      <p:grpSpPr>
-        <a:xfrm>
-          <a:off x="0" y="0"/>
-          <a:ext cx="0" cy="0"/>
-          <a:chOff x="0" y="0"/>
-          <a:chExt cx="0" cy="0"/>
-        </a:xfrm>
-      </p:grpSpPr>
-      <p:sp>
-        <p:nvSpPr>
-          <p:cNvPr id="3" name="内容占位符 2">
-            <a:extLst>
-              <a:ext uri="{FF2B5EF4-FFF2-40B4-BE49-F238E27FC236}">
-                <a16:creationId xmlns:a16="http://schemas.microsoft.com/office/drawing/2014/main" id="{B3EF8B80-25AD-D1D3-C9FB-6BCB180BEA7A}"/>
-              </a:ext>
-            </a:extLst>
-          </p:cNvPr>
-          <p:cNvSpPr>
-            <a:spLocks noGrp="1"/>
-          </p:cNvSpPr>
-          <p:nvPr>
-            <p:ph idx="1"/>
-          </p:nvPr>
-        </p:nvSpPr>
-        <p:spPr>
-          <a:xfrm>
-            <a:off x="838200" y="483466"/>
-            <a:ext cx="10515600" cy="4351338"/>
-          </a:xfrm>
-        </p:spPr>
-        <p:txBody>
-          <a:bodyPr vert="horz" lIns="91440" tIns="45720" rIns="91440" bIns="45720" rtlCol="0" anchor="t">
-            <a:normAutofit/>
-          </a:bodyPr>
-          <a:lstStyle/>
-          <a:p>
-            <a:pPr marL="514350" indent="-514350">
-              <a:buAutoNum type="arabicPeriod"/>
-            </a:pPr>
-            <a:r>
-              <a:rPr lang="zh-CN" altLang="en-US">
-                <a:ea typeface="等线"/>
-              </a:rPr>
-              <a:t>阅读源码， profiler 打点</a:t>
-            </a:r>
-          </a:p>
-          <a:p>
-            <a:pPr marL="0" indent="0">
-              <a:buNone/>
-            </a:pPr>
-            <a:r>
-              <a:rPr lang="zh-CN" altLang="en-US">
-                <a:ea typeface="等线"/>
-              </a:rPr>
-              <a:t>图示为decode过程完整的一层， 两个专家都分配到cpu上</a:t>
-            </a:r>
-            <a:endParaRPr lang="zh-CN" altLang="en-US" dirty="0">
-              <a:ea typeface="等线"/>
-            </a:endParaRPr>
-          </a:p>
-        </p:txBody>
-      </p:sp>
-      <p:pic>
-        <p:nvPicPr>
-          <p:cNvPr id="8" name="图片 7" descr="图形用户界面, 图表&#10;&#10;AI 生成的内容可能不正确。">
-            <a:extLst>
-              <a:ext uri="{FF2B5EF4-FFF2-40B4-BE49-F238E27FC236}">
-                <a16:creationId xmlns:a16="http://schemas.microsoft.com/office/drawing/2014/main" id="{BF774337-FAF5-936E-D926-D9B4143B556D}"/>
-              </a:ext>
-            </a:extLst>
-          </p:cNvPr>
-          <p:cNvPicPr>
-            <a:picLocks noChangeAspect="1"/>
-          </p:cNvPicPr>
-          <p:nvPr/>
-        </p:nvPicPr>
-        <p:blipFill>
-          <a:blip r:embed="rId2"/>
-          <a:stretch>
-            <a:fillRect/>
-          </a:stretch>
-        </p:blipFill>
-        <p:spPr>
-          <a:xfrm>
-            <a:off x="0" y="1663840"/>
-            <a:ext cx="12192000" cy="1989002"/>
-          </a:xfrm>
-          <a:prstGeom prst="rect">
-            <a:avLst/>
-          </a:prstGeom>
-        </p:spPr>
-      </p:pic>
-    </p:spTree>
-    <p:extLst>
-      <p:ext uri="{BB962C8B-B14F-4D97-AF65-F5344CB8AC3E}">
-        <p14:creationId xmlns:p14="http://schemas.microsoft.com/office/powerpoint/2010/main" val="726799779"/>
-      </p:ext>
-    </p:extLst>
-  </p:cSld>
-  <p:clrMapOvr>
-    <a:masterClrMapping/>
-  </p:clrMapOvr>
+  <p:timing>
+    <p:tnLst>
+      <p:par>
+        <p:cTn id="1" dur="indefinite" restart="never" nodeType="tmRoot">
+          <p:childTnLst>
+            <p:seq concurrent="1" nextAc="seek">
+              <p:cTn id="2" dur="indefinite" nodeType="mainSeq">
+                <p:childTnLst>
+                  <p:par>
+                    <p:cTn id="3" fill="hold">
+                      <p:stCondLst>
+                        <p:cond delay="indefinite"/>
+                      </p:stCondLst>
+                      <p:childTnLst>
+                        <p:par>
+                          <p:cTn id="4" fill="hold">
+                            <p:stCondLst>
+                              <p:cond delay="0"/>
+                            </p:stCondLst>
+                            <p:childTnLst>
+                              <p:par>
+                                <p:cTn id="5" presetID="1" presetClass="entr" presetSubtype="0" fill="hold" nodeType="clickEffect">
+                                  <p:stCondLst>
+                                    <p:cond delay="0"/>
+                                  </p:stCondLst>
+                                  <p:childTnLst>
+                                    <p:set>
+                                      <p:cBhvr>
+                                        <p:cTn id="6" dur="1" fill="hold">
+                                          <p:stCondLst>
+                                            <p:cond delay="0"/>
+                                          </p:stCondLst>
+                                        </p:cTn>
+                                        <p:tgtEl>
+                                          <p:spTgt spid="4"/>
+                                        </p:tgtEl>
+                                        <p:attrNameLst>
+                                          <p:attrName>style.visibility</p:attrName>
+                                        </p:attrNameLst>
+                                      </p:cBhvr>
+                                      <p:to>
+                                        <p:strVal val="visible"/>
+                                      </p:to>
+                                    </p:set>
+                                  </p:childTnLst>
+                                </p:cTn>
+                              </p:par>
+                              <p:par>
+                                <p:cTn id="7" presetID="1" presetClass="entr" presetSubtype="0" fill="hold" nodeType="withEffect">
+                                  <p:stCondLst>
+                                    <p:cond delay="0"/>
+                                  </p:stCondLst>
+                                  <p:childTnLst>
+                                    <p:set>
+                                      <p:cBhvr>
+                                        <p:cTn id="8" dur="1" fill="hold">
+                                          <p:stCondLst>
+                                            <p:cond delay="0"/>
+                                          </p:stCondLst>
+                                        </p:cTn>
+                                        <p:tgtEl>
+                                          <p:spTgt spid="2"/>
+                                        </p:tgtEl>
+                                        <p:attrNameLst>
+                                          <p:attrName>style.visibility</p:attrName>
+                                        </p:attrNameLst>
+                                      </p:cBhvr>
+                                      <p:to>
+                                        <p:strVal val="visible"/>
+                                      </p:to>
+                                    </p:set>
+                                  </p:childTnLst>
+                                </p:cTn>
+                              </p:par>
+                            </p:childTnLst>
+                          </p:cTn>
+                        </p:par>
+                      </p:childTnLst>
+                    </p:cTn>
+                  </p:par>
+                  <p:par>
+                    <p:cTn id="9" fill="hold">
+                      <p:stCondLst>
+                        <p:cond delay="indefinite"/>
+                      </p:stCondLst>
+                      <p:childTnLst>
+                        <p:par>
+                          <p:cTn id="10" fill="hold">
+                            <p:stCondLst>
+                              <p:cond delay="0"/>
+                            </p:stCondLst>
+                            <p:childTnLst>
+                              <p:par>
+                                <p:cTn id="11" presetID="2" presetClass="entr" presetSubtype="4" fill="hold" nodeType="clickEffect">
+                                  <p:stCondLst>
+                                    <p:cond delay="0"/>
+                                  </p:stCondLst>
+                                  <p:childTnLst>
+                                    <p:set>
+                                      <p:cBhvr>
+                                        <p:cTn id="12" dur="1" fill="hold">
+                                          <p:stCondLst>
+                                            <p:cond delay="0"/>
+                                          </p:stCondLst>
+                                        </p:cTn>
+                                        <p:tgtEl>
+                                          <p:spTgt spid="20"/>
+                                        </p:tgtEl>
+                                        <p:attrNameLst>
+                                          <p:attrName>style.visibility</p:attrName>
+                                        </p:attrNameLst>
+                                      </p:cBhvr>
+                                      <p:to>
+                                        <p:strVal val="visible"/>
+                                      </p:to>
+                                    </p:set>
+                                    <p:anim calcmode="lin" valueType="num">
+                                      <p:cBhvr additive="base">
+                                        <p:cTn id="13" dur="500" fill="hold"/>
+                                        <p:tgtEl>
+                                          <p:spTgt spid="20"/>
+                                        </p:tgtEl>
+                                        <p:attrNameLst>
+                                          <p:attrName>ppt_x</p:attrName>
+                                        </p:attrNameLst>
+                                      </p:cBhvr>
+                                      <p:tavLst>
+                                        <p:tav tm="0">
+                                          <p:val>
+                                            <p:strVal val="#ppt_x"/>
+                                          </p:val>
+                                        </p:tav>
+                                        <p:tav tm="100000">
+                                          <p:val>
+                                            <p:strVal val="#ppt_x"/>
+                                          </p:val>
+                                        </p:tav>
+                                      </p:tavLst>
+                                    </p:anim>
+                                    <p:anim calcmode="lin" valueType="num">
+                                      <p:cBhvr additive="base">
+                                        <p:cTn id="14" dur="500" fill="hold"/>
+                                        <p:tgtEl>
+                                          <p:spTgt spid="20"/>
+                                        </p:tgtEl>
+                                        <p:attrNameLst>
+                                          <p:attrName>ppt_y</p:attrName>
+                                        </p:attrNameLst>
+                                      </p:cBhvr>
+                                      <p:tavLst>
+                                        <p:tav tm="0">
+                                          <p:val>
+                                            <p:strVal val="1+#ppt_h/2"/>
+                                          </p:val>
+                                        </p:tav>
+                                        <p:tav tm="100000">
+                                          <p:val>
+                                            <p:strVal val="#ppt_y"/>
+                                          </p:val>
+                                        </p:tav>
+                                      </p:tavLst>
+                                    </p:anim>
+                                  </p:childTnLst>
+                                </p:cTn>
+                              </p:par>
+                              <p:par>
+                                <p:cTn id="15" presetID="2" presetClass="entr" presetSubtype="4" fill="hold" nodeType="withEffect">
+                                  <p:stCondLst>
+                                    <p:cond delay="0"/>
+                                  </p:stCondLst>
+                                  <p:childTnLst>
+                                    <p:set>
+                                      <p:cBhvr>
+                                        <p:cTn id="16" dur="1" fill="hold">
+                                          <p:stCondLst>
+                                            <p:cond delay="0"/>
+                                          </p:stCondLst>
+                                        </p:cTn>
+                                        <p:tgtEl>
+                                          <p:spTgt spid="18"/>
+                                        </p:tgtEl>
+                                        <p:attrNameLst>
+                                          <p:attrName>style.visibility</p:attrName>
+                                        </p:attrNameLst>
+                                      </p:cBhvr>
+                                      <p:to>
+                                        <p:strVal val="visible"/>
+                                      </p:to>
+                                    </p:set>
+                                    <p:anim calcmode="lin" valueType="num">
+                                      <p:cBhvr additive="base">
+                                        <p:cTn id="17" dur="500" fill="hold"/>
+                                        <p:tgtEl>
+                                          <p:spTgt spid="18"/>
+                                        </p:tgtEl>
+                                        <p:attrNameLst>
+                                          <p:attrName>ppt_x</p:attrName>
+                                        </p:attrNameLst>
+                                      </p:cBhvr>
+                                      <p:tavLst>
+                                        <p:tav tm="0">
+                                          <p:val>
+                                            <p:strVal val="#ppt_x"/>
+                                          </p:val>
+                                        </p:tav>
+                                        <p:tav tm="100000">
+                                          <p:val>
+                                            <p:strVal val="#ppt_x"/>
+                                          </p:val>
+                                        </p:tav>
+                                      </p:tavLst>
+                                    </p:anim>
+                                    <p:anim calcmode="lin" valueType="num">
+                                      <p:cBhvr additive="base">
+                                        <p:cTn id="18" dur="500" fill="hold"/>
+                                        <p:tgtEl>
+                                          <p:spTgt spid="18"/>
+                                        </p:tgtEl>
+                                        <p:attrNameLst>
+                                          <p:attrName>ppt_y</p:attrName>
+                                        </p:attrNameLst>
+                                      </p:cBhvr>
+                                      <p:tavLst>
+                                        <p:tav tm="0">
+                                          <p:val>
+                                            <p:strVal val="1+#ppt_h/2"/>
+                                          </p:val>
+                                        </p:tav>
+                                        <p:tav tm="100000">
+                                          <p:val>
+                                            <p:strVal val="#ppt_y"/>
+                                          </p:val>
+                                        </p:tav>
+                                      </p:tavLst>
+                                    </p:anim>
+                                  </p:childTnLst>
+                                </p:cTn>
+                              </p:par>
+                              <p:par>
+                                <p:cTn id="19" presetID="2" presetClass="entr" presetSubtype="4" fill="hold" grpId="0" nodeType="withEffect">
+                                  <p:stCondLst>
+                                    <p:cond delay="0"/>
+                                  </p:stCondLst>
+                                  <p:childTnLst>
+                                    <p:set>
+                                      <p:cBhvr>
+                                        <p:cTn id="20" dur="1" fill="hold">
+                                          <p:stCondLst>
+                                            <p:cond delay="0"/>
+                                          </p:stCondLst>
+                                        </p:cTn>
+                                        <p:tgtEl>
+                                          <p:spTgt spid="16"/>
+                                        </p:tgtEl>
+                                        <p:attrNameLst>
+                                          <p:attrName>style.visibility</p:attrName>
+                                        </p:attrNameLst>
+                                      </p:cBhvr>
+                                      <p:to>
+                                        <p:strVal val="visible"/>
+                                      </p:to>
+                                    </p:set>
+                                    <p:anim calcmode="lin" valueType="num">
+                                      <p:cBhvr additive="base">
+                                        <p:cTn id="21" dur="500" fill="hold"/>
+                                        <p:tgtEl>
+                                          <p:spTgt spid="16"/>
+                                        </p:tgtEl>
+                                        <p:attrNameLst>
+                                          <p:attrName>ppt_x</p:attrName>
+                                        </p:attrNameLst>
+                                      </p:cBhvr>
+                                      <p:tavLst>
+                                        <p:tav tm="0">
+                                          <p:val>
+                                            <p:strVal val="#ppt_x"/>
+                                          </p:val>
+                                        </p:tav>
+                                        <p:tav tm="100000">
+                                          <p:val>
+                                            <p:strVal val="#ppt_x"/>
+                                          </p:val>
+                                        </p:tav>
+                                      </p:tavLst>
+                                    </p:anim>
+                                    <p:anim calcmode="lin" valueType="num">
+                                      <p:cBhvr additive="base">
+                                        <p:cTn id="22" dur="500" fill="hold"/>
+                                        <p:tgtEl>
+                                          <p:spTgt spid="16"/>
+                                        </p:tgtEl>
+                                        <p:attrNameLst>
+                                          <p:attrName>ppt_y</p:attrName>
+                                        </p:attrNameLst>
+                                      </p:cBhvr>
+                                      <p:tavLst>
+                                        <p:tav tm="0">
+                                          <p:val>
+                                            <p:strVal val="1+#ppt_h/2"/>
+                                          </p:val>
+                                        </p:tav>
+                                        <p:tav tm="100000">
+                                          <p:val>
+                                            <p:strVal val="#ppt_y"/>
+                                          </p:val>
+                                        </p:tav>
+                                      </p:tavLst>
+                                    </p:anim>
+                                  </p:childTnLst>
+                                </p:cTn>
+                              </p:par>
+                            </p:childTnLst>
+                          </p:cTn>
+                        </p:par>
+                      </p:childTnLst>
+                    </p:cTn>
+                  </p:par>
+                </p:childTnLst>
+              </p:cTn>
+              <p:prevCondLst>
+                <p:cond evt="onPrev" delay="0">
+                  <p:tgtEl>
+                    <p:sldTgt/>
+                  </p:tgtEl>
+                </p:cond>
+              </p:prevCondLst>
+              <p:nextCondLst>
+                <p:cond evt="onNext" delay="0">
+                  <p:tgtEl>
+                    <p:sldTgt/>
+                  </p:tgtEl>
+                </p:cond>
+              </p:nextCondLst>
+            </p:seq>
+          </p:childTnLst>
+        </p:cTn>
+      </p:par>
+    </p:tnLst>
+    <p:bldLst>
+      <p:bldP spid="16" grpId="0"/>
+    </p:bldLst>
+  </p:timing>
 </p:sld>
 </file>
 
@@ -4331,111 +6931,103 @@
           <a:chExt cx="0" cy="0"/>
         </a:xfrm>
       </p:grpSpPr>
-      <p:pic>
-        <p:nvPicPr>
-          <p:cNvPr id="4" name="图片 3" descr="图片包含 日程表&#10;&#10;AI 生成的内容可能不正确。">
-            <a:extLst>
-              <a:ext uri="{FF2B5EF4-FFF2-40B4-BE49-F238E27FC236}">
-                <a16:creationId xmlns:a16="http://schemas.microsoft.com/office/drawing/2014/main" id="{CD805AF1-A589-0CDF-68BF-7C0208DD15F0}"/>
-              </a:ext>
-            </a:extLst>
-          </p:cNvPr>
-          <p:cNvPicPr>
-            <a:picLocks noChangeAspect="1"/>
-          </p:cNvPicPr>
-          <p:nvPr/>
-        </p:nvPicPr>
-        <p:blipFill>
-          <a:blip r:embed="rId2"/>
-          <a:stretch>
-            <a:fillRect/>
-          </a:stretch>
-        </p:blipFill>
-        <p:spPr>
-          <a:xfrm>
-            <a:off x="180813" y="1061016"/>
-            <a:ext cx="11843289" cy="2075425"/>
-          </a:xfrm>
-          <a:prstGeom prst="rect">
-            <a:avLst/>
-          </a:prstGeom>
-        </p:spPr>
-      </p:pic>
-      <p:pic>
-        <p:nvPicPr>
-          <p:cNvPr id="7" name="图片 6" descr="图片包含 图形用户界面&#10;&#10;AI 生成的内容可能不正确。">
-            <a:extLst>
-              <a:ext uri="{FF2B5EF4-FFF2-40B4-BE49-F238E27FC236}">
-                <a16:creationId xmlns:a16="http://schemas.microsoft.com/office/drawing/2014/main" id="{4D0BFCCC-D44C-1C8F-F506-F23473B65FAD}"/>
-              </a:ext>
-            </a:extLst>
-          </p:cNvPr>
-          <p:cNvPicPr>
-            <a:picLocks noChangeAspect="1"/>
-          </p:cNvPicPr>
-          <p:nvPr/>
-        </p:nvPicPr>
-        <p:blipFill>
-          <a:blip r:embed="rId3"/>
-          <a:stretch>
-            <a:fillRect/>
-          </a:stretch>
-        </p:blipFill>
-        <p:spPr>
-          <a:xfrm>
-            <a:off x="182105" y="3690373"/>
-            <a:ext cx="9541789" cy="2266950"/>
-          </a:xfrm>
-          <a:prstGeom prst="rect">
-            <a:avLst/>
-          </a:prstGeom>
-        </p:spPr>
-      </p:pic>
-      <p:sp>
-        <p:nvSpPr>
-          <p:cNvPr id="9" name="文本框 8">
-            <a:extLst>
-              <a:ext uri="{FF2B5EF4-FFF2-40B4-BE49-F238E27FC236}">
-                <a16:creationId xmlns:a16="http://schemas.microsoft.com/office/drawing/2014/main" id="{43E11B30-7231-F042-B57E-6FD542B1593A}"/>
-              </a:ext>
-            </a:extLst>
-          </p:cNvPr>
-          <p:cNvSpPr txBox="1"/>
-          <p:nvPr/>
-        </p:nvSpPr>
-        <p:spPr>
-          <a:xfrm>
-            <a:off x="290901" y="96967"/>
-            <a:ext cx="3264556" cy="369332"/>
-          </a:xfrm>
-          <a:prstGeom prst="rect">
-            <a:avLst/>
-          </a:prstGeom>
-          <a:noFill/>
-        </p:spPr>
-        <p:txBody>
-          <a:bodyPr rot="0" spcFirstLastPara="0" vertOverflow="overflow" horzOverflow="overflow" vert="horz" wrap="square" lIns="91440" tIns="45720" rIns="91440" bIns="45720" numCol="1" spcCol="0" rtlCol="0" fromWordArt="0" anchor="t" anchorCtr="0" forceAA="0" compatLnSpc="1">
-            <a:prstTxWarp prst="textNoShape">
-              <a:avLst/>
-            </a:prstTxWarp>
-            <a:spAutoFit/>
+      <p:sp>
+        <p:nvSpPr>
+          <p:cNvPr id="2" name="标题 1">
+            <a:extLst>
+              <a:ext uri="{FF2B5EF4-FFF2-40B4-BE49-F238E27FC236}">
+                <a16:creationId xmlns:a16="http://schemas.microsoft.com/office/drawing/2014/main" id="{B77B61F8-BDA8-7937-D8E7-B0C7710E6572}"/>
+              </a:ext>
+            </a:extLst>
+          </p:cNvPr>
+          <p:cNvSpPr>
+            <a:spLocks noGrp="1"/>
+          </p:cNvSpPr>
+          <p:nvPr>
+            <p:ph type="title"/>
+          </p:nvPr>
+        </p:nvSpPr>
+        <p:spPr/>
+        <p:txBody>
+          <a:bodyPr/>
+          <a:lstStyle/>
+          <a:p>
+            <a:endParaRPr lang="zh-CN" altLang="en-US" dirty="0"/>
+          </a:p>
+        </p:txBody>
+      </p:sp>
+      <p:sp>
+        <p:nvSpPr>
+          <p:cNvPr id="3" name="内容占位符 2">
+            <a:extLst>
+              <a:ext uri="{FF2B5EF4-FFF2-40B4-BE49-F238E27FC236}">
+                <a16:creationId xmlns:a16="http://schemas.microsoft.com/office/drawing/2014/main" id="{A9F80B7E-ED1B-C6D2-12D6-424C8F4D716A}"/>
+              </a:ext>
+            </a:extLst>
+          </p:cNvPr>
+          <p:cNvSpPr>
+            <a:spLocks noGrp="1"/>
+          </p:cNvSpPr>
+          <p:nvPr>
+            <p:ph idx="1"/>
+          </p:nvPr>
+        </p:nvSpPr>
+        <p:spPr/>
+        <p:txBody>
+          <a:bodyPr>
+            <a:normAutofit/>
           </a:bodyPr>
           <a:lstStyle/>
           <a:p>
-            <a:r>
-              <a:rPr lang="zh-CN" altLang="en-US">
-                <a:ea typeface="等线"/>
-              </a:rPr>
-              <a:t>Origin vs improved</a:t>
-            </a:r>
-            <a:endParaRPr lang="zh-CN" altLang="en-US"/>
+            <a:pPr marL="0" indent="0" algn="ctr">
+              <a:buNone/>
+            </a:pPr>
+            <a:r>
+              <a:rPr lang="en-US" altLang="zh-CN" sz="4800" dirty="0"/>
+              <a:t>Profiling</a:t>
+            </a:r>
+            <a:r>
+              <a:rPr lang="zh-CN" altLang="en-US" sz="4800" dirty="0"/>
+              <a:t>与改进</a:t>
+            </a:r>
+            <a:endParaRPr lang="en-US" altLang="zh-CN" sz="4800" dirty="0"/>
+          </a:p>
+          <a:p>
+            <a:pPr marL="0" indent="0" algn="ctr">
+              <a:buNone/>
+            </a:pPr>
+            <a:r>
+              <a:rPr lang="zh-CN" altLang="en-US" sz="1800" dirty="0"/>
+              <a:t>删除了</a:t>
+            </a:r>
+            <a:r>
+              <a:rPr lang="en-US" altLang="zh-CN" sz="1800" dirty="0"/>
+              <a:t>10</a:t>
+            </a:r>
+            <a:r>
+              <a:rPr lang="zh-CN" altLang="en-US" sz="1800" dirty="0"/>
+              <a:t>行，添加了</a:t>
+            </a:r>
+            <a:r>
+              <a:rPr lang="en-US" altLang="zh-CN" sz="1800" dirty="0"/>
+              <a:t>4</a:t>
+            </a:r>
+            <a:r>
+              <a:rPr lang="zh-CN" altLang="en-US" sz="1800" dirty="0"/>
+              <a:t>行，推理速度平均提高</a:t>
+            </a:r>
+            <a:r>
+              <a:rPr lang="en-US" altLang="zh-CN" sz="1800" dirty="0"/>
+              <a:t>~17%</a:t>
+            </a:r>
+            <a:endParaRPr lang="zh-CN" altLang="en-US" sz="1800" dirty="0"/>
           </a:p>
         </p:txBody>
       </p:sp>
     </p:spTree>
     <p:extLst>
       <p:ext uri="{BB962C8B-B14F-4D97-AF65-F5344CB8AC3E}">
-        <p14:creationId xmlns:p14="http://schemas.microsoft.com/office/powerpoint/2010/main" val="200528959"/>
+        <p14:creationId xmlns:p14="http://schemas.microsoft.com/office/powerpoint/2010/main" val="2595617339"/>
       </p:ext>
     </p:extLst>
   </p:cSld>
@@ -4462,21 +7054,100 @@
           <a:chExt cx="0" cy="0"/>
         </a:xfrm>
       </p:grpSpPr>
-      <p:pic>
-        <p:nvPicPr>
-          <p:cNvPr id="5" name="内容占位符 4" descr="图表, 条形图">
-            <a:extLst>
-              <a:ext uri="{FF2B5EF4-FFF2-40B4-BE49-F238E27FC236}">
-                <a16:creationId xmlns:a16="http://schemas.microsoft.com/office/drawing/2014/main" id="{A3C6668F-B3A4-5A4D-4217-C48E532E1E35}"/>
-              </a:ext>
-            </a:extLst>
-          </p:cNvPr>
-          <p:cNvPicPr>
-            <a:picLocks noGrp="1" noChangeAspect="1"/>
-          </p:cNvPicPr>
+      <p:sp>
+        <p:nvSpPr>
+          <p:cNvPr id="3" name="内容占位符 2">
+            <a:extLst>
+              <a:ext uri="{FF2B5EF4-FFF2-40B4-BE49-F238E27FC236}">
+                <a16:creationId xmlns:a16="http://schemas.microsoft.com/office/drawing/2014/main" id="{B3EF8B80-25AD-D1D3-C9FB-6BCB180BEA7A}"/>
+              </a:ext>
+            </a:extLst>
+          </p:cNvPr>
+          <p:cNvSpPr>
+            <a:spLocks noGrp="1"/>
+          </p:cNvSpPr>
           <p:nvPr>
             <p:ph idx="1"/>
           </p:nvPr>
+        </p:nvSpPr>
+        <p:spPr>
+          <a:xfrm>
+            <a:off x="838200" y="483466"/>
+            <a:ext cx="10515600" cy="4351338"/>
+          </a:xfrm>
+        </p:spPr>
+        <p:txBody>
+          <a:bodyPr vert="horz" lIns="91440" tIns="45720" rIns="91440" bIns="45720" rtlCol="0" anchor="t">
+            <a:normAutofit/>
+          </a:bodyPr>
+          <a:lstStyle/>
+          <a:p>
+            <a:pPr marL="514350" indent="-514350">
+              <a:buAutoNum type="arabicPeriod"/>
+            </a:pPr>
+            <a:r>
+              <a:rPr lang="zh-CN" altLang="en-US" sz="2000" dirty="0">
+                <a:ea typeface="等线"/>
+              </a:rPr>
+              <a:t>阅读源码， </a:t>
+            </a:r>
+            <a:r>
+              <a:rPr lang="en-US" altLang="zh-CN" sz="2000" dirty="0" err="1">
+                <a:ea typeface="等线"/>
+              </a:rPr>
+              <a:t>pytorch</a:t>
+            </a:r>
+            <a:r>
+              <a:rPr lang="en-US" altLang="zh-CN" sz="2000" dirty="0">
+                <a:ea typeface="等线"/>
+              </a:rPr>
+              <a:t> </a:t>
+            </a:r>
+            <a:r>
+              <a:rPr lang="zh-CN" altLang="en-US" sz="2000" dirty="0">
+                <a:ea typeface="等线"/>
+              </a:rPr>
+              <a:t>profiler 插入标记</a:t>
+            </a:r>
+          </a:p>
+          <a:p>
+            <a:pPr marL="0" indent="0">
+              <a:buNone/>
+            </a:pPr>
+            <a:r>
+              <a:rPr lang="zh-CN" altLang="en-US" sz="2000" dirty="0">
+                <a:ea typeface="等线"/>
+              </a:rPr>
+              <a:t>图示为decode过程完整的一层， 两个专家在cpu上运行，主要的改进也在</a:t>
+            </a:r>
+            <a:r>
+              <a:rPr lang="en-US" altLang="zh-CN" sz="2000" dirty="0">
+                <a:ea typeface="等线"/>
+              </a:rPr>
+              <a:t>decode</a:t>
+            </a:r>
+            <a:r>
+              <a:rPr lang="zh-CN" altLang="en-US" sz="2000" dirty="0">
+                <a:ea typeface="等线"/>
+              </a:rPr>
+              <a:t>阶段</a:t>
+            </a:r>
+          </a:p>
+        </p:txBody>
+      </p:sp>
+      <p:pic>
+        <p:nvPicPr>
+          <p:cNvPr id="4" name="图片 3">
+            <a:extLst>
+              <a:ext uri="{FF2B5EF4-FFF2-40B4-BE49-F238E27FC236}">
+                <a16:creationId xmlns:a16="http://schemas.microsoft.com/office/drawing/2014/main" id="{392AA34D-74A7-846A-4506-4BFDE72B815F}"/>
+              </a:ext>
+            </a:extLst>
+          </p:cNvPr>
+          <p:cNvPicPr>
+            <a:picLocks noChangeAspect="1"/>
+          </p:cNvPicPr>
+          <p:nvPr/>
         </p:nvPicPr>
         <p:blipFill>
           <a:blip r:embed="rId2"/>
@@ -4486,8 +7157,8 @@
         </p:blipFill>
         <p:spPr>
           <a:xfrm>
-            <a:off x="0" y="841963"/>
-            <a:ext cx="12120379" cy="5164801"/>
+            <a:off x="832792" y="1465485"/>
+            <a:ext cx="10878410" cy="4231652"/>
           </a:xfrm>
           <a:prstGeom prst="rect">
             <a:avLst/>
@@ -4496,154 +7167,454 @@
       </p:pic>
       <p:sp>
         <p:nvSpPr>
-          <p:cNvPr id="6" name="文本框 5">
-            <a:extLst>
-              <a:ext uri="{FF2B5EF4-FFF2-40B4-BE49-F238E27FC236}">
-                <a16:creationId xmlns:a16="http://schemas.microsoft.com/office/drawing/2014/main" id="{40EFB0B3-3ADE-E2E2-B543-24A683F50B78}"/>
-              </a:ext>
-            </a:extLst>
-          </p:cNvPr>
-          <p:cNvSpPr txBox="1"/>
+          <p:cNvPr id="5" name="左大括号 4">
+            <a:extLst>
+              <a:ext uri="{FF2B5EF4-FFF2-40B4-BE49-F238E27FC236}">
+                <a16:creationId xmlns:a16="http://schemas.microsoft.com/office/drawing/2014/main" id="{2EBB07BB-5779-8E96-63C5-BDD72F0CC2D3}"/>
+              </a:ext>
+            </a:extLst>
+          </p:cNvPr>
+          <p:cNvSpPr/>
           <p:nvPr/>
         </p:nvSpPr>
         <p:spPr>
-          <a:xfrm>
-            <a:off x="411161" y="173119"/>
-            <a:ext cx="3678806" cy="369332"/>
+          <a:xfrm rot="16200000">
+            <a:off x="1618635" y="4998355"/>
+            <a:ext cx="509803" cy="2081488"/>
           </a:xfrm>
-          <a:prstGeom prst="rect">
+          <a:prstGeom prst="leftBrace">
             <a:avLst/>
           </a:prstGeom>
-          <a:noFill/>
         </p:spPr>
-        <p:txBody>
-          <a:bodyPr rot="0" spcFirstLastPara="0" vertOverflow="overflow" horzOverflow="overflow" vert="horz" wrap="square" lIns="91440" tIns="45720" rIns="91440" bIns="45720" numCol="1" spcCol="0" rtlCol="0" fromWordArt="0" anchor="t" anchorCtr="0" forceAA="0" compatLnSpc="1">
-            <a:prstTxWarp prst="textNoShape">
-              <a:avLst/>
-            </a:prstTxWarp>
-            <a:spAutoFit/>
-          </a:bodyPr>
+        <p:style>
+          <a:lnRef idx="2">
+            <a:schemeClr val="accent1"/>
+          </a:lnRef>
+          <a:fillRef idx="0">
+            <a:schemeClr val="accent1"/>
+          </a:fillRef>
+          <a:effectRef idx="1">
+            <a:schemeClr val="accent1"/>
+          </a:effectRef>
+          <a:fontRef idx="minor">
+            <a:schemeClr val="tx1"/>
+          </a:fontRef>
+        </p:style>
+        <p:txBody>
+          <a:bodyPr rtlCol="0" anchor="ctr"/>
           <a:lstStyle/>
           <a:p>
-            <a:r>
-              <a:rPr lang="zh-CN" altLang="en-US">
-                <a:ea typeface="等线"/>
-              </a:rPr>
-              <a:t>两个改动过后， 平均加速1.172x</a:t>
-            </a:r>
-            <a:endParaRPr lang="zh-CN" altLang="en-US"/>
-          </a:p>
-        </p:txBody>
-      </p:sp>
-      <p:sp>
-        <p:nvSpPr>
-          <p:cNvPr id="7" name="文本框 6">
-            <a:extLst>
-              <a:ext uri="{FF2B5EF4-FFF2-40B4-BE49-F238E27FC236}">
-                <a16:creationId xmlns:a16="http://schemas.microsoft.com/office/drawing/2014/main" id="{136F3320-CC2A-4757-4C23-D54220BE9415}"/>
-              </a:ext>
-            </a:extLst>
-          </p:cNvPr>
-          <p:cNvSpPr txBox="1"/>
+            <a:pPr algn="ctr"/>
+            <a:endParaRPr lang="zh-CN" altLang="en-US" dirty="0"/>
+          </a:p>
+        </p:txBody>
+      </p:sp>
+      <p:sp>
+        <p:nvSpPr>
+          <p:cNvPr id="6" name="左大括号 5">
+            <a:extLst>
+              <a:ext uri="{FF2B5EF4-FFF2-40B4-BE49-F238E27FC236}">
+                <a16:creationId xmlns:a16="http://schemas.microsoft.com/office/drawing/2014/main" id="{A653E1A4-DD28-A702-BC0B-FF26EF050E9F}"/>
+              </a:ext>
+            </a:extLst>
+          </p:cNvPr>
+          <p:cNvSpPr/>
           <p:nvPr/>
         </p:nvSpPr>
         <p:spPr>
-          <a:xfrm>
-            <a:off x="406977" y="6009409"/>
-            <a:ext cx="9317181" cy="738664"/>
+          <a:xfrm rot="16200000">
+            <a:off x="3606841" y="5124263"/>
+            <a:ext cx="473178" cy="1858297"/>
           </a:xfrm>
-          <a:prstGeom prst="rect">
+          <a:prstGeom prst="leftBrace">
             <a:avLst/>
           </a:prstGeom>
-          <a:noFill/>
         </p:spPr>
-        <p:txBody>
-          <a:bodyPr rot="0" spcFirstLastPara="0" vertOverflow="overflow" horzOverflow="overflow" vert="horz" wrap="square" lIns="91440" tIns="45720" rIns="91440" bIns="45720" numCol="1" spcCol="0" rtlCol="0" fromWordArt="0" anchor="t" anchorCtr="0" forceAA="0" compatLnSpc="1">
-            <a:prstTxWarp prst="textNoShape">
-              <a:avLst/>
-            </a:prstTxWarp>
-            <a:spAutoFit/>
-          </a:bodyPr>
+        <p:style>
+          <a:lnRef idx="2">
+            <a:schemeClr val="accent1"/>
+          </a:lnRef>
+          <a:fillRef idx="0">
+            <a:schemeClr val="accent1"/>
+          </a:fillRef>
+          <a:effectRef idx="1">
+            <a:schemeClr val="accent1"/>
+          </a:effectRef>
+          <a:fontRef idx="minor">
+            <a:schemeClr val="tx1"/>
+          </a:fontRef>
+        </p:style>
+        <p:txBody>
+          <a:bodyPr rtlCol="0" anchor="ctr"/>
           <a:lstStyle/>
-          <a:p>
-            <a:r>
-              <a:rPr lang="zh-CN" sz="2400" baseline="0">
-                <a:ea typeface="SimSun"/>
-              </a:rPr>
-              <a:t>实验配置：</a:t>
-            </a:r>
-            <a:r>
-              <a:rPr lang="en-US" sz="2400" baseline="0">
-                <a:latin typeface="SimSun"/>
-              </a:rPr>
-              <a:t>Tesla T4</a:t>
-            </a:r>
-            <a:r>
-              <a:rPr lang="zh-CN" sz="2400" baseline="0">
-                <a:ea typeface="SimSun"/>
-              </a:rPr>
-              <a:t>（</a:t>
-            </a:r>
-            <a:r>
-              <a:rPr lang="en-US" sz="2400" baseline="0">
-                <a:latin typeface="SimSun"/>
-              </a:rPr>
-              <a:t>16GB</a:t>
-            </a:r>
-            <a:r>
-              <a:rPr lang="zh-CN" sz="2400" baseline="0">
-                <a:ea typeface="SimSun"/>
-              </a:rPr>
-              <a:t>） </a:t>
-            </a:r>
-            <a:r>
-              <a:rPr lang="en-US" sz="2400" baseline="0">
-                <a:latin typeface="SimSun"/>
-              </a:rPr>
-              <a:t>n1 (32 </a:t>
-            </a:r>
-            <a:r>
-              <a:rPr lang="zh-CN" sz="2400" baseline="0">
-                <a:ea typeface="SimSun"/>
-              </a:rPr>
-              <a:t>个 </a:t>
-            </a:r>
-            <a:r>
-              <a:rPr lang="en-US" sz="2400" baseline="0">
-                <a:latin typeface="SimSun"/>
-              </a:rPr>
-              <a:t>vCPU, 104 GB </a:t>
-            </a:r>
-            <a:r>
-              <a:rPr lang="zh-CN" sz="2400" baseline="0">
-                <a:ea typeface="SimSun"/>
-              </a:rPr>
-              <a:t>内存</a:t>
-            </a:r>
-            <a:r>
-              <a:rPr lang="en-US" sz="2400" baseline="0">
-                <a:latin typeface="SimSun"/>
-              </a:rPr>
-              <a:t>)</a:t>
-            </a:r>
-            <a:endParaRPr lang="zh-CN" altLang="en-US"/>
-          </a:p>
           <a:p>
             <a:pPr algn="ctr"/>
             <a:endParaRPr lang="zh-CN" altLang="en-US"/>
+          </a:p>
+        </p:txBody>
+      </p:sp>
+      <p:sp>
+        <p:nvSpPr>
+          <p:cNvPr id="7" name="左大括号 6">
+            <a:extLst>
+              <a:ext uri="{FF2B5EF4-FFF2-40B4-BE49-F238E27FC236}">
+                <a16:creationId xmlns:a16="http://schemas.microsoft.com/office/drawing/2014/main" id="{F0AD8021-96BF-EC72-4D77-1D189AB7DEEA}"/>
+              </a:ext>
+            </a:extLst>
+          </p:cNvPr>
+          <p:cNvSpPr/>
+          <p:nvPr/>
+        </p:nvSpPr>
+        <p:spPr>
+          <a:xfrm rot="16200000">
+            <a:off x="7986990" y="2602412"/>
+            <a:ext cx="509803" cy="6938624"/>
+          </a:xfrm>
+          <a:prstGeom prst="leftBrace">
+            <a:avLst/>
+          </a:prstGeom>
+        </p:spPr>
+        <p:style>
+          <a:lnRef idx="2">
+            <a:schemeClr val="accent1"/>
+          </a:lnRef>
+          <a:fillRef idx="0">
+            <a:schemeClr val="accent1"/>
+          </a:fillRef>
+          <a:effectRef idx="1">
+            <a:schemeClr val="accent1"/>
+          </a:effectRef>
+          <a:fontRef idx="minor">
+            <a:schemeClr val="tx1"/>
+          </a:fontRef>
+        </p:style>
+        <p:txBody>
+          <a:bodyPr rtlCol="0" anchor="ctr"/>
+          <a:lstStyle/>
+          <a:p>
+            <a:pPr algn="ctr"/>
+            <a:endParaRPr lang="zh-CN" altLang="en-US" dirty="0"/>
           </a:p>
         </p:txBody>
       </p:sp>
     </p:spTree>
     <p:extLst>
       <p:ext uri="{BB962C8B-B14F-4D97-AF65-F5344CB8AC3E}">
-        <p14:creationId xmlns:p14="http://schemas.microsoft.com/office/powerpoint/2010/main" val="811436649"/>
+        <p14:creationId xmlns:p14="http://schemas.microsoft.com/office/powerpoint/2010/main" val="726799779"/>
       </p:ext>
     </p:extLst>
   </p:cSld>
   <p:clrMapOvr>
     <a:masterClrMapping/>
   </p:clrMapOvr>
+  <p:timing>
+    <p:tnLst>
+      <p:par>
+        <p:cTn id="1" dur="indefinite" restart="never" nodeType="tmRoot">
+          <p:childTnLst>
+            <p:seq concurrent="1" nextAc="seek">
+              <p:cTn id="2" dur="indefinite" nodeType="mainSeq">
+                <p:childTnLst>
+                  <p:par>
+                    <p:cTn id="3" fill="hold">
+                      <p:stCondLst>
+                        <p:cond delay="indefinite"/>
+                      </p:stCondLst>
+                      <p:childTnLst>
+                        <p:par>
+                          <p:cTn id="4" fill="hold">
+                            <p:stCondLst>
+                              <p:cond delay="0"/>
+                            </p:stCondLst>
+                            <p:childTnLst>
+                              <p:par>
+                                <p:cTn id="5" presetID="2" presetClass="entr" presetSubtype="4" fill="hold" grpId="0" nodeType="clickEffect">
+                                  <p:stCondLst>
+                                    <p:cond delay="0"/>
+                                  </p:stCondLst>
+                                  <p:childTnLst>
+                                    <p:set>
+                                      <p:cBhvr>
+                                        <p:cTn id="6" dur="1" fill="hold">
+                                          <p:stCondLst>
+                                            <p:cond delay="0"/>
+                                          </p:stCondLst>
+                                        </p:cTn>
+                                        <p:tgtEl>
+                                          <p:spTgt spid="5"/>
+                                        </p:tgtEl>
+                                        <p:attrNameLst>
+                                          <p:attrName>style.visibility</p:attrName>
+                                        </p:attrNameLst>
+                                      </p:cBhvr>
+                                      <p:to>
+                                        <p:strVal val="visible"/>
+                                      </p:to>
+                                    </p:set>
+                                    <p:anim calcmode="lin" valueType="num">
+                                      <p:cBhvr additive="base">
+                                        <p:cTn id="7" dur="500" fill="hold"/>
+                                        <p:tgtEl>
+                                          <p:spTgt spid="5"/>
+                                        </p:tgtEl>
+                                        <p:attrNameLst>
+                                          <p:attrName>ppt_x</p:attrName>
+                                        </p:attrNameLst>
+                                      </p:cBhvr>
+                                      <p:tavLst>
+                                        <p:tav tm="0">
+                                          <p:val>
+                                            <p:strVal val="#ppt_x"/>
+                                          </p:val>
+                                        </p:tav>
+                                        <p:tav tm="100000">
+                                          <p:val>
+                                            <p:strVal val="#ppt_x"/>
+                                          </p:val>
+                                        </p:tav>
+                                      </p:tavLst>
+                                    </p:anim>
+                                    <p:anim calcmode="lin" valueType="num">
+                                      <p:cBhvr additive="base">
+                                        <p:cTn id="8" dur="500" fill="hold"/>
+                                        <p:tgtEl>
+                                          <p:spTgt spid="5"/>
+                                        </p:tgtEl>
+                                        <p:attrNameLst>
+                                          <p:attrName>ppt_y</p:attrName>
+                                        </p:attrNameLst>
+                                      </p:cBhvr>
+                                      <p:tavLst>
+                                        <p:tav tm="0">
+                                          <p:val>
+                                            <p:strVal val="1+#ppt_h/2"/>
+                                          </p:val>
+                                        </p:tav>
+                                        <p:tav tm="100000">
+                                          <p:val>
+                                            <p:strVal val="#ppt_y"/>
+                                          </p:val>
+                                        </p:tav>
+                                      </p:tavLst>
+                                    </p:anim>
+                                  </p:childTnLst>
+                                </p:cTn>
+                              </p:par>
+                            </p:childTnLst>
+                          </p:cTn>
+                        </p:par>
+                      </p:childTnLst>
+                    </p:cTn>
+                  </p:par>
+                  <p:par>
+                    <p:cTn id="9" fill="hold">
+                      <p:stCondLst>
+                        <p:cond delay="indefinite"/>
+                      </p:stCondLst>
+                      <p:childTnLst>
+                        <p:par>
+                          <p:cTn id="10" fill="hold">
+                            <p:stCondLst>
+                              <p:cond delay="0"/>
+                            </p:stCondLst>
+                            <p:childTnLst>
+                              <p:par>
+                                <p:cTn id="11" presetID="2" presetClass="entr" presetSubtype="4" fill="hold" grpId="0" nodeType="clickEffect">
+                                  <p:stCondLst>
+                                    <p:cond delay="0"/>
+                                  </p:stCondLst>
+                                  <p:childTnLst>
+                                    <p:set>
+                                      <p:cBhvr>
+                                        <p:cTn id="12" dur="1" fill="hold">
+                                          <p:stCondLst>
+                                            <p:cond delay="0"/>
+                                          </p:stCondLst>
+                                        </p:cTn>
+                                        <p:tgtEl>
+                                          <p:spTgt spid="6"/>
+                                        </p:tgtEl>
+                                        <p:attrNameLst>
+                                          <p:attrName>style.visibility</p:attrName>
+                                        </p:attrNameLst>
+                                      </p:cBhvr>
+                                      <p:to>
+                                        <p:strVal val="visible"/>
+                                      </p:to>
+                                    </p:set>
+                                    <p:anim calcmode="lin" valueType="num">
+                                      <p:cBhvr additive="base">
+                                        <p:cTn id="13" dur="500" fill="hold"/>
+                                        <p:tgtEl>
+                                          <p:spTgt spid="6"/>
+                                        </p:tgtEl>
+                                        <p:attrNameLst>
+                                          <p:attrName>ppt_x</p:attrName>
+                                        </p:attrNameLst>
+                                      </p:cBhvr>
+                                      <p:tavLst>
+                                        <p:tav tm="0">
+                                          <p:val>
+                                            <p:strVal val="#ppt_x"/>
+                                          </p:val>
+                                        </p:tav>
+                                        <p:tav tm="100000">
+                                          <p:val>
+                                            <p:strVal val="#ppt_x"/>
+                                          </p:val>
+                                        </p:tav>
+                                      </p:tavLst>
+                                    </p:anim>
+                                    <p:anim calcmode="lin" valueType="num">
+                                      <p:cBhvr additive="base">
+                                        <p:cTn id="14" dur="500" fill="hold"/>
+                                        <p:tgtEl>
+                                          <p:spTgt spid="6"/>
+                                        </p:tgtEl>
+                                        <p:attrNameLst>
+                                          <p:attrName>ppt_y</p:attrName>
+                                        </p:attrNameLst>
+                                      </p:cBhvr>
+                                      <p:tavLst>
+                                        <p:tav tm="0">
+                                          <p:val>
+                                            <p:strVal val="1+#ppt_h/2"/>
+                                          </p:val>
+                                        </p:tav>
+                                        <p:tav tm="100000">
+                                          <p:val>
+                                            <p:strVal val="#ppt_y"/>
+                                          </p:val>
+                                        </p:tav>
+                                      </p:tavLst>
+                                    </p:anim>
+                                  </p:childTnLst>
+                                </p:cTn>
+                              </p:par>
+                            </p:childTnLst>
+                          </p:cTn>
+                        </p:par>
+                      </p:childTnLst>
+                    </p:cTn>
+                  </p:par>
+                  <p:par>
+                    <p:cTn id="15" fill="hold">
+                      <p:stCondLst>
+                        <p:cond delay="indefinite"/>
+                      </p:stCondLst>
+                      <p:childTnLst>
+                        <p:par>
+                          <p:cTn id="16" fill="hold">
+                            <p:stCondLst>
+                              <p:cond delay="0"/>
+                            </p:stCondLst>
+                            <p:childTnLst>
+                              <p:par>
+                                <p:cTn id="17" presetID="2" presetClass="entr" presetSubtype="4" fill="hold" grpId="0" nodeType="clickEffect">
+                                  <p:stCondLst>
+                                    <p:cond delay="0"/>
+                                  </p:stCondLst>
+                                  <p:childTnLst>
+                                    <p:set>
+                                      <p:cBhvr>
+                                        <p:cTn id="18" dur="1" fill="hold">
+                                          <p:stCondLst>
+                                            <p:cond delay="0"/>
+                                          </p:stCondLst>
+                                        </p:cTn>
+                                        <p:tgtEl>
+                                          <p:spTgt spid="7"/>
+                                        </p:tgtEl>
+                                        <p:attrNameLst>
+                                          <p:attrName>style.visibility</p:attrName>
+                                        </p:attrNameLst>
+                                      </p:cBhvr>
+                                      <p:to>
+                                        <p:strVal val="visible"/>
+                                      </p:to>
+                                    </p:set>
+                                    <p:anim calcmode="lin" valueType="num">
+                                      <p:cBhvr additive="base">
+                                        <p:cTn id="19" dur="500" fill="hold"/>
+                                        <p:tgtEl>
+                                          <p:spTgt spid="7"/>
+                                        </p:tgtEl>
+                                        <p:attrNameLst>
+                                          <p:attrName>ppt_x</p:attrName>
+                                        </p:attrNameLst>
+                                      </p:cBhvr>
+                                      <p:tavLst>
+                                        <p:tav tm="0">
+                                          <p:val>
+                                            <p:strVal val="#ppt_x"/>
+                                          </p:val>
+                                        </p:tav>
+                                        <p:tav tm="100000">
+                                          <p:val>
+                                            <p:strVal val="#ppt_x"/>
+                                          </p:val>
+                                        </p:tav>
+                                      </p:tavLst>
+                                    </p:anim>
+                                    <p:anim calcmode="lin" valueType="num">
+                                      <p:cBhvr additive="base">
+                                        <p:cTn id="20" dur="500" fill="hold"/>
+                                        <p:tgtEl>
+                                          <p:spTgt spid="7"/>
+                                        </p:tgtEl>
+                                        <p:attrNameLst>
+                                          <p:attrName>ppt_y</p:attrName>
+                                        </p:attrNameLst>
+                                      </p:cBhvr>
+                                      <p:tavLst>
+                                        <p:tav tm="0">
+                                          <p:val>
+                                            <p:strVal val="1+#ppt_h/2"/>
+                                          </p:val>
+                                        </p:tav>
+                                        <p:tav tm="100000">
+                                          <p:val>
+                                            <p:strVal val="#ppt_y"/>
+                                          </p:val>
+                                        </p:tav>
+                                      </p:tavLst>
+                                    </p:anim>
+                                  </p:childTnLst>
+                                </p:cTn>
+                              </p:par>
+                            </p:childTnLst>
+                          </p:cTn>
+                        </p:par>
+                      </p:childTnLst>
+                    </p:cTn>
+                  </p:par>
+                </p:childTnLst>
+              </p:cTn>
+              <p:prevCondLst>
+                <p:cond evt="onPrev" delay="0">
+                  <p:tgtEl>
+                    <p:sldTgt/>
+                  </p:tgtEl>
+                </p:cond>
+              </p:prevCondLst>
+              <p:nextCondLst>
+                <p:cond evt="onNext" delay="0">
+                  <p:tgtEl>
+                    <p:sldTgt/>
+                  </p:tgtEl>
+                </p:cond>
+              </p:nextCondLst>
+            </p:seq>
+          </p:childTnLst>
+        </p:cTn>
+      </p:par>
+    </p:tnLst>
+    <p:bldLst>
+      <p:bldP spid="5" grpId="0" animBg="1"/>
+      <p:bldP spid="6" grpId="0" animBg="1"/>
+      <p:bldP spid="7" grpId="0" animBg="1"/>
+    </p:bldLst>
+  </p:timing>
 </p:sld>
 </file>
 
@@ -4664,59 +7635,1469 @@
           <a:chExt cx="0" cy="0"/>
         </a:xfrm>
       </p:grpSpPr>
-      <p:sp>
-        <p:nvSpPr>
-          <p:cNvPr id="3" name="内容占位符 2">
-            <a:extLst>
-              <a:ext uri="{FF2B5EF4-FFF2-40B4-BE49-F238E27FC236}">
-                <a16:creationId xmlns:a16="http://schemas.microsoft.com/office/drawing/2014/main" id="{B66A2597-E866-7094-7F93-66C9B63F7904}"/>
-              </a:ext>
-            </a:extLst>
-          </p:cNvPr>
-          <p:cNvSpPr>
-            <a:spLocks noGrp="1"/>
-          </p:cNvSpPr>
-          <p:nvPr>
-            <p:ph idx="1"/>
-          </p:nvPr>
-        </p:nvSpPr>
+      <p:pic>
+        <p:nvPicPr>
+          <p:cNvPr id="4" name="图片 3" descr="图片包含 日程表&#10;&#10;AI 生成的内容可能不正确。">
+            <a:extLst>
+              <a:ext uri="{FF2B5EF4-FFF2-40B4-BE49-F238E27FC236}">
+                <a16:creationId xmlns:a16="http://schemas.microsoft.com/office/drawing/2014/main" id="{CD805AF1-A589-0CDF-68BF-7C0208DD15F0}"/>
+              </a:ext>
+            </a:extLst>
+          </p:cNvPr>
+          <p:cNvPicPr>
+            <a:picLocks noChangeAspect="1"/>
+          </p:cNvPicPr>
+          <p:nvPr/>
+        </p:nvPicPr>
+        <p:blipFill>
+          <a:blip r:embed="rId2"/>
+          <a:stretch>
+            <a:fillRect/>
+          </a:stretch>
+        </p:blipFill>
         <p:spPr>
           <a:xfrm>
-            <a:off x="838200" y="546931"/>
-            <a:ext cx="10515600" cy="5630032"/>
+            <a:off x="174355" y="600866"/>
+            <a:ext cx="11843289" cy="2075425"/>
           </a:xfrm>
+          <a:prstGeom prst="rect">
+            <a:avLst/>
+          </a:prstGeom>
         </p:spPr>
-        <p:txBody>
-          <a:bodyPr/>
+      </p:pic>
+      <p:sp>
+        <p:nvSpPr>
+          <p:cNvPr id="9" name="文本框 8">
+            <a:extLst>
+              <a:ext uri="{FF2B5EF4-FFF2-40B4-BE49-F238E27FC236}">
+                <a16:creationId xmlns:a16="http://schemas.microsoft.com/office/drawing/2014/main" id="{43E11B30-7231-F042-B57E-6FD542B1593A}"/>
+              </a:ext>
+            </a:extLst>
+          </p:cNvPr>
+          <p:cNvSpPr txBox="1"/>
+          <p:nvPr/>
+        </p:nvSpPr>
+        <p:spPr>
+          <a:xfrm>
+            <a:off x="290900" y="96967"/>
+            <a:ext cx="6623144" cy="369332"/>
+          </a:xfrm>
+          <a:prstGeom prst="rect">
+            <a:avLst/>
+          </a:prstGeom>
+          <a:noFill/>
+        </p:spPr>
+        <p:txBody>
+          <a:bodyPr rot="0" spcFirstLastPara="0" vertOverflow="overflow" horzOverflow="overflow" vert="horz" wrap="square" lIns="91440" tIns="45720" rIns="91440" bIns="45720" numCol="1" spcCol="0" rtlCol="0" fromWordArt="0" anchor="t" anchorCtr="0" forceAA="0" compatLnSpc="1">
+            <a:prstTxWarp prst="textNoShape">
+              <a:avLst/>
+            </a:prstTxWarp>
+            <a:spAutoFit/>
+          </a:bodyPr>
           <a:lstStyle/>
           <a:p>
-            <a:pPr marL="0" indent="0">
-              <a:buNone/>
-            </a:pPr>
-            <a:r>
-              <a:rPr lang="zh-CN" altLang="en-US">
-                <a:latin typeface="Calibri" panose="020F0502020204030204" pitchFamily="34" charset="0"/>
-                <a:cs typeface="Calibri" panose="020F0502020204030204" pitchFamily="34" charset="0"/>
-              </a:rPr>
-              <a:t>接下来的打算和疑问：</a:t>
-            </a:r>
-            <a:endParaRPr lang="zh-CN" altLang="en-US" dirty="0">
-              <a:latin typeface="Calibri" panose="020F0502020204030204" pitchFamily="34" charset="0"/>
-              <a:cs typeface="Calibri" panose="020F0502020204030204" pitchFamily="34" charset="0"/>
-            </a:endParaRPr>
-          </a:p>
-        </p:txBody>
-      </p:sp>
+            <a:r>
+              <a:rPr lang="en-US" altLang="zh-CN" dirty="0"/>
+              <a:t>2. </a:t>
+            </a:r>
+            <a:r>
+              <a:rPr lang="zh-CN" altLang="en-US" dirty="0"/>
+              <a:t>改进一： 避免比较总代价， 单个专家单独比较</a:t>
+            </a:r>
+          </a:p>
+        </p:txBody>
+      </p:sp>
+      <p:sp>
+        <p:nvSpPr>
+          <p:cNvPr id="2" name="左大括号 1">
+            <a:extLst>
+              <a:ext uri="{FF2B5EF4-FFF2-40B4-BE49-F238E27FC236}">
+                <a16:creationId xmlns:a16="http://schemas.microsoft.com/office/drawing/2014/main" id="{EFDE844A-1807-47C2-3A66-D1E990584EF9}"/>
+              </a:ext>
+            </a:extLst>
+          </p:cNvPr>
+          <p:cNvSpPr/>
+          <p:nvPr/>
+        </p:nvSpPr>
+        <p:spPr>
+          <a:xfrm rot="16200000">
+            <a:off x="1143003" y="2756473"/>
+            <a:ext cx="790514" cy="769868"/>
+          </a:xfrm>
+          <a:prstGeom prst="leftBrace">
+            <a:avLst/>
+          </a:prstGeom>
+        </p:spPr>
+        <p:style>
+          <a:lnRef idx="2">
+            <a:schemeClr val="accent1"/>
+          </a:lnRef>
+          <a:fillRef idx="0">
+            <a:schemeClr val="accent1"/>
+          </a:fillRef>
+          <a:effectRef idx="1">
+            <a:schemeClr val="accent1"/>
+          </a:effectRef>
+          <a:fontRef idx="minor">
+            <a:schemeClr val="tx1"/>
+          </a:fontRef>
+        </p:style>
+        <p:txBody>
+          <a:bodyPr rtlCol="0" anchor="ctr"/>
+          <a:lstStyle/>
+          <a:p>
+            <a:pPr algn="ctr"/>
+            <a:endParaRPr lang="zh-CN" altLang="en-US"/>
+          </a:p>
+        </p:txBody>
+      </p:sp>
+      <p:sp>
+        <p:nvSpPr>
+          <p:cNvPr id="6" name="箭头: 右 5">
+            <a:extLst>
+              <a:ext uri="{FF2B5EF4-FFF2-40B4-BE49-F238E27FC236}">
+                <a16:creationId xmlns:a16="http://schemas.microsoft.com/office/drawing/2014/main" id="{39D8F332-86D4-872D-E6F1-12521DEC052E}"/>
+              </a:ext>
+            </a:extLst>
+          </p:cNvPr>
+          <p:cNvSpPr/>
+          <p:nvPr/>
+        </p:nvSpPr>
+        <p:spPr>
+          <a:xfrm>
+            <a:off x="4489409" y="4229837"/>
+            <a:ext cx="1439443" cy="442452"/>
+          </a:xfrm>
+          <a:prstGeom prst="rightArrow">
+            <a:avLst/>
+          </a:prstGeom>
+        </p:spPr>
+        <p:style>
+          <a:lnRef idx="2">
+            <a:schemeClr val="accent1">
+              <a:shade val="15000"/>
+            </a:schemeClr>
+          </a:lnRef>
+          <a:fillRef idx="1">
+            <a:schemeClr val="accent1"/>
+          </a:fillRef>
+          <a:effectRef idx="0">
+            <a:schemeClr val="accent1"/>
+          </a:effectRef>
+          <a:fontRef idx="minor">
+            <a:schemeClr val="lt1"/>
+          </a:fontRef>
+        </p:style>
+        <p:txBody>
+          <a:bodyPr rtlCol="0" anchor="ctr"/>
+          <a:lstStyle/>
+          <a:p>
+            <a:pPr algn="ctr"/>
+            <a:endParaRPr lang="zh-CN" altLang="en-US"/>
+          </a:p>
+        </p:txBody>
+      </p:sp>
+      <p:sp>
+        <p:nvSpPr>
+          <p:cNvPr id="8" name="文本框 7">
+            <a:extLst>
+              <a:ext uri="{FF2B5EF4-FFF2-40B4-BE49-F238E27FC236}">
+                <a16:creationId xmlns:a16="http://schemas.microsoft.com/office/drawing/2014/main" id="{632340FD-AE35-7E1F-3C8D-7FF8A7BF867D}"/>
+              </a:ext>
+            </a:extLst>
+          </p:cNvPr>
+          <p:cNvSpPr txBox="1"/>
+          <p:nvPr/>
+        </p:nvSpPr>
+        <p:spPr>
+          <a:xfrm>
+            <a:off x="4731283" y="3860505"/>
+            <a:ext cx="766916" cy="369332"/>
+          </a:xfrm>
+          <a:prstGeom prst="rect">
+            <a:avLst/>
+          </a:prstGeom>
+          <a:noFill/>
+        </p:spPr>
+        <p:txBody>
+          <a:bodyPr wrap="square" rtlCol="0">
+            <a:spAutoFit/>
+          </a:bodyPr>
+          <a:lstStyle/>
+          <a:p>
+            <a:r>
+              <a:rPr lang="zh-CN" altLang="en-US" dirty="0"/>
+              <a:t>改成</a:t>
+            </a:r>
+          </a:p>
+        </p:txBody>
+      </p:sp>
+      <p:pic>
+        <p:nvPicPr>
+          <p:cNvPr id="11" name="图片 10">
+            <a:extLst>
+              <a:ext uri="{FF2B5EF4-FFF2-40B4-BE49-F238E27FC236}">
+                <a16:creationId xmlns:a16="http://schemas.microsoft.com/office/drawing/2014/main" id="{02912850-19E4-CA5E-B8A5-063BE14CE662}"/>
+              </a:ext>
+            </a:extLst>
+          </p:cNvPr>
+          <p:cNvPicPr>
+            <a:picLocks noChangeAspect="1"/>
+          </p:cNvPicPr>
+          <p:nvPr/>
+        </p:nvPicPr>
+        <p:blipFill>
+          <a:blip r:embed="rId3"/>
+          <a:stretch>
+            <a:fillRect/>
+          </a:stretch>
+        </p:blipFill>
+        <p:spPr>
+          <a:xfrm>
+            <a:off x="6143732" y="4273541"/>
+            <a:ext cx="5094538" cy="398748"/>
+          </a:xfrm>
+          <a:prstGeom prst="rect">
+            <a:avLst/>
+          </a:prstGeom>
+        </p:spPr>
+      </p:pic>
+      <p:pic>
+        <p:nvPicPr>
+          <p:cNvPr id="13" name="图片 12">
+            <a:extLst>
+              <a:ext uri="{FF2B5EF4-FFF2-40B4-BE49-F238E27FC236}">
+                <a16:creationId xmlns:a16="http://schemas.microsoft.com/office/drawing/2014/main" id="{FAAA4BDD-EF60-77FF-2DA5-43E3AC324B98}"/>
+              </a:ext>
+            </a:extLst>
+          </p:cNvPr>
+          <p:cNvPicPr>
+            <a:picLocks noChangeAspect="1"/>
+          </p:cNvPicPr>
+          <p:nvPr/>
+        </p:nvPicPr>
+        <p:blipFill>
+          <a:blip r:embed="rId4"/>
+          <a:stretch>
+            <a:fillRect/>
+          </a:stretch>
+        </p:blipFill>
+        <p:spPr>
+          <a:xfrm>
+            <a:off x="142577" y="3698894"/>
+            <a:ext cx="4095104" cy="2621655"/>
+          </a:xfrm>
+          <a:prstGeom prst="rect">
+            <a:avLst/>
+          </a:prstGeom>
+        </p:spPr>
+      </p:pic>
     </p:spTree>
     <p:extLst>
       <p:ext uri="{BB962C8B-B14F-4D97-AF65-F5344CB8AC3E}">
-        <p14:creationId xmlns:p14="http://schemas.microsoft.com/office/powerpoint/2010/main" val="2383246458"/>
+        <p14:creationId xmlns:p14="http://schemas.microsoft.com/office/powerpoint/2010/main" val="450965796"/>
       </p:ext>
     </p:extLst>
   </p:cSld>
   <p:clrMapOvr>
     <a:masterClrMapping/>
   </p:clrMapOvr>
+  <p:timing>
+    <p:tnLst>
+      <p:par>
+        <p:cTn id="1" dur="indefinite" restart="never" nodeType="tmRoot">
+          <p:childTnLst>
+            <p:seq concurrent="1" nextAc="seek">
+              <p:cTn id="2" dur="indefinite" nodeType="mainSeq">
+                <p:childTnLst>
+                  <p:par>
+                    <p:cTn id="3" fill="hold">
+                      <p:stCondLst>
+                        <p:cond delay="indefinite"/>
+                      </p:stCondLst>
+                      <p:childTnLst>
+                        <p:par>
+                          <p:cTn id="4" fill="hold">
+                            <p:stCondLst>
+                              <p:cond delay="0"/>
+                            </p:stCondLst>
+                            <p:childTnLst>
+                              <p:par>
+                                <p:cTn id="5" presetID="2" presetClass="entr" presetSubtype="4" fill="hold" grpId="0" nodeType="clickEffect">
+                                  <p:stCondLst>
+                                    <p:cond delay="0"/>
+                                  </p:stCondLst>
+                                  <p:childTnLst>
+                                    <p:set>
+                                      <p:cBhvr>
+                                        <p:cTn id="6" dur="1" fill="hold">
+                                          <p:stCondLst>
+                                            <p:cond delay="0"/>
+                                          </p:stCondLst>
+                                        </p:cTn>
+                                        <p:tgtEl>
+                                          <p:spTgt spid="2"/>
+                                        </p:tgtEl>
+                                        <p:attrNameLst>
+                                          <p:attrName>style.visibility</p:attrName>
+                                        </p:attrNameLst>
+                                      </p:cBhvr>
+                                      <p:to>
+                                        <p:strVal val="visible"/>
+                                      </p:to>
+                                    </p:set>
+                                    <p:anim calcmode="lin" valueType="num">
+                                      <p:cBhvr additive="base">
+                                        <p:cTn id="7" dur="500" fill="hold"/>
+                                        <p:tgtEl>
+                                          <p:spTgt spid="2"/>
+                                        </p:tgtEl>
+                                        <p:attrNameLst>
+                                          <p:attrName>ppt_x</p:attrName>
+                                        </p:attrNameLst>
+                                      </p:cBhvr>
+                                      <p:tavLst>
+                                        <p:tav tm="0">
+                                          <p:val>
+                                            <p:strVal val="#ppt_x"/>
+                                          </p:val>
+                                        </p:tav>
+                                        <p:tav tm="100000">
+                                          <p:val>
+                                            <p:strVal val="#ppt_x"/>
+                                          </p:val>
+                                        </p:tav>
+                                      </p:tavLst>
+                                    </p:anim>
+                                    <p:anim calcmode="lin" valueType="num">
+                                      <p:cBhvr additive="base">
+                                        <p:cTn id="8" dur="500" fill="hold"/>
+                                        <p:tgtEl>
+                                          <p:spTgt spid="2"/>
+                                        </p:tgtEl>
+                                        <p:attrNameLst>
+                                          <p:attrName>ppt_y</p:attrName>
+                                        </p:attrNameLst>
+                                      </p:cBhvr>
+                                      <p:tavLst>
+                                        <p:tav tm="0">
+                                          <p:val>
+                                            <p:strVal val="1+#ppt_h/2"/>
+                                          </p:val>
+                                        </p:tav>
+                                        <p:tav tm="100000">
+                                          <p:val>
+                                            <p:strVal val="#ppt_y"/>
+                                          </p:val>
+                                        </p:tav>
+                                      </p:tavLst>
+                                    </p:anim>
+                                  </p:childTnLst>
+                                </p:cTn>
+                              </p:par>
+                            </p:childTnLst>
+                          </p:cTn>
+                        </p:par>
+                      </p:childTnLst>
+                    </p:cTn>
+                  </p:par>
+                  <p:par>
+                    <p:cTn id="9" fill="hold">
+                      <p:stCondLst>
+                        <p:cond delay="indefinite"/>
+                      </p:stCondLst>
+                      <p:childTnLst>
+                        <p:par>
+                          <p:cTn id="10" fill="hold">
+                            <p:stCondLst>
+                              <p:cond delay="0"/>
+                            </p:stCondLst>
+                            <p:childTnLst>
+                              <p:par>
+                                <p:cTn id="11" presetID="2" presetClass="entr" presetSubtype="4" fill="hold" nodeType="clickEffect">
+                                  <p:stCondLst>
+                                    <p:cond delay="0"/>
+                                  </p:stCondLst>
+                                  <p:childTnLst>
+                                    <p:set>
+                                      <p:cBhvr>
+                                        <p:cTn id="12" dur="1" fill="hold">
+                                          <p:stCondLst>
+                                            <p:cond delay="0"/>
+                                          </p:stCondLst>
+                                        </p:cTn>
+                                        <p:tgtEl>
+                                          <p:spTgt spid="13"/>
+                                        </p:tgtEl>
+                                        <p:attrNameLst>
+                                          <p:attrName>style.visibility</p:attrName>
+                                        </p:attrNameLst>
+                                      </p:cBhvr>
+                                      <p:to>
+                                        <p:strVal val="visible"/>
+                                      </p:to>
+                                    </p:set>
+                                    <p:anim calcmode="lin" valueType="num">
+                                      <p:cBhvr additive="base">
+                                        <p:cTn id="13" dur="500" fill="hold"/>
+                                        <p:tgtEl>
+                                          <p:spTgt spid="13"/>
+                                        </p:tgtEl>
+                                        <p:attrNameLst>
+                                          <p:attrName>ppt_x</p:attrName>
+                                        </p:attrNameLst>
+                                      </p:cBhvr>
+                                      <p:tavLst>
+                                        <p:tav tm="0">
+                                          <p:val>
+                                            <p:strVal val="#ppt_x"/>
+                                          </p:val>
+                                        </p:tav>
+                                        <p:tav tm="100000">
+                                          <p:val>
+                                            <p:strVal val="#ppt_x"/>
+                                          </p:val>
+                                        </p:tav>
+                                      </p:tavLst>
+                                    </p:anim>
+                                    <p:anim calcmode="lin" valueType="num">
+                                      <p:cBhvr additive="base">
+                                        <p:cTn id="14" dur="500" fill="hold"/>
+                                        <p:tgtEl>
+                                          <p:spTgt spid="13"/>
+                                        </p:tgtEl>
+                                        <p:attrNameLst>
+                                          <p:attrName>ppt_y</p:attrName>
+                                        </p:attrNameLst>
+                                      </p:cBhvr>
+                                      <p:tavLst>
+                                        <p:tav tm="0">
+                                          <p:val>
+                                            <p:strVal val="1+#ppt_h/2"/>
+                                          </p:val>
+                                        </p:tav>
+                                        <p:tav tm="100000">
+                                          <p:val>
+                                            <p:strVal val="#ppt_y"/>
+                                          </p:val>
+                                        </p:tav>
+                                      </p:tavLst>
+                                    </p:anim>
+                                  </p:childTnLst>
+                                </p:cTn>
+                              </p:par>
+                            </p:childTnLst>
+                          </p:cTn>
+                        </p:par>
+                      </p:childTnLst>
+                    </p:cTn>
+                  </p:par>
+                  <p:par>
+                    <p:cTn id="15" fill="hold">
+                      <p:stCondLst>
+                        <p:cond delay="indefinite"/>
+                      </p:stCondLst>
+                      <p:childTnLst>
+                        <p:par>
+                          <p:cTn id="16" fill="hold">
+                            <p:stCondLst>
+                              <p:cond delay="0"/>
+                            </p:stCondLst>
+                            <p:childTnLst>
+                              <p:par>
+                                <p:cTn id="17" presetID="1" presetClass="entr" presetSubtype="0" fill="hold" grpId="0" nodeType="clickEffect">
+                                  <p:stCondLst>
+                                    <p:cond delay="0"/>
+                                  </p:stCondLst>
+                                  <p:childTnLst>
+                                    <p:set>
+                                      <p:cBhvr>
+                                        <p:cTn id="18" dur="1" fill="hold">
+                                          <p:stCondLst>
+                                            <p:cond delay="0"/>
+                                          </p:stCondLst>
+                                        </p:cTn>
+                                        <p:tgtEl>
+                                          <p:spTgt spid="6"/>
+                                        </p:tgtEl>
+                                        <p:attrNameLst>
+                                          <p:attrName>style.visibility</p:attrName>
+                                        </p:attrNameLst>
+                                      </p:cBhvr>
+                                      <p:to>
+                                        <p:strVal val="visible"/>
+                                      </p:to>
+                                    </p:set>
+                                  </p:childTnLst>
+                                </p:cTn>
+                              </p:par>
+                              <p:par>
+                                <p:cTn id="19" presetID="1" presetClass="entr" presetSubtype="0" fill="hold" nodeType="withEffect">
+                                  <p:stCondLst>
+                                    <p:cond delay="0"/>
+                                  </p:stCondLst>
+                                  <p:childTnLst>
+                                    <p:set>
+                                      <p:cBhvr>
+                                        <p:cTn id="20" dur="1" fill="hold">
+                                          <p:stCondLst>
+                                            <p:cond delay="0"/>
+                                          </p:stCondLst>
+                                        </p:cTn>
+                                        <p:tgtEl>
+                                          <p:spTgt spid="11"/>
+                                        </p:tgtEl>
+                                        <p:attrNameLst>
+                                          <p:attrName>style.visibility</p:attrName>
+                                        </p:attrNameLst>
+                                      </p:cBhvr>
+                                      <p:to>
+                                        <p:strVal val="visible"/>
+                                      </p:to>
+                                    </p:set>
+                                  </p:childTnLst>
+                                </p:cTn>
+                              </p:par>
+                              <p:par>
+                                <p:cTn id="21" presetID="1" presetClass="entr" presetSubtype="0" fill="hold" grpId="0" nodeType="withEffect">
+                                  <p:stCondLst>
+                                    <p:cond delay="0"/>
+                                  </p:stCondLst>
+                                  <p:childTnLst>
+                                    <p:set>
+                                      <p:cBhvr>
+                                        <p:cTn id="22" dur="1" fill="hold">
+                                          <p:stCondLst>
+                                            <p:cond delay="0"/>
+                                          </p:stCondLst>
+                                        </p:cTn>
+                                        <p:tgtEl>
+                                          <p:spTgt spid="8"/>
+                                        </p:tgtEl>
+                                        <p:attrNameLst>
+                                          <p:attrName>style.visibility</p:attrName>
+                                        </p:attrNameLst>
+                                      </p:cBhvr>
+                                      <p:to>
+                                        <p:strVal val="visible"/>
+                                      </p:to>
+                                    </p:set>
+                                  </p:childTnLst>
+                                </p:cTn>
+                              </p:par>
+                            </p:childTnLst>
+                          </p:cTn>
+                        </p:par>
+                      </p:childTnLst>
+                    </p:cTn>
+                  </p:par>
+                </p:childTnLst>
+              </p:cTn>
+              <p:prevCondLst>
+                <p:cond evt="onPrev" delay="0">
+                  <p:tgtEl>
+                    <p:sldTgt/>
+                  </p:tgtEl>
+                </p:cond>
+              </p:prevCondLst>
+              <p:nextCondLst>
+                <p:cond evt="onNext" delay="0">
+                  <p:tgtEl>
+                    <p:sldTgt/>
+                  </p:tgtEl>
+                </p:cond>
+              </p:nextCondLst>
+            </p:seq>
+          </p:childTnLst>
+        </p:cTn>
+      </p:par>
+    </p:tnLst>
+    <p:bldLst>
+      <p:bldP spid="2" grpId="0" animBg="1"/>
+      <p:bldP spid="6" grpId="0" animBg="1"/>
+      <p:bldP spid="8" grpId="0"/>
+    </p:bldLst>
+  </p:timing>
+</p:sld>
+</file>
+
+<file path=ppt/slides/slide9.xml><?xml version="1.0" encoding="utf-8"?>
+<p:sld xmlns:a="http://schemas.openxmlformats.org/drawingml/2006/main" xmlns:r="http://schemas.openxmlformats.org/officeDocument/2006/relationships" xmlns:p="http://schemas.openxmlformats.org/presentationml/2006/main">
+  <p:cSld>
+    <p:spTree>
+      <p:nvGrpSpPr>
+        <p:cNvPr id="1" name=""/>
+        <p:cNvGrpSpPr/>
+        <p:nvPr/>
+      </p:nvGrpSpPr>
+      <p:grpSpPr>
+        <a:xfrm>
+          <a:off x="0" y="0"/>
+          <a:ext cx="0" cy="0"/>
+          <a:chOff x="0" y="0"/>
+          <a:chExt cx="0" cy="0"/>
+        </a:xfrm>
+      </p:grpSpPr>
+      <p:pic>
+        <p:nvPicPr>
+          <p:cNvPr id="4" name="图片 3" descr="图片包含 日程表&#10;&#10;AI 生成的内容可能不正确。">
+            <a:extLst>
+              <a:ext uri="{FF2B5EF4-FFF2-40B4-BE49-F238E27FC236}">
+                <a16:creationId xmlns:a16="http://schemas.microsoft.com/office/drawing/2014/main" id="{CD805AF1-A589-0CDF-68BF-7C0208DD15F0}"/>
+              </a:ext>
+            </a:extLst>
+          </p:cNvPr>
+          <p:cNvPicPr>
+            <a:picLocks noChangeAspect="1"/>
+          </p:cNvPicPr>
+          <p:nvPr/>
+        </p:nvPicPr>
+        <p:blipFill>
+          <a:blip r:embed="rId2"/>
+          <a:stretch>
+            <a:fillRect/>
+          </a:stretch>
+        </p:blipFill>
+        <p:spPr>
+          <a:xfrm>
+            <a:off x="174355" y="512376"/>
+            <a:ext cx="11843289" cy="2075425"/>
+          </a:xfrm>
+          <a:prstGeom prst="rect">
+            <a:avLst/>
+          </a:prstGeom>
+        </p:spPr>
+      </p:pic>
+      <p:sp>
+        <p:nvSpPr>
+          <p:cNvPr id="9" name="文本框 8">
+            <a:extLst>
+              <a:ext uri="{FF2B5EF4-FFF2-40B4-BE49-F238E27FC236}">
+                <a16:creationId xmlns:a16="http://schemas.microsoft.com/office/drawing/2014/main" id="{43E11B30-7231-F042-B57E-6FD542B1593A}"/>
+              </a:ext>
+            </a:extLst>
+          </p:cNvPr>
+          <p:cNvSpPr txBox="1"/>
+          <p:nvPr/>
+        </p:nvSpPr>
+        <p:spPr>
+          <a:xfrm>
+            <a:off x="290901" y="96967"/>
+            <a:ext cx="3264556" cy="369332"/>
+          </a:xfrm>
+          <a:prstGeom prst="rect">
+            <a:avLst/>
+          </a:prstGeom>
+          <a:noFill/>
+        </p:spPr>
+        <p:txBody>
+          <a:bodyPr rot="0" spcFirstLastPara="0" vertOverflow="overflow" horzOverflow="overflow" vert="horz" wrap="square" lIns="91440" tIns="45720" rIns="91440" bIns="45720" numCol="1" spcCol="0" rtlCol="0" fromWordArt="0" anchor="t" anchorCtr="0" forceAA="0" compatLnSpc="1">
+            <a:prstTxWarp prst="textNoShape">
+              <a:avLst/>
+            </a:prstTxWarp>
+            <a:spAutoFit/>
+          </a:bodyPr>
+          <a:lstStyle/>
+          <a:p>
+            <a:r>
+              <a:rPr lang="en-US" altLang="zh-CN" dirty="0"/>
+              <a:t>2.</a:t>
+            </a:r>
+            <a:r>
+              <a:rPr lang="zh-CN" altLang="en-US" dirty="0"/>
+              <a:t>改进二： </a:t>
+            </a:r>
+          </a:p>
+        </p:txBody>
+      </p:sp>
+      <p:sp>
+        <p:nvSpPr>
+          <p:cNvPr id="2" name="左大括号 1">
+            <a:extLst>
+              <a:ext uri="{FF2B5EF4-FFF2-40B4-BE49-F238E27FC236}">
+                <a16:creationId xmlns:a16="http://schemas.microsoft.com/office/drawing/2014/main" id="{00CB0F14-856D-D546-E155-AA277FE2013E}"/>
+              </a:ext>
+            </a:extLst>
+          </p:cNvPr>
+          <p:cNvSpPr/>
+          <p:nvPr/>
+        </p:nvSpPr>
+        <p:spPr>
+          <a:xfrm rot="16200000">
+            <a:off x="1328364" y="2316505"/>
+            <a:ext cx="2224989" cy="834760"/>
+          </a:xfrm>
+          <a:prstGeom prst="leftBrace">
+            <a:avLst/>
+          </a:prstGeom>
+        </p:spPr>
+        <p:style>
+          <a:lnRef idx="2">
+            <a:schemeClr val="accent1"/>
+          </a:lnRef>
+          <a:fillRef idx="0">
+            <a:schemeClr val="accent1"/>
+          </a:fillRef>
+          <a:effectRef idx="1">
+            <a:schemeClr val="accent1"/>
+          </a:effectRef>
+          <a:fontRef idx="minor">
+            <a:schemeClr val="tx1"/>
+          </a:fontRef>
+        </p:style>
+        <p:txBody>
+          <a:bodyPr rtlCol="0" anchor="ctr"/>
+          <a:lstStyle/>
+          <a:p>
+            <a:pPr algn="ctr"/>
+            <a:endParaRPr lang="zh-CN" altLang="en-US" dirty="0"/>
+          </a:p>
+        </p:txBody>
+      </p:sp>
+      <p:sp>
+        <p:nvSpPr>
+          <p:cNvPr id="3" name="左大括号 2">
+            <a:extLst>
+              <a:ext uri="{FF2B5EF4-FFF2-40B4-BE49-F238E27FC236}">
+                <a16:creationId xmlns:a16="http://schemas.microsoft.com/office/drawing/2014/main" id="{8EAF3DA2-1682-5EBE-269A-DE5C5FEA553E}"/>
+              </a:ext>
+            </a:extLst>
+          </p:cNvPr>
+          <p:cNvSpPr/>
+          <p:nvPr/>
+        </p:nvSpPr>
+        <p:spPr>
+          <a:xfrm rot="16200000">
+            <a:off x="6301031" y="2295366"/>
+            <a:ext cx="2142400" cy="959627"/>
+          </a:xfrm>
+          <a:prstGeom prst="leftBrace">
+            <a:avLst/>
+          </a:prstGeom>
+        </p:spPr>
+        <p:style>
+          <a:lnRef idx="2">
+            <a:schemeClr val="accent1"/>
+          </a:lnRef>
+          <a:fillRef idx="0">
+            <a:schemeClr val="accent1"/>
+          </a:fillRef>
+          <a:effectRef idx="1">
+            <a:schemeClr val="accent1"/>
+          </a:effectRef>
+          <a:fontRef idx="minor">
+            <a:schemeClr val="tx1"/>
+          </a:fontRef>
+        </p:style>
+        <p:txBody>
+          <a:bodyPr rtlCol="0" anchor="ctr"/>
+          <a:lstStyle/>
+          <a:p>
+            <a:pPr algn="ctr"/>
+            <a:endParaRPr lang="zh-CN" altLang="en-US"/>
+          </a:p>
+        </p:txBody>
+      </p:sp>
+      <p:sp>
+        <p:nvSpPr>
+          <p:cNvPr id="5" name="文本框 4">
+            <a:extLst>
+              <a:ext uri="{FF2B5EF4-FFF2-40B4-BE49-F238E27FC236}">
+                <a16:creationId xmlns:a16="http://schemas.microsoft.com/office/drawing/2014/main" id="{867DF3BF-2B57-B0DB-CBCB-A2E27E6927F3}"/>
+              </a:ext>
+            </a:extLst>
+          </p:cNvPr>
+          <p:cNvSpPr txBox="1"/>
+          <p:nvPr/>
+        </p:nvSpPr>
+        <p:spPr>
+          <a:xfrm>
+            <a:off x="2638380" y="3846380"/>
+            <a:ext cx="4632847" cy="646331"/>
+          </a:xfrm>
+          <a:prstGeom prst="rect">
+            <a:avLst/>
+          </a:prstGeom>
+          <a:noFill/>
+        </p:spPr>
+        <p:txBody>
+          <a:bodyPr wrap="square" rtlCol="0">
+            <a:spAutoFit/>
+          </a:bodyPr>
+          <a:lstStyle/>
+          <a:p>
+            <a:r>
+              <a:rPr lang="en-US" altLang="zh-CN" dirty="0"/>
+              <a:t>prefill</a:t>
+            </a:r>
+            <a:r>
+              <a:rPr lang="zh-CN" altLang="en-US" dirty="0"/>
+              <a:t>，</a:t>
+            </a:r>
+            <a:r>
+              <a:rPr lang="en-US" altLang="zh-CN" dirty="0"/>
+              <a:t>decode </a:t>
+            </a:r>
+            <a:r>
+              <a:rPr lang="zh-CN" altLang="en-US" dirty="0"/>
+              <a:t>阶段共用 </a:t>
+            </a:r>
+            <a:r>
+              <a:rPr lang="en-US" altLang="zh-CN" dirty="0" err="1"/>
+              <a:t>mixtral</a:t>
+            </a:r>
+            <a:r>
+              <a:rPr lang="en-US" altLang="zh-CN" dirty="0"/>
+              <a:t>-forward</a:t>
+            </a:r>
+            <a:r>
+              <a:rPr lang="zh-CN" altLang="en-US" dirty="0"/>
+              <a:t>， 在</a:t>
+            </a:r>
+            <a:r>
+              <a:rPr lang="en-US" altLang="zh-CN" dirty="0"/>
+              <a:t>decode</a:t>
+            </a:r>
+            <a:r>
+              <a:rPr lang="zh-CN" altLang="en-US" dirty="0"/>
+              <a:t>阶段， 会产生不必要的专家轮询</a:t>
+            </a:r>
+          </a:p>
+        </p:txBody>
+      </p:sp>
+      <p:sp>
+        <p:nvSpPr>
+          <p:cNvPr id="6" name="箭头: 下 5">
+            <a:extLst>
+              <a:ext uri="{FF2B5EF4-FFF2-40B4-BE49-F238E27FC236}">
+                <a16:creationId xmlns:a16="http://schemas.microsoft.com/office/drawing/2014/main" id="{E312A309-EF25-46EE-3063-53784FFC4F4C}"/>
+              </a:ext>
+            </a:extLst>
+          </p:cNvPr>
+          <p:cNvSpPr/>
+          <p:nvPr/>
+        </p:nvSpPr>
+        <p:spPr>
+          <a:xfrm>
+            <a:off x="4371422" y="4542503"/>
+            <a:ext cx="696124" cy="646331"/>
+          </a:xfrm>
+          <a:prstGeom prst="downArrow">
+            <a:avLst/>
+          </a:prstGeom>
+        </p:spPr>
+        <p:style>
+          <a:lnRef idx="2">
+            <a:schemeClr val="accent1">
+              <a:shade val="15000"/>
+            </a:schemeClr>
+          </a:lnRef>
+          <a:fillRef idx="1">
+            <a:schemeClr val="accent1"/>
+          </a:fillRef>
+          <a:effectRef idx="0">
+            <a:schemeClr val="accent1"/>
+          </a:effectRef>
+          <a:fontRef idx="minor">
+            <a:schemeClr val="lt1"/>
+          </a:fontRef>
+        </p:style>
+        <p:txBody>
+          <a:bodyPr rtlCol="0" anchor="ctr"/>
+          <a:lstStyle/>
+          <a:p>
+            <a:pPr algn="ctr"/>
+            <a:endParaRPr lang="zh-CN" altLang="en-US"/>
+          </a:p>
+        </p:txBody>
+      </p:sp>
+      <p:sp>
+        <p:nvSpPr>
+          <p:cNvPr id="8" name="文本框 7">
+            <a:extLst>
+              <a:ext uri="{FF2B5EF4-FFF2-40B4-BE49-F238E27FC236}">
+                <a16:creationId xmlns:a16="http://schemas.microsoft.com/office/drawing/2014/main" id="{E85016C2-8820-D1B2-9A07-1DEED0C57290}"/>
+              </a:ext>
+            </a:extLst>
+          </p:cNvPr>
+          <p:cNvSpPr txBox="1"/>
+          <p:nvPr/>
+        </p:nvSpPr>
+        <p:spPr>
+          <a:xfrm>
+            <a:off x="5156036" y="4725383"/>
+            <a:ext cx="1834699" cy="369332"/>
+          </a:xfrm>
+          <a:prstGeom prst="rect">
+            <a:avLst/>
+          </a:prstGeom>
+          <a:noFill/>
+        </p:spPr>
+        <p:txBody>
+          <a:bodyPr wrap="square" rtlCol="0">
+            <a:spAutoFit/>
+          </a:bodyPr>
+          <a:lstStyle/>
+          <a:p>
+            <a:r>
+              <a:rPr lang="zh-CN" altLang="en-US" dirty="0"/>
+              <a:t>向源代码添加</a:t>
+            </a:r>
+            <a:endParaRPr lang="en-US" altLang="zh-CN" dirty="0"/>
+          </a:p>
+        </p:txBody>
+      </p:sp>
+      <p:pic>
+        <p:nvPicPr>
+          <p:cNvPr id="11" name="图片 10">
+            <a:extLst>
+              <a:ext uri="{FF2B5EF4-FFF2-40B4-BE49-F238E27FC236}">
+                <a16:creationId xmlns:a16="http://schemas.microsoft.com/office/drawing/2014/main" id="{D739F321-7DC7-5646-B829-087A517405FE}"/>
+              </a:ext>
+            </a:extLst>
+          </p:cNvPr>
+          <p:cNvPicPr>
+            <a:picLocks noChangeAspect="1"/>
+          </p:cNvPicPr>
+          <p:nvPr/>
+        </p:nvPicPr>
+        <p:blipFill>
+          <a:blip r:embed="rId3"/>
+          <a:stretch>
+            <a:fillRect/>
+          </a:stretch>
+        </p:blipFill>
+        <p:spPr>
+          <a:xfrm>
+            <a:off x="1534559" y="5327387"/>
+            <a:ext cx="6840488" cy="598715"/>
+          </a:xfrm>
+          <a:prstGeom prst="rect">
+            <a:avLst/>
+          </a:prstGeom>
+        </p:spPr>
+      </p:pic>
+    </p:spTree>
+    <p:extLst>
+      <p:ext uri="{BB962C8B-B14F-4D97-AF65-F5344CB8AC3E}">
+        <p14:creationId xmlns:p14="http://schemas.microsoft.com/office/powerpoint/2010/main" val="200528959"/>
+      </p:ext>
+    </p:extLst>
+  </p:cSld>
+  <p:clrMapOvr>
+    <a:masterClrMapping/>
+  </p:clrMapOvr>
+  <p:timing>
+    <p:tnLst>
+      <p:par>
+        <p:cTn id="1" dur="indefinite" restart="never" nodeType="tmRoot">
+          <p:childTnLst>
+            <p:seq concurrent="1" nextAc="seek">
+              <p:cTn id="2" dur="indefinite" nodeType="mainSeq">
+                <p:childTnLst>
+                  <p:par>
+                    <p:cTn id="3" fill="hold">
+                      <p:stCondLst>
+                        <p:cond delay="indefinite"/>
+                      </p:stCondLst>
+                      <p:childTnLst>
+                        <p:par>
+                          <p:cTn id="4" fill="hold">
+                            <p:stCondLst>
+                              <p:cond delay="0"/>
+                            </p:stCondLst>
+                            <p:childTnLst>
+                              <p:par>
+                                <p:cTn id="5" presetID="2" presetClass="entr" presetSubtype="4" fill="hold" grpId="0" nodeType="clickEffect">
+                                  <p:stCondLst>
+                                    <p:cond delay="0"/>
+                                  </p:stCondLst>
+                                  <p:childTnLst>
+                                    <p:set>
+                                      <p:cBhvr>
+                                        <p:cTn id="6" dur="1" fill="hold">
+                                          <p:stCondLst>
+                                            <p:cond delay="0"/>
+                                          </p:stCondLst>
+                                        </p:cTn>
+                                        <p:tgtEl>
+                                          <p:spTgt spid="3"/>
+                                        </p:tgtEl>
+                                        <p:attrNameLst>
+                                          <p:attrName>style.visibility</p:attrName>
+                                        </p:attrNameLst>
+                                      </p:cBhvr>
+                                      <p:to>
+                                        <p:strVal val="visible"/>
+                                      </p:to>
+                                    </p:set>
+                                    <p:anim calcmode="lin" valueType="num">
+                                      <p:cBhvr additive="base">
+                                        <p:cTn id="7" dur="500" fill="hold"/>
+                                        <p:tgtEl>
+                                          <p:spTgt spid="3"/>
+                                        </p:tgtEl>
+                                        <p:attrNameLst>
+                                          <p:attrName>ppt_x</p:attrName>
+                                        </p:attrNameLst>
+                                      </p:cBhvr>
+                                      <p:tavLst>
+                                        <p:tav tm="0">
+                                          <p:val>
+                                            <p:strVal val="#ppt_x"/>
+                                          </p:val>
+                                        </p:tav>
+                                        <p:tav tm="100000">
+                                          <p:val>
+                                            <p:strVal val="#ppt_x"/>
+                                          </p:val>
+                                        </p:tav>
+                                      </p:tavLst>
+                                    </p:anim>
+                                    <p:anim calcmode="lin" valueType="num">
+                                      <p:cBhvr additive="base">
+                                        <p:cTn id="8" dur="500" fill="hold"/>
+                                        <p:tgtEl>
+                                          <p:spTgt spid="3"/>
+                                        </p:tgtEl>
+                                        <p:attrNameLst>
+                                          <p:attrName>ppt_y</p:attrName>
+                                        </p:attrNameLst>
+                                      </p:cBhvr>
+                                      <p:tavLst>
+                                        <p:tav tm="0">
+                                          <p:val>
+                                            <p:strVal val="1+#ppt_h/2"/>
+                                          </p:val>
+                                        </p:tav>
+                                        <p:tav tm="100000">
+                                          <p:val>
+                                            <p:strVal val="#ppt_y"/>
+                                          </p:val>
+                                        </p:tav>
+                                      </p:tavLst>
+                                    </p:anim>
+                                  </p:childTnLst>
+                                </p:cTn>
+                              </p:par>
+                              <p:par>
+                                <p:cTn id="9" presetID="2" presetClass="entr" presetSubtype="4" fill="hold" grpId="0" nodeType="withEffect">
+                                  <p:stCondLst>
+                                    <p:cond delay="0"/>
+                                  </p:stCondLst>
+                                  <p:childTnLst>
+                                    <p:set>
+                                      <p:cBhvr>
+                                        <p:cTn id="10" dur="1" fill="hold">
+                                          <p:stCondLst>
+                                            <p:cond delay="0"/>
+                                          </p:stCondLst>
+                                        </p:cTn>
+                                        <p:tgtEl>
+                                          <p:spTgt spid="2"/>
+                                        </p:tgtEl>
+                                        <p:attrNameLst>
+                                          <p:attrName>style.visibility</p:attrName>
+                                        </p:attrNameLst>
+                                      </p:cBhvr>
+                                      <p:to>
+                                        <p:strVal val="visible"/>
+                                      </p:to>
+                                    </p:set>
+                                    <p:anim calcmode="lin" valueType="num">
+                                      <p:cBhvr additive="base">
+                                        <p:cTn id="11" dur="500" fill="hold"/>
+                                        <p:tgtEl>
+                                          <p:spTgt spid="2"/>
+                                        </p:tgtEl>
+                                        <p:attrNameLst>
+                                          <p:attrName>ppt_x</p:attrName>
+                                        </p:attrNameLst>
+                                      </p:cBhvr>
+                                      <p:tavLst>
+                                        <p:tav tm="0">
+                                          <p:val>
+                                            <p:strVal val="#ppt_x"/>
+                                          </p:val>
+                                        </p:tav>
+                                        <p:tav tm="100000">
+                                          <p:val>
+                                            <p:strVal val="#ppt_x"/>
+                                          </p:val>
+                                        </p:tav>
+                                      </p:tavLst>
+                                    </p:anim>
+                                    <p:anim calcmode="lin" valueType="num">
+                                      <p:cBhvr additive="base">
+                                        <p:cTn id="12" dur="500" fill="hold"/>
+                                        <p:tgtEl>
+                                          <p:spTgt spid="2"/>
+                                        </p:tgtEl>
+                                        <p:attrNameLst>
+                                          <p:attrName>ppt_y</p:attrName>
+                                        </p:attrNameLst>
+                                      </p:cBhvr>
+                                      <p:tavLst>
+                                        <p:tav tm="0">
+                                          <p:val>
+                                            <p:strVal val="1+#ppt_h/2"/>
+                                          </p:val>
+                                        </p:tav>
+                                        <p:tav tm="100000">
+                                          <p:val>
+                                            <p:strVal val="#ppt_y"/>
+                                          </p:val>
+                                        </p:tav>
+                                      </p:tavLst>
+                                    </p:anim>
+                                  </p:childTnLst>
+                                </p:cTn>
+                              </p:par>
+                              <p:par>
+                                <p:cTn id="13" presetID="2" presetClass="entr" presetSubtype="4" fill="hold" grpId="0" nodeType="withEffect">
+                                  <p:stCondLst>
+                                    <p:cond delay="0"/>
+                                  </p:stCondLst>
+                                  <p:childTnLst>
+                                    <p:set>
+                                      <p:cBhvr>
+                                        <p:cTn id="14" dur="1" fill="hold">
+                                          <p:stCondLst>
+                                            <p:cond delay="0"/>
+                                          </p:stCondLst>
+                                        </p:cTn>
+                                        <p:tgtEl>
+                                          <p:spTgt spid="5"/>
+                                        </p:tgtEl>
+                                        <p:attrNameLst>
+                                          <p:attrName>style.visibility</p:attrName>
+                                        </p:attrNameLst>
+                                      </p:cBhvr>
+                                      <p:to>
+                                        <p:strVal val="visible"/>
+                                      </p:to>
+                                    </p:set>
+                                    <p:anim calcmode="lin" valueType="num">
+                                      <p:cBhvr additive="base">
+                                        <p:cTn id="15" dur="500" fill="hold"/>
+                                        <p:tgtEl>
+                                          <p:spTgt spid="5"/>
+                                        </p:tgtEl>
+                                        <p:attrNameLst>
+                                          <p:attrName>ppt_x</p:attrName>
+                                        </p:attrNameLst>
+                                      </p:cBhvr>
+                                      <p:tavLst>
+                                        <p:tav tm="0">
+                                          <p:val>
+                                            <p:strVal val="#ppt_x"/>
+                                          </p:val>
+                                        </p:tav>
+                                        <p:tav tm="100000">
+                                          <p:val>
+                                            <p:strVal val="#ppt_x"/>
+                                          </p:val>
+                                        </p:tav>
+                                      </p:tavLst>
+                                    </p:anim>
+                                    <p:anim calcmode="lin" valueType="num">
+                                      <p:cBhvr additive="base">
+                                        <p:cTn id="16" dur="500" fill="hold"/>
+                                        <p:tgtEl>
+                                          <p:spTgt spid="5"/>
+                                        </p:tgtEl>
+                                        <p:attrNameLst>
+                                          <p:attrName>ppt_y</p:attrName>
+                                        </p:attrNameLst>
+                                      </p:cBhvr>
+                                      <p:tavLst>
+                                        <p:tav tm="0">
+                                          <p:val>
+                                            <p:strVal val="1+#ppt_h/2"/>
+                                          </p:val>
+                                        </p:tav>
+                                        <p:tav tm="100000">
+                                          <p:val>
+                                            <p:strVal val="#ppt_y"/>
+                                          </p:val>
+                                        </p:tav>
+                                      </p:tavLst>
+                                    </p:anim>
+                                  </p:childTnLst>
+                                </p:cTn>
+                              </p:par>
+                            </p:childTnLst>
+                          </p:cTn>
+                        </p:par>
+                      </p:childTnLst>
+                    </p:cTn>
+                  </p:par>
+                  <p:par>
+                    <p:cTn id="17" fill="hold">
+                      <p:stCondLst>
+                        <p:cond delay="indefinite"/>
+                      </p:stCondLst>
+                      <p:childTnLst>
+                        <p:par>
+                          <p:cTn id="18" fill="hold">
+                            <p:stCondLst>
+                              <p:cond delay="0"/>
+                            </p:stCondLst>
+                            <p:childTnLst>
+                              <p:par>
+                                <p:cTn id="19" presetID="2" presetClass="entr" presetSubtype="4" fill="hold" grpId="0" nodeType="clickEffect">
+                                  <p:stCondLst>
+                                    <p:cond delay="0"/>
+                                  </p:stCondLst>
+                                  <p:childTnLst>
+                                    <p:set>
+                                      <p:cBhvr>
+                                        <p:cTn id="20" dur="1" fill="hold">
+                                          <p:stCondLst>
+                                            <p:cond delay="0"/>
+                                          </p:stCondLst>
+                                        </p:cTn>
+                                        <p:tgtEl>
+                                          <p:spTgt spid="8"/>
+                                        </p:tgtEl>
+                                        <p:attrNameLst>
+                                          <p:attrName>style.visibility</p:attrName>
+                                        </p:attrNameLst>
+                                      </p:cBhvr>
+                                      <p:to>
+                                        <p:strVal val="visible"/>
+                                      </p:to>
+                                    </p:set>
+                                    <p:anim calcmode="lin" valueType="num">
+                                      <p:cBhvr additive="base">
+                                        <p:cTn id="21" dur="500" fill="hold"/>
+                                        <p:tgtEl>
+                                          <p:spTgt spid="8"/>
+                                        </p:tgtEl>
+                                        <p:attrNameLst>
+                                          <p:attrName>ppt_x</p:attrName>
+                                        </p:attrNameLst>
+                                      </p:cBhvr>
+                                      <p:tavLst>
+                                        <p:tav tm="0">
+                                          <p:val>
+                                            <p:strVal val="#ppt_x"/>
+                                          </p:val>
+                                        </p:tav>
+                                        <p:tav tm="100000">
+                                          <p:val>
+                                            <p:strVal val="#ppt_x"/>
+                                          </p:val>
+                                        </p:tav>
+                                      </p:tavLst>
+                                    </p:anim>
+                                    <p:anim calcmode="lin" valueType="num">
+                                      <p:cBhvr additive="base">
+                                        <p:cTn id="22" dur="500" fill="hold"/>
+                                        <p:tgtEl>
+                                          <p:spTgt spid="8"/>
+                                        </p:tgtEl>
+                                        <p:attrNameLst>
+                                          <p:attrName>ppt_y</p:attrName>
+                                        </p:attrNameLst>
+                                      </p:cBhvr>
+                                      <p:tavLst>
+                                        <p:tav tm="0">
+                                          <p:val>
+                                            <p:strVal val="1+#ppt_h/2"/>
+                                          </p:val>
+                                        </p:tav>
+                                        <p:tav tm="100000">
+                                          <p:val>
+                                            <p:strVal val="#ppt_y"/>
+                                          </p:val>
+                                        </p:tav>
+                                      </p:tavLst>
+                                    </p:anim>
+                                  </p:childTnLst>
+                                </p:cTn>
+                              </p:par>
+                              <p:par>
+                                <p:cTn id="23" presetID="2" presetClass="entr" presetSubtype="4" fill="hold" grpId="0" nodeType="withEffect">
+                                  <p:stCondLst>
+                                    <p:cond delay="0"/>
+                                  </p:stCondLst>
+                                  <p:childTnLst>
+                                    <p:set>
+                                      <p:cBhvr>
+                                        <p:cTn id="24" dur="1" fill="hold">
+                                          <p:stCondLst>
+                                            <p:cond delay="0"/>
+                                          </p:stCondLst>
+                                        </p:cTn>
+                                        <p:tgtEl>
+                                          <p:spTgt spid="6"/>
+                                        </p:tgtEl>
+                                        <p:attrNameLst>
+                                          <p:attrName>style.visibility</p:attrName>
+                                        </p:attrNameLst>
+                                      </p:cBhvr>
+                                      <p:to>
+                                        <p:strVal val="visible"/>
+                                      </p:to>
+                                    </p:set>
+                                    <p:anim calcmode="lin" valueType="num">
+                                      <p:cBhvr additive="base">
+                                        <p:cTn id="25" dur="500" fill="hold"/>
+                                        <p:tgtEl>
+                                          <p:spTgt spid="6"/>
+                                        </p:tgtEl>
+                                        <p:attrNameLst>
+                                          <p:attrName>ppt_x</p:attrName>
+                                        </p:attrNameLst>
+                                      </p:cBhvr>
+                                      <p:tavLst>
+                                        <p:tav tm="0">
+                                          <p:val>
+                                            <p:strVal val="#ppt_x"/>
+                                          </p:val>
+                                        </p:tav>
+                                        <p:tav tm="100000">
+                                          <p:val>
+                                            <p:strVal val="#ppt_x"/>
+                                          </p:val>
+                                        </p:tav>
+                                      </p:tavLst>
+                                    </p:anim>
+                                    <p:anim calcmode="lin" valueType="num">
+                                      <p:cBhvr additive="base">
+                                        <p:cTn id="26" dur="500" fill="hold"/>
+                                        <p:tgtEl>
+                                          <p:spTgt spid="6"/>
+                                        </p:tgtEl>
+                                        <p:attrNameLst>
+                                          <p:attrName>ppt_y</p:attrName>
+                                        </p:attrNameLst>
+                                      </p:cBhvr>
+                                      <p:tavLst>
+                                        <p:tav tm="0">
+                                          <p:val>
+                                            <p:strVal val="1+#ppt_h/2"/>
+                                          </p:val>
+                                        </p:tav>
+                                        <p:tav tm="100000">
+                                          <p:val>
+                                            <p:strVal val="#ppt_y"/>
+                                          </p:val>
+                                        </p:tav>
+                                      </p:tavLst>
+                                    </p:anim>
+                                  </p:childTnLst>
+                                </p:cTn>
+                              </p:par>
+                              <p:par>
+                                <p:cTn id="27" presetID="2" presetClass="entr" presetSubtype="4" fill="hold" nodeType="withEffect">
+                                  <p:stCondLst>
+                                    <p:cond delay="0"/>
+                                  </p:stCondLst>
+                                  <p:childTnLst>
+                                    <p:set>
+                                      <p:cBhvr>
+                                        <p:cTn id="28" dur="1" fill="hold">
+                                          <p:stCondLst>
+                                            <p:cond delay="0"/>
+                                          </p:stCondLst>
+                                        </p:cTn>
+                                        <p:tgtEl>
+                                          <p:spTgt spid="11"/>
+                                        </p:tgtEl>
+                                        <p:attrNameLst>
+                                          <p:attrName>style.visibility</p:attrName>
+                                        </p:attrNameLst>
+                                      </p:cBhvr>
+                                      <p:to>
+                                        <p:strVal val="visible"/>
+                                      </p:to>
+                                    </p:set>
+                                    <p:anim calcmode="lin" valueType="num">
+                                      <p:cBhvr additive="base">
+                                        <p:cTn id="29" dur="500" fill="hold"/>
+                                        <p:tgtEl>
+                                          <p:spTgt spid="11"/>
+                                        </p:tgtEl>
+                                        <p:attrNameLst>
+                                          <p:attrName>ppt_x</p:attrName>
+                                        </p:attrNameLst>
+                                      </p:cBhvr>
+                                      <p:tavLst>
+                                        <p:tav tm="0">
+                                          <p:val>
+                                            <p:strVal val="#ppt_x"/>
+                                          </p:val>
+                                        </p:tav>
+                                        <p:tav tm="100000">
+                                          <p:val>
+                                            <p:strVal val="#ppt_x"/>
+                                          </p:val>
+                                        </p:tav>
+                                      </p:tavLst>
+                                    </p:anim>
+                                    <p:anim calcmode="lin" valueType="num">
+                                      <p:cBhvr additive="base">
+                                        <p:cTn id="30" dur="500" fill="hold"/>
+                                        <p:tgtEl>
+                                          <p:spTgt spid="11"/>
+                                        </p:tgtEl>
+                                        <p:attrNameLst>
+                                          <p:attrName>ppt_y</p:attrName>
+                                        </p:attrNameLst>
+                                      </p:cBhvr>
+                                      <p:tavLst>
+                                        <p:tav tm="0">
+                                          <p:val>
+                                            <p:strVal val="1+#ppt_h/2"/>
+                                          </p:val>
+                                        </p:tav>
+                                        <p:tav tm="100000">
+                                          <p:val>
+                                            <p:strVal val="#ppt_y"/>
+                                          </p:val>
+                                        </p:tav>
+                                      </p:tavLst>
+                                    </p:anim>
+                                  </p:childTnLst>
+                                </p:cTn>
+                              </p:par>
+                            </p:childTnLst>
+                          </p:cTn>
+                        </p:par>
+                      </p:childTnLst>
+                    </p:cTn>
+                  </p:par>
+                </p:childTnLst>
+              </p:cTn>
+              <p:prevCondLst>
+                <p:cond evt="onPrev" delay="0">
+                  <p:tgtEl>
+                    <p:sldTgt/>
+                  </p:tgtEl>
+                </p:cond>
+              </p:prevCondLst>
+              <p:nextCondLst>
+                <p:cond evt="onNext" delay="0">
+                  <p:tgtEl>
+                    <p:sldTgt/>
+                  </p:tgtEl>
+                </p:cond>
+              </p:nextCondLst>
+            </p:seq>
+          </p:childTnLst>
+        </p:cTn>
+      </p:par>
+    </p:tnLst>
+    <p:bldLst>
+      <p:bldP spid="2" grpId="0" animBg="1"/>
+      <p:bldP spid="3" grpId="0" animBg="1"/>
+      <p:bldP spid="5" grpId="0"/>
+      <p:bldP spid="6" grpId="0" animBg="1"/>
+      <p:bldP spid="8" grpId="0"/>
+    </p:bldLst>
+  </p:timing>
 </p:sld>
 </file>
 
